--- a/Présentation ARDoISE JE 05_12_23.pptx
+++ b/Présentation ARDoISE JE 05_12_23.pptx
@@ -30,24 +30,23 @@
     <p:sldId id="275" r:id="rId25"/>
     <p:sldId id="276" r:id="rId26"/>
     <p:sldId id="277" r:id="rId27"/>
-    <p:sldId id="278" r:id="rId28"/>
   </p:sldIdLst>
   <p:sldSz cy="5143500" cx="9144000"/>
   <p:notesSz cx="6858000" cy="9144000"/>
   <p:embeddedFontLst>
     <p:embeddedFont>
       <p:font typeface="Raleway"/>
-      <p:regular r:id="rId29"/>
-      <p:bold r:id="rId30"/>
-      <p:italic r:id="rId31"/>
-      <p:boldItalic r:id="rId32"/>
+      <p:regular r:id="rId28"/>
+      <p:bold r:id="rId29"/>
+      <p:italic r:id="rId30"/>
+      <p:boldItalic r:id="rId31"/>
     </p:embeddedFont>
     <p:embeddedFont>
       <p:font typeface="Lato"/>
-      <p:regular r:id="rId33"/>
-      <p:bold r:id="rId34"/>
-      <p:italic r:id="rId35"/>
-      <p:boldItalic r:id="rId36"/>
+      <p:regular r:id="rId32"/>
+      <p:bold r:id="rId33"/>
+      <p:italic r:id="rId34"/>
+      <p:boldItalic r:id="rId35"/>
     </p:embeddedFont>
   </p:embeddedFontLst>
   <p:defaultTextStyle>
@@ -1042,7 +1041,7 @@
       </p:grpSpPr>
       <p:sp>
         <p:nvSpPr>
-          <p:cNvPr id="263" name="Google Shape;263;g2c08732e91d_0_0:notes"/>
+          <p:cNvPr id="263" name="Google Shape;263;g1ec50aebef9_0_892:notes"/>
           <p:cNvSpPr/>
           <p:nvPr>
             <p:ph idx="2" type="sldImg"/>
@@ -1077,7 +1076,7 @@
       </p:sp>
       <p:sp>
         <p:nvSpPr>
-          <p:cNvPr id="264" name="Google Shape;264;g2c08732e91d_0_0:notes"/>
+          <p:cNvPr id="264" name="Google Shape;264;g1ec50aebef9_0_892:notes"/>
           <p:cNvSpPr txBox="1"/>
           <p:nvPr>
             <p:ph idx="1" type="body"/>
@@ -1098,17 +1097,653 @@
           </a:bodyPr>
           <a:lstStyle/>
           <a:p>
-            <a:pPr indent="0" lvl="0" marL="0" rtl="0" algn="l">
-              <a:spcBef>
-                <a:spcPts val="0"/>
-              </a:spcBef>
-              <a:spcAft>
-                <a:spcPts val="0"/>
-              </a:spcAft>
-              <a:buNone/>
-            </a:pPr>
-            <a:r>
-              <a:t/>
+            <a:pPr indent="0" lvl="0" marL="457200" rtl="0" algn="l">
+              <a:lnSpc>
+                <a:spcPct val="95000"/>
+              </a:lnSpc>
+              <a:spcBef>
+                <a:spcPts val="1200"/>
+              </a:spcBef>
+              <a:spcAft>
+                <a:spcPts val="0"/>
+              </a:spcAft>
+              <a:buNone/>
+            </a:pPr>
+            <a:r>
+              <a:rPr lang="fr" sz="1150">
+                <a:solidFill>
+                  <a:srgbClr val="595959"/>
+                </a:solidFill>
+                <a:latin typeface="Lato"/>
+                <a:ea typeface="Lato"/>
+                <a:cs typeface="Lato"/>
+                <a:sym typeface="Lato"/>
+              </a:rPr>
+              <a:t>Fiona</a:t>
+            </a:r>
+            <a:endParaRPr sz="1150">
+              <a:solidFill>
+                <a:srgbClr val="595959"/>
+              </a:solidFill>
+              <a:latin typeface="Lato"/>
+              <a:ea typeface="Lato"/>
+              <a:cs typeface="Lato"/>
+              <a:sym typeface="Lato"/>
+            </a:endParaRPr>
+          </a:p>
+          <a:p>
+            <a:pPr indent="0" lvl="0" marL="457200" rtl="0" algn="l">
+              <a:lnSpc>
+                <a:spcPct val="95000"/>
+              </a:lnSpc>
+              <a:spcBef>
+                <a:spcPts val="1200"/>
+              </a:spcBef>
+              <a:spcAft>
+                <a:spcPts val="0"/>
+              </a:spcAft>
+              <a:buNone/>
+            </a:pPr>
+            <a:r>
+              <a:rPr lang="fr" sz="1150">
+                <a:solidFill>
+                  <a:srgbClr val="595959"/>
+                </a:solidFill>
+                <a:latin typeface="Lato"/>
+                <a:ea typeface="Lato"/>
+                <a:cs typeface="Lato"/>
+                <a:sym typeface="Lato"/>
+              </a:rPr>
+              <a:t>Simplification pour les chercheurs, pour qu’ils puissent s’adresser à un point d’entrée unique. Mise en place d’un guichet unique qui figure sur différentes interfaces : pages science ouverte, DMP opidor, via les documents fournis par les directions de la recherche ou via le SI dédié pour une meilleure visibilité</a:t>
+            </a:r>
+            <a:endParaRPr sz="1150">
+              <a:solidFill>
+                <a:srgbClr val="595959"/>
+              </a:solidFill>
+              <a:latin typeface="Lato"/>
+              <a:ea typeface="Lato"/>
+              <a:cs typeface="Lato"/>
+              <a:sym typeface="Lato"/>
+            </a:endParaRPr>
+          </a:p>
+          <a:p>
+            <a:pPr indent="0" lvl="0" marL="457200" rtl="0" algn="l">
+              <a:lnSpc>
+                <a:spcPct val="95000"/>
+              </a:lnSpc>
+              <a:spcBef>
+                <a:spcPts val="1200"/>
+              </a:spcBef>
+              <a:spcAft>
+                <a:spcPts val="0"/>
+              </a:spcAft>
+              <a:buNone/>
+            </a:pPr>
+            <a:r>
+              <a:rPr lang="fr" sz="1150">
+                <a:solidFill>
+                  <a:srgbClr val="595959"/>
+                </a:solidFill>
+                <a:latin typeface="Lato"/>
+                <a:ea typeface="Lato"/>
+                <a:cs typeface="Lato"/>
+                <a:sym typeface="Lato"/>
+              </a:rPr>
+              <a:t>Ensage d’étudier à moyen terme la mise en place d’un outil plus efficace pour gérer les demandes qui permettra un suivi plus sûr, calendrier en fonction des solutions proposées par le GT 1 des ADLD</a:t>
+            </a:r>
+            <a:endParaRPr sz="1150">
+              <a:solidFill>
+                <a:srgbClr val="595959"/>
+              </a:solidFill>
+              <a:latin typeface="Lato"/>
+              <a:ea typeface="Lato"/>
+              <a:cs typeface="Lato"/>
+              <a:sym typeface="Lato"/>
+            </a:endParaRPr>
+          </a:p>
+          <a:p>
+            <a:pPr indent="0" lvl="0" marL="457200" rtl="0" algn="l">
+              <a:lnSpc>
+                <a:spcPct val="95000"/>
+              </a:lnSpc>
+              <a:spcBef>
+                <a:spcPts val="1200"/>
+              </a:spcBef>
+              <a:spcAft>
+                <a:spcPts val="0"/>
+              </a:spcAft>
+              <a:buNone/>
+            </a:pPr>
+            <a:r>
+              <a:rPr lang="fr" sz="1150">
+                <a:solidFill>
+                  <a:srgbClr val="595959"/>
+                </a:solidFill>
+                <a:latin typeface="Lato"/>
+                <a:ea typeface="Lato"/>
+                <a:cs typeface="Lato"/>
+                <a:sym typeface="Lato"/>
+              </a:rPr>
+              <a:t>L’adresse figure à différents endroits pour être plus visible</a:t>
+            </a:r>
+            <a:endParaRPr sz="1150">
+              <a:solidFill>
+                <a:srgbClr val="595959"/>
+              </a:solidFill>
+              <a:latin typeface="Lato"/>
+              <a:ea typeface="Lato"/>
+              <a:cs typeface="Lato"/>
+              <a:sym typeface="Lato"/>
+            </a:endParaRPr>
+          </a:p>
+          <a:p>
+            <a:pPr indent="-301625" lvl="0" marL="457200" rtl="0" algn="l">
+              <a:lnSpc>
+                <a:spcPct val="95000"/>
+              </a:lnSpc>
+              <a:spcBef>
+                <a:spcPts val="1200"/>
+              </a:spcBef>
+              <a:spcAft>
+                <a:spcPts val="0"/>
+              </a:spcAft>
+              <a:buClr>
+                <a:srgbClr val="595959"/>
+              </a:buClr>
+              <a:buSzPts val="1150"/>
+              <a:buFont typeface="Lato"/>
+              <a:buChar char="●"/>
+            </a:pPr>
+            <a:r>
+              <a:rPr lang="fr" sz="1150">
+                <a:solidFill>
+                  <a:srgbClr val="595959"/>
+                </a:solidFill>
+                <a:latin typeface="Lato"/>
+                <a:ea typeface="Lato"/>
+                <a:cs typeface="Lato"/>
+                <a:sym typeface="Lato"/>
+              </a:rPr>
+              <a:t>Accompagnement à la rédaction et relecture des plans de gestion de données  </a:t>
+            </a:r>
+            <a:endParaRPr sz="1150">
+              <a:solidFill>
+                <a:srgbClr val="595959"/>
+              </a:solidFill>
+              <a:latin typeface="Lato"/>
+              <a:ea typeface="Lato"/>
+              <a:cs typeface="Lato"/>
+              <a:sym typeface="Lato"/>
+            </a:endParaRPr>
+          </a:p>
+          <a:p>
+            <a:pPr indent="-301625" lvl="0" marL="457200" rtl="0" algn="l">
+              <a:lnSpc>
+                <a:spcPct val="95000"/>
+              </a:lnSpc>
+              <a:spcBef>
+                <a:spcPts val="0"/>
+              </a:spcBef>
+              <a:spcAft>
+                <a:spcPts val="0"/>
+              </a:spcAft>
+              <a:buClr>
+                <a:srgbClr val="595959"/>
+              </a:buClr>
+              <a:buSzPts val="1150"/>
+              <a:buFont typeface="Lato"/>
+              <a:buChar char="●"/>
+            </a:pPr>
+            <a:r>
+              <a:rPr lang="fr" sz="1150">
+                <a:solidFill>
+                  <a:srgbClr val="595959"/>
+                </a:solidFill>
+                <a:latin typeface="Lato"/>
+                <a:ea typeface="Lato"/>
+                <a:cs typeface="Lato"/>
+                <a:sym typeface="Lato"/>
+              </a:rPr>
+              <a:t>Orientation et assistance sur le stockage des données</a:t>
+            </a:r>
+            <a:endParaRPr sz="1150">
+              <a:solidFill>
+                <a:srgbClr val="595959"/>
+              </a:solidFill>
+              <a:latin typeface="Lato"/>
+              <a:ea typeface="Lato"/>
+              <a:cs typeface="Lato"/>
+              <a:sym typeface="Lato"/>
+            </a:endParaRPr>
+          </a:p>
+          <a:p>
+            <a:pPr indent="-301625" lvl="0" marL="457200" rtl="0" algn="l">
+              <a:lnSpc>
+                <a:spcPct val="95000"/>
+              </a:lnSpc>
+              <a:spcBef>
+                <a:spcPts val="0"/>
+              </a:spcBef>
+              <a:spcAft>
+                <a:spcPts val="0"/>
+              </a:spcAft>
+              <a:buClr>
+                <a:srgbClr val="595959"/>
+              </a:buClr>
+              <a:buSzPts val="1150"/>
+              <a:buFont typeface="Lato"/>
+              <a:buChar char="●"/>
+            </a:pPr>
+            <a:r>
+              <a:rPr lang="fr" sz="1150">
+                <a:solidFill>
+                  <a:srgbClr val="595959"/>
+                </a:solidFill>
+                <a:latin typeface="Lato"/>
+                <a:ea typeface="Lato"/>
+                <a:cs typeface="Lato"/>
+                <a:sym typeface="Lato"/>
+              </a:rPr>
+              <a:t>Assistance et formation au dépôt et au partage de jeux de données</a:t>
+            </a:r>
+            <a:endParaRPr sz="1150">
+              <a:solidFill>
+                <a:srgbClr val="595959"/>
+              </a:solidFill>
+              <a:latin typeface="Lato"/>
+              <a:ea typeface="Lato"/>
+              <a:cs typeface="Lato"/>
+              <a:sym typeface="Lato"/>
+            </a:endParaRPr>
+          </a:p>
+          <a:p>
+            <a:pPr indent="-301625" lvl="0" marL="457200" rtl="0" algn="l">
+              <a:lnSpc>
+                <a:spcPct val="95000"/>
+              </a:lnSpc>
+              <a:spcBef>
+                <a:spcPts val="0"/>
+              </a:spcBef>
+              <a:spcAft>
+                <a:spcPts val="0"/>
+              </a:spcAft>
+              <a:buClr>
+                <a:srgbClr val="595959"/>
+              </a:buClr>
+              <a:buSzPts val="1150"/>
+              <a:buFont typeface="Lato"/>
+              <a:buChar char="●"/>
+            </a:pPr>
+            <a:r>
+              <a:rPr lang="fr" sz="1150">
+                <a:solidFill>
+                  <a:srgbClr val="595959"/>
+                </a:solidFill>
+                <a:latin typeface="Lato"/>
+                <a:ea typeface="Lato"/>
+                <a:cs typeface="Lato"/>
+                <a:sym typeface="Lato"/>
+              </a:rPr>
+              <a:t>Conseils et accompagnement pour le traitement et la FAIRisation des données</a:t>
+            </a:r>
+            <a:endParaRPr sz="1150">
+              <a:solidFill>
+                <a:srgbClr val="595959"/>
+              </a:solidFill>
+              <a:latin typeface="Lato"/>
+              <a:ea typeface="Lato"/>
+              <a:cs typeface="Lato"/>
+              <a:sym typeface="Lato"/>
+            </a:endParaRPr>
+          </a:p>
+          <a:p>
+            <a:pPr indent="-301625" lvl="0" marL="457200" rtl="0" algn="l">
+              <a:lnSpc>
+                <a:spcPct val="95000"/>
+              </a:lnSpc>
+              <a:spcBef>
+                <a:spcPts val="0"/>
+              </a:spcBef>
+              <a:spcAft>
+                <a:spcPts val="0"/>
+              </a:spcAft>
+              <a:buClr>
+                <a:srgbClr val="595959"/>
+              </a:buClr>
+              <a:buSzPts val="1150"/>
+              <a:buFont typeface="Lato"/>
+              <a:buChar char="●"/>
+            </a:pPr>
+            <a:r>
+              <a:rPr lang="fr" sz="1150">
+                <a:solidFill>
+                  <a:srgbClr val="595959"/>
+                </a:solidFill>
+                <a:latin typeface="Lato"/>
+                <a:ea typeface="Lato"/>
+                <a:cs typeface="Lato"/>
+                <a:sym typeface="Lato"/>
+              </a:rPr>
+              <a:t>Conseils et développement de bases de données</a:t>
+            </a:r>
+            <a:endParaRPr sz="1150">
+              <a:solidFill>
+                <a:srgbClr val="595959"/>
+              </a:solidFill>
+              <a:latin typeface="Lato"/>
+              <a:ea typeface="Lato"/>
+              <a:cs typeface="Lato"/>
+              <a:sym typeface="Lato"/>
+            </a:endParaRPr>
+          </a:p>
+          <a:p>
+            <a:pPr indent="-301625" lvl="0" marL="457200" rtl="0" algn="l">
+              <a:lnSpc>
+                <a:spcPct val="95000"/>
+              </a:lnSpc>
+              <a:spcBef>
+                <a:spcPts val="0"/>
+              </a:spcBef>
+              <a:spcAft>
+                <a:spcPts val="0"/>
+              </a:spcAft>
+              <a:buClr>
+                <a:srgbClr val="595959"/>
+              </a:buClr>
+              <a:buSzPts val="1150"/>
+              <a:buFont typeface="Lato"/>
+              <a:buChar char="●"/>
+            </a:pPr>
+            <a:r>
+              <a:rPr lang="fr" sz="1150">
+                <a:solidFill>
+                  <a:srgbClr val="595959"/>
+                </a:solidFill>
+                <a:latin typeface="Lato"/>
+                <a:ea typeface="Lato"/>
+                <a:cs typeface="Lato"/>
+                <a:sym typeface="Lato"/>
+              </a:rPr>
+              <a:t>Aide à la mise en conformité FAIR des bases de données</a:t>
+            </a:r>
+            <a:endParaRPr sz="1150">
+              <a:solidFill>
+                <a:srgbClr val="595959"/>
+              </a:solidFill>
+              <a:latin typeface="Lato"/>
+              <a:ea typeface="Lato"/>
+              <a:cs typeface="Lato"/>
+              <a:sym typeface="Lato"/>
+            </a:endParaRPr>
+          </a:p>
+          <a:p>
+            <a:pPr indent="-301625" lvl="0" marL="457200" rtl="0" algn="l">
+              <a:lnSpc>
+                <a:spcPct val="95000"/>
+              </a:lnSpc>
+              <a:spcBef>
+                <a:spcPts val="0"/>
+              </a:spcBef>
+              <a:spcAft>
+                <a:spcPts val="0"/>
+              </a:spcAft>
+              <a:buClr>
+                <a:srgbClr val="595959"/>
+              </a:buClr>
+              <a:buSzPts val="1150"/>
+              <a:buFont typeface="Lato"/>
+              <a:buChar char="●"/>
+            </a:pPr>
+            <a:r>
+              <a:rPr lang="fr" sz="1150">
+                <a:solidFill>
+                  <a:srgbClr val="595959"/>
+                </a:solidFill>
+                <a:latin typeface="Lato"/>
+                <a:ea typeface="Lato"/>
+                <a:cs typeface="Lato"/>
+                <a:sym typeface="Lato"/>
+              </a:rPr>
+              <a:t>Conseils pour la structuration et le nettoyage de données</a:t>
+            </a:r>
+            <a:endParaRPr sz="1150">
+              <a:solidFill>
+                <a:srgbClr val="595959"/>
+              </a:solidFill>
+              <a:latin typeface="Lato"/>
+              <a:ea typeface="Lato"/>
+              <a:cs typeface="Lato"/>
+              <a:sym typeface="Lato"/>
+            </a:endParaRPr>
+          </a:p>
+          <a:p>
+            <a:pPr indent="-301625" lvl="0" marL="457200" rtl="0" algn="l">
+              <a:lnSpc>
+                <a:spcPct val="95000"/>
+              </a:lnSpc>
+              <a:spcBef>
+                <a:spcPts val="0"/>
+              </a:spcBef>
+              <a:spcAft>
+                <a:spcPts val="0"/>
+              </a:spcAft>
+              <a:buClr>
+                <a:srgbClr val="595959"/>
+              </a:buClr>
+              <a:buSzPts val="1150"/>
+              <a:buFont typeface="Lato"/>
+              <a:buChar char="●"/>
+            </a:pPr>
+            <a:r>
+              <a:rPr lang="fr" sz="1150">
+                <a:solidFill>
+                  <a:srgbClr val="595959"/>
+                </a:solidFill>
+                <a:latin typeface="Lato"/>
+                <a:ea typeface="Lato"/>
+                <a:cs typeface="Lato"/>
+                <a:sym typeface="Lato"/>
+              </a:rPr>
+              <a:t>Conseils et accompagnement pour l’anonymisation et la pseudonymisation des données</a:t>
+            </a:r>
+            <a:endParaRPr sz="1150">
+              <a:solidFill>
+                <a:srgbClr val="595959"/>
+              </a:solidFill>
+              <a:latin typeface="Lato"/>
+              <a:ea typeface="Lato"/>
+              <a:cs typeface="Lato"/>
+              <a:sym typeface="Lato"/>
+            </a:endParaRPr>
+          </a:p>
+          <a:p>
+            <a:pPr indent="-301625" lvl="0" marL="457200" rtl="0" algn="l">
+              <a:lnSpc>
+                <a:spcPct val="95000"/>
+              </a:lnSpc>
+              <a:spcBef>
+                <a:spcPts val="0"/>
+              </a:spcBef>
+              <a:spcAft>
+                <a:spcPts val="0"/>
+              </a:spcAft>
+              <a:buClr>
+                <a:srgbClr val="595959"/>
+              </a:buClr>
+              <a:buSzPts val="1150"/>
+              <a:buFont typeface="Lato"/>
+              <a:buChar char="●"/>
+            </a:pPr>
+            <a:r>
+              <a:rPr lang="fr" sz="1150">
+                <a:solidFill>
+                  <a:srgbClr val="595959"/>
+                </a:solidFill>
+                <a:latin typeface="Lato"/>
+                <a:ea typeface="Lato"/>
+                <a:cs typeface="Lato"/>
+                <a:sym typeface="Lato"/>
+              </a:rPr>
+              <a:t>Conseils et accompagnement pour la visualisation des données</a:t>
+            </a:r>
+            <a:endParaRPr sz="1150">
+              <a:solidFill>
+                <a:srgbClr val="595959"/>
+              </a:solidFill>
+              <a:latin typeface="Lato"/>
+              <a:ea typeface="Lato"/>
+              <a:cs typeface="Lato"/>
+              <a:sym typeface="Lato"/>
+            </a:endParaRPr>
+          </a:p>
+          <a:p>
+            <a:pPr indent="-301625" lvl="0" marL="457200" rtl="0" algn="l">
+              <a:lnSpc>
+                <a:spcPct val="95000"/>
+              </a:lnSpc>
+              <a:spcBef>
+                <a:spcPts val="0"/>
+              </a:spcBef>
+              <a:spcAft>
+                <a:spcPts val="0"/>
+              </a:spcAft>
+              <a:buClr>
+                <a:srgbClr val="595959"/>
+              </a:buClr>
+              <a:buSzPts val="1150"/>
+              <a:buFont typeface="Lato"/>
+              <a:buChar char="●"/>
+            </a:pPr>
+            <a:r>
+              <a:rPr lang="fr" sz="1150">
+                <a:solidFill>
+                  <a:srgbClr val="595959"/>
+                </a:solidFill>
+                <a:latin typeface="Lato"/>
+                <a:ea typeface="Lato"/>
+                <a:cs typeface="Lato"/>
+                <a:sym typeface="Lato"/>
+              </a:rPr>
+              <a:t>Conseils et accompagnement pour la description des données</a:t>
+            </a:r>
+            <a:endParaRPr sz="1150">
+              <a:solidFill>
+                <a:srgbClr val="595959"/>
+              </a:solidFill>
+              <a:latin typeface="Lato"/>
+              <a:ea typeface="Lato"/>
+              <a:cs typeface="Lato"/>
+              <a:sym typeface="Lato"/>
+            </a:endParaRPr>
+          </a:p>
+          <a:p>
+            <a:pPr indent="-301625" lvl="0" marL="457200" rtl="0" algn="l">
+              <a:lnSpc>
+                <a:spcPct val="95000"/>
+              </a:lnSpc>
+              <a:spcBef>
+                <a:spcPts val="0"/>
+              </a:spcBef>
+              <a:spcAft>
+                <a:spcPts val="0"/>
+              </a:spcAft>
+              <a:buClr>
+                <a:srgbClr val="595959"/>
+              </a:buClr>
+              <a:buSzPts val="1150"/>
+              <a:buFont typeface="Lato"/>
+              <a:buChar char="●"/>
+            </a:pPr>
+            <a:r>
+              <a:rPr lang="fr" sz="1150">
+                <a:solidFill>
+                  <a:srgbClr val="595959"/>
+                </a:solidFill>
+                <a:latin typeface="Lato"/>
+                <a:ea typeface="Lato"/>
+                <a:cs typeface="Lato"/>
+                <a:sym typeface="Lato"/>
+              </a:rPr>
+              <a:t>Accompagnement juridique pour la gestion des données personnelles et sensibles</a:t>
+            </a:r>
+            <a:endParaRPr sz="1150">
+              <a:solidFill>
+                <a:srgbClr val="595959"/>
+              </a:solidFill>
+              <a:latin typeface="Lato"/>
+              <a:ea typeface="Lato"/>
+              <a:cs typeface="Lato"/>
+              <a:sym typeface="Lato"/>
+            </a:endParaRPr>
+          </a:p>
+          <a:p>
+            <a:pPr indent="-301625" lvl="0" marL="457200" rtl="0" algn="l">
+              <a:lnSpc>
+                <a:spcPct val="95000"/>
+              </a:lnSpc>
+              <a:spcBef>
+                <a:spcPts val="0"/>
+              </a:spcBef>
+              <a:spcAft>
+                <a:spcPts val="0"/>
+              </a:spcAft>
+              <a:buClr>
+                <a:srgbClr val="595959"/>
+              </a:buClr>
+              <a:buSzPts val="1150"/>
+              <a:buFont typeface="Lato"/>
+              <a:buChar char="●"/>
+            </a:pPr>
+            <a:r>
+              <a:rPr lang="fr" sz="1150">
+                <a:solidFill>
+                  <a:srgbClr val="595959"/>
+                </a:solidFill>
+                <a:latin typeface="Lato"/>
+                <a:ea typeface="Lato"/>
+                <a:cs typeface="Lato"/>
+                <a:sym typeface="Lato"/>
+              </a:rPr>
+              <a:t>Accompagnement à la rédaction de datapapers</a:t>
+            </a:r>
+            <a:endParaRPr sz="1150">
+              <a:solidFill>
+                <a:srgbClr val="595959"/>
+              </a:solidFill>
+              <a:latin typeface="Lato"/>
+              <a:ea typeface="Lato"/>
+              <a:cs typeface="Lato"/>
+              <a:sym typeface="Lato"/>
+            </a:endParaRPr>
+          </a:p>
+          <a:p>
+            <a:pPr indent="-301625" lvl="0" marL="457200" rtl="0" algn="l">
+              <a:lnSpc>
+                <a:spcPct val="95000"/>
+              </a:lnSpc>
+              <a:spcBef>
+                <a:spcPts val="0"/>
+              </a:spcBef>
+              <a:spcAft>
+                <a:spcPts val="0"/>
+              </a:spcAft>
+              <a:buClr>
+                <a:schemeClr val="dk1"/>
+              </a:buClr>
+              <a:buSzPts val="1150"/>
+              <a:buChar char="●"/>
+            </a:pPr>
+            <a:r>
+              <a:rPr lang="fr" sz="1150">
+                <a:solidFill>
+                  <a:srgbClr val="595959"/>
+                </a:solidFill>
+                <a:latin typeface="Lato"/>
+                <a:ea typeface="Lato"/>
+                <a:cs typeface="Lato"/>
+                <a:sym typeface="Lato"/>
+              </a:rPr>
+              <a:t>Accompagnement au dépôt dans l’entrepôt RDG</a:t>
             </a:r>
             <a:endParaRPr/>
           </a:p>
@@ -1127,7 +1762,7 @@
   <p:cSld>
     <p:spTree>
       <p:nvGrpSpPr>
-        <p:cNvPr id="268" name="Shape 268"/>
+        <p:cNvPr id="275" name="Shape 275"/>
         <p:cNvGrpSpPr/>
         <p:nvPr/>
       </p:nvGrpSpPr>
@@ -1141,7 +1776,7 @@
       </p:grpSpPr>
       <p:sp>
         <p:nvSpPr>
-          <p:cNvPr id="269" name="Google Shape;269;g1ec50aebef9_0_892:notes"/>
+          <p:cNvPr id="276" name="Google Shape;276;g2a11663fee9_2_5:notes"/>
           <p:cNvSpPr/>
           <p:nvPr>
             <p:ph idx="2" type="sldImg"/>
@@ -1176,7 +1811,7 @@
       </p:sp>
       <p:sp>
         <p:nvSpPr>
-          <p:cNvPr id="270" name="Google Shape;270;g1ec50aebef9_0_892:notes"/>
+          <p:cNvPr id="277" name="Google Shape;277;g2a11663fee9_2_5:notes"/>
           <p:cNvSpPr txBox="1"/>
           <p:nvPr>
             <p:ph idx="1" type="body"/>
@@ -1197,653 +1832,18 @@
           </a:bodyPr>
           <a:lstStyle/>
           <a:p>
-            <a:pPr indent="0" lvl="0" marL="457200" rtl="0" algn="l">
-              <a:lnSpc>
-                <a:spcPct val="95000"/>
-              </a:lnSpc>
-              <a:spcBef>
-                <a:spcPts val="1200"/>
-              </a:spcBef>
-              <a:spcAft>
-                <a:spcPts val="0"/>
-              </a:spcAft>
-              <a:buNone/>
-            </a:pPr>
-            <a:r>
-              <a:rPr lang="fr" sz="1150">
-                <a:solidFill>
-                  <a:srgbClr val="595959"/>
-                </a:solidFill>
-                <a:latin typeface="Lato"/>
-                <a:ea typeface="Lato"/>
-                <a:cs typeface="Lato"/>
-                <a:sym typeface="Lato"/>
-              </a:rPr>
-              <a:t>Fiona</a:t>
-            </a:r>
-            <a:endParaRPr sz="1150">
-              <a:solidFill>
-                <a:srgbClr val="595959"/>
-              </a:solidFill>
-              <a:latin typeface="Lato"/>
-              <a:ea typeface="Lato"/>
-              <a:cs typeface="Lato"/>
-              <a:sym typeface="Lato"/>
-            </a:endParaRPr>
-          </a:p>
-          <a:p>
-            <a:pPr indent="0" lvl="0" marL="457200" rtl="0" algn="l">
-              <a:lnSpc>
-                <a:spcPct val="95000"/>
-              </a:lnSpc>
-              <a:spcBef>
-                <a:spcPts val="1200"/>
-              </a:spcBef>
-              <a:spcAft>
-                <a:spcPts val="0"/>
-              </a:spcAft>
-              <a:buNone/>
-            </a:pPr>
-            <a:r>
-              <a:rPr lang="fr" sz="1150">
-                <a:solidFill>
-                  <a:srgbClr val="595959"/>
-                </a:solidFill>
-                <a:latin typeface="Lato"/>
-                <a:ea typeface="Lato"/>
-                <a:cs typeface="Lato"/>
-                <a:sym typeface="Lato"/>
-              </a:rPr>
-              <a:t>Simplification pour les chercheurs, pour qu’ils puissent s’adresser à un point d’entrée unique. Mise en place d’un guichet unique qui figure sur différentes interfaces : pages science ouverte, DMP opidor, via les documents fournis par les directions de la recherche ou via le SI dédié pour une meilleure visibilité</a:t>
-            </a:r>
-            <a:endParaRPr sz="1150">
-              <a:solidFill>
-                <a:srgbClr val="595959"/>
-              </a:solidFill>
-              <a:latin typeface="Lato"/>
-              <a:ea typeface="Lato"/>
-              <a:cs typeface="Lato"/>
-              <a:sym typeface="Lato"/>
-            </a:endParaRPr>
-          </a:p>
-          <a:p>
-            <a:pPr indent="0" lvl="0" marL="457200" rtl="0" algn="l">
-              <a:lnSpc>
-                <a:spcPct val="95000"/>
-              </a:lnSpc>
-              <a:spcBef>
-                <a:spcPts val="1200"/>
-              </a:spcBef>
-              <a:spcAft>
-                <a:spcPts val="0"/>
-              </a:spcAft>
-              <a:buNone/>
-            </a:pPr>
-            <a:r>
-              <a:rPr lang="fr" sz="1150">
-                <a:solidFill>
-                  <a:srgbClr val="595959"/>
-                </a:solidFill>
-                <a:latin typeface="Lato"/>
-                <a:ea typeface="Lato"/>
-                <a:cs typeface="Lato"/>
-                <a:sym typeface="Lato"/>
-              </a:rPr>
-              <a:t>Ensage d’étudier à moyen terme la mise en place d’un outil plus efficace pour gérer les demandes qui permettra un suivi plus sûr, calendrier en fonction des solutions proposées par le GT 1 des ADLD</a:t>
-            </a:r>
-            <a:endParaRPr sz="1150">
-              <a:solidFill>
-                <a:srgbClr val="595959"/>
-              </a:solidFill>
-              <a:latin typeface="Lato"/>
-              <a:ea typeface="Lato"/>
-              <a:cs typeface="Lato"/>
-              <a:sym typeface="Lato"/>
-            </a:endParaRPr>
-          </a:p>
-          <a:p>
-            <a:pPr indent="0" lvl="0" marL="457200" rtl="0" algn="l">
-              <a:lnSpc>
-                <a:spcPct val="95000"/>
-              </a:lnSpc>
-              <a:spcBef>
-                <a:spcPts val="1200"/>
-              </a:spcBef>
-              <a:spcAft>
-                <a:spcPts val="0"/>
-              </a:spcAft>
-              <a:buNone/>
-            </a:pPr>
-            <a:r>
-              <a:rPr lang="fr" sz="1150">
-                <a:solidFill>
-                  <a:srgbClr val="595959"/>
-                </a:solidFill>
-                <a:latin typeface="Lato"/>
-                <a:ea typeface="Lato"/>
-                <a:cs typeface="Lato"/>
-                <a:sym typeface="Lato"/>
-              </a:rPr>
-              <a:t>L’adresse figure à différents endroits pour être plus visible</a:t>
-            </a:r>
-            <a:endParaRPr sz="1150">
-              <a:solidFill>
-                <a:srgbClr val="595959"/>
-              </a:solidFill>
-              <a:latin typeface="Lato"/>
-              <a:ea typeface="Lato"/>
-              <a:cs typeface="Lato"/>
-              <a:sym typeface="Lato"/>
-            </a:endParaRPr>
-          </a:p>
-          <a:p>
-            <a:pPr indent="-301625" lvl="0" marL="457200" rtl="0" algn="l">
-              <a:lnSpc>
-                <a:spcPct val="95000"/>
-              </a:lnSpc>
-              <a:spcBef>
-                <a:spcPts val="1200"/>
-              </a:spcBef>
-              <a:spcAft>
-                <a:spcPts val="0"/>
-              </a:spcAft>
-              <a:buClr>
-                <a:srgbClr val="595959"/>
-              </a:buClr>
-              <a:buSzPts val="1150"/>
-              <a:buFont typeface="Lato"/>
-              <a:buChar char="●"/>
-            </a:pPr>
-            <a:r>
-              <a:rPr lang="fr" sz="1150">
-                <a:solidFill>
-                  <a:srgbClr val="595959"/>
-                </a:solidFill>
-                <a:latin typeface="Lato"/>
-                <a:ea typeface="Lato"/>
-                <a:cs typeface="Lato"/>
-                <a:sym typeface="Lato"/>
-              </a:rPr>
-              <a:t>Accompagnement à la rédaction et relecture des plans de gestion de données  </a:t>
-            </a:r>
-            <a:endParaRPr sz="1150">
-              <a:solidFill>
-                <a:srgbClr val="595959"/>
-              </a:solidFill>
-              <a:latin typeface="Lato"/>
-              <a:ea typeface="Lato"/>
-              <a:cs typeface="Lato"/>
-              <a:sym typeface="Lato"/>
-            </a:endParaRPr>
-          </a:p>
-          <a:p>
-            <a:pPr indent="-301625" lvl="0" marL="457200" rtl="0" algn="l">
-              <a:lnSpc>
-                <a:spcPct val="95000"/>
-              </a:lnSpc>
-              <a:spcBef>
-                <a:spcPts val="0"/>
-              </a:spcBef>
-              <a:spcAft>
-                <a:spcPts val="0"/>
-              </a:spcAft>
-              <a:buClr>
-                <a:srgbClr val="595959"/>
-              </a:buClr>
-              <a:buSzPts val="1150"/>
-              <a:buFont typeface="Lato"/>
-              <a:buChar char="●"/>
-            </a:pPr>
-            <a:r>
-              <a:rPr lang="fr" sz="1150">
-                <a:solidFill>
-                  <a:srgbClr val="595959"/>
-                </a:solidFill>
-                <a:latin typeface="Lato"/>
-                <a:ea typeface="Lato"/>
-                <a:cs typeface="Lato"/>
-                <a:sym typeface="Lato"/>
-              </a:rPr>
-              <a:t>Orientation et assistance sur le stockage des données</a:t>
-            </a:r>
-            <a:endParaRPr sz="1150">
-              <a:solidFill>
-                <a:srgbClr val="595959"/>
-              </a:solidFill>
-              <a:latin typeface="Lato"/>
-              <a:ea typeface="Lato"/>
-              <a:cs typeface="Lato"/>
-              <a:sym typeface="Lato"/>
-            </a:endParaRPr>
-          </a:p>
-          <a:p>
-            <a:pPr indent="-301625" lvl="0" marL="457200" rtl="0" algn="l">
-              <a:lnSpc>
-                <a:spcPct val="95000"/>
-              </a:lnSpc>
-              <a:spcBef>
-                <a:spcPts val="0"/>
-              </a:spcBef>
-              <a:spcAft>
-                <a:spcPts val="0"/>
-              </a:spcAft>
-              <a:buClr>
-                <a:srgbClr val="595959"/>
-              </a:buClr>
-              <a:buSzPts val="1150"/>
-              <a:buFont typeface="Lato"/>
-              <a:buChar char="●"/>
-            </a:pPr>
-            <a:r>
-              <a:rPr lang="fr" sz="1150">
-                <a:solidFill>
-                  <a:srgbClr val="595959"/>
-                </a:solidFill>
-                <a:latin typeface="Lato"/>
-                <a:ea typeface="Lato"/>
-                <a:cs typeface="Lato"/>
-                <a:sym typeface="Lato"/>
-              </a:rPr>
-              <a:t>Assistance et formation au dépôt et au partage de jeux de données</a:t>
-            </a:r>
-            <a:endParaRPr sz="1150">
-              <a:solidFill>
-                <a:srgbClr val="595959"/>
-              </a:solidFill>
-              <a:latin typeface="Lato"/>
-              <a:ea typeface="Lato"/>
-              <a:cs typeface="Lato"/>
-              <a:sym typeface="Lato"/>
-            </a:endParaRPr>
-          </a:p>
-          <a:p>
-            <a:pPr indent="-301625" lvl="0" marL="457200" rtl="0" algn="l">
-              <a:lnSpc>
-                <a:spcPct val="95000"/>
-              </a:lnSpc>
-              <a:spcBef>
-                <a:spcPts val="0"/>
-              </a:spcBef>
-              <a:spcAft>
-                <a:spcPts val="0"/>
-              </a:spcAft>
-              <a:buClr>
-                <a:srgbClr val="595959"/>
-              </a:buClr>
-              <a:buSzPts val="1150"/>
-              <a:buFont typeface="Lato"/>
-              <a:buChar char="●"/>
-            </a:pPr>
-            <a:r>
-              <a:rPr lang="fr" sz="1150">
-                <a:solidFill>
-                  <a:srgbClr val="595959"/>
-                </a:solidFill>
-                <a:latin typeface="Lato"/>
-                <a:ea typeface="Lato"/>
-                <a:cs typeface="Lato"/>
-                <a:sym typeface="Lato"/>
-              </a:rPr>
-              <a:t>Conseils et accompagnement pour le traitement et la FAIRisation des données</a:t>
-            </a:r>
-            <a:endParaRPr sz="1150">
-              <a:solidFill>
-                <a:srgbClr val="595959"/>
-              </a:solidFill>
-              <a:latin typeface="Lato"/>
-              <a:ea typeface="Lato"/>
-              <a:cs typeface="Lato"/>
-              <a:sym typeface="Lato"/>
-            </a:endParaRPr>
-          </a:p>
-          <a:p>
-            <a:pPr indent="-301625" lvl="0" marL="457200" rtl="0" algn="l">
-              <a:lnSpc>
-                <a:spcPct val="95000"/>
-              </a:lnSpc>
-              <a:spcBef>
-                <a:spcPts val="0"/>
-              </a:spcBef>
-              <a:spcAft>
-                <a:spcPts val="0"/>
-              </a:spcAft>
-              <a:buClr>
-                <a:srgbClr val="595959"/>
-              </a:buClr>
-              <a:buSzPts val="1150"/>
-              <a:buFont typeface="Lato"/>
-              <a:buChar char="●"/>
-            </a:pPr>
-            <a:r>
-              <a:rPr lang="fr" sz="1150">
-                <a:solidFill>
-                  <a:srgbClr val="595959"/>
-                </a:solidFill>
-                <a:latin typeface="Lato"/>
-                <a:ea typeface="Lato"/>
-                <a:cs typeface="Lato"/>
-                <a:sym typeface="Lato"/>
-              </a:rPr>
-              <a:t>Conseils et développement de bases de données</a:t>
-            </a:r>
-            <a:endParaRPr sz="1150">
-              <a:solidFill>
-                <a:srgbClr val="595959"/>
-              </a:solidFill>
-              <a:latin typeface="Lato"/>
-              <a:ea typeface="Lato"/>
-              <a:cs typeface="Lato"/>
-              <a:sym typeface="Lato"/>
-            </a:endParaRPr>
-          </a:p>
-          <a:p>
-            <a:pPr indent="-301625" lvl="0" marL="457200" rtl="0" algn="l">
-              <a:lnSpc>
-                <a:spcPct val="95000"/>
-              </a:lnSpc>
-              <a:spcBef>
-                <a:spcPts val="0"/>
-              </a:spcBef>
-              <a:spcAft>
-                <a:spcPts val="0"/>
-              </a:spcAft>
-              <a:buClr>
-                <a:srgbClr val="595959"/>
-              </a:buClr>
-              <a:buSzPts val="1150"/>
-              <a:buFont typeface="Lato"/>
-              <a:buChar char="●"/>
-            </a:pPr>
-            <a:r>
-              <a:rPr lang="fr" sz="1150">
-                <a:solidFill>
-                  <a:srgbClr val="595959"/>
-                </a:solidFill>
-                <a:latin typeface="Lato"/>
-                <a:ea typeface="Lato"/>
-                <a:cs typeface="Lato"/>
-                <a:sym typeface="Lato"/>
-              </a:rPr>
-              <a:t>Aide à la mise en conformité FAIR des bases de données</a:t>
-            </a:r>
-            <a:endParaRPr sz="1150">
-              <a:solidFill>
-                <a:srgbClr val="595959"/>
-              </a:solidFill>
-              <a:latin typeface="Lato"/>
-              <a:ea typeface="Lato"/>
-              <a:cs typeface="Lato"/>
-              <a:sym typeface="Lato"/>
-            </a:endParaRPr>
-          </a:p>
-          <a:p>
-            <a:pPr indent="-301625" lvl="0" marL="457200" rtl="0" algn="l">
-              <a:lnSpc>
-                <a:spcPct val="95000"/>
-              </a:lnSpc>
-              <a:spcBef>
-                <a:spcPts val="0"/>
-              </a:spcBef>
-              <a:spcAft>
-                <a:spcPts val="0"/>
-              </a:spcAft>
-              <a:buClr>
-                <a:srgbClr val="595959"/>
-              </a:buClr>
-              <a:buSzPts val="1150"/>
-              <a:buFont typeface="Lato"/>
-              <a:buChar char="●"/>
-            </a:pPr>
-            <a:r>
-              <a:rPr lang="fr" sz="1150">
-                <a:solidFill>
-                  <a:srgbClr val="595959"/>
-                </a:solidFill>
-                <a:latin typeface="Lato"/>
-                <a:ea typeface="Lato"/>
-                <a:cs typeface="Lato"/>
-                <a:sym typeface="Lato"/>
-              </a:rPr>
-              <a:t>Conseils pour la structuration et le nettoyage de données</a:t>
-            </a:r>
-            <a:endParaRPr sz="1150">
-              <a:solidFill>
-                <a:srgbClr val="595959"/>
-              </a:solidFill>
-              <a:latin typeface="Lato"/>
-              <a:ea typeface="Lato"/>
-              <a:cs typeface="Lato"/>
-              <a:sym typeface="Lato"/>
-            </a:endParaRPr>
-          </a:p>
-          <a:p>
-            <a:pPr indent="-301625" lvl="0" marL="457200" rtl="0" algn="l">
-              <a:lnSpc>
-                <a:spcPct val="95000"/>
-              </a:lnSpc>
-              <a:spcBef>
-                <a:spcPts val="0"/>
-              </a:spcBef>
-              <a:spcAft>
-                <a:spcPts val="0"/>
-              </a:spcAft>
-              <a:buClr>
-                <a:srgbClr val="595959"/>
-              </a:buClr>
-              <a:buSzPts val="1150"/>
-              <a:buFont typeface="Lato"/>
-              <a:buChar char="●"/>
-            </a:pPr>
-            <a:r>
-              <a:rPr lang="fr" sz="1150">
-                <a:solidFill>
-                  <a:srgbClr val="595959"/>
-                </a:solidFill>
-                <a:latin typeface="Lato"/>
-                <a:ea typeface="Lato"/>
-                <a:cs typeface="Lato"/>
-                <a:sym typeface="Lato"/>
-              </a:rPr>
-              <a:t>Conseils et accompagnement pour l’anonymisation et la pseudonymisation des données</a:t>
-            </a:r>
-            <a:endParaRPr sz="1150">
-              <a:solidFill>
-                <a:srgbClr val="595959"/>
-              </a:solidFill>
-              <a:latin typeface="Lato"/>
-              <a:ea typeface="Lato"/>
-              <a:cs typeface="Lato"/>
-              <a:sym typeface="Lato"/>
-            </a:endParaRPr>
-          </a:p>
-          <a:p>
-            <a:pPr indent="-301625" lvl="0" marL="457200" rtl="0" algn="l">
-              <a:lnSpc>
-                <a:spcPct val="95000"/>
-              </a:lnSpc>
-              <a:spcBef>
-                <a:spcPts val="0"/>
-              </a:spcBef>
-              <a:spcAft>
-                <a:spcPts val="0"/>
-              </a:spcAft>
-              <a:buClr>
-                <a:srgbClr val="595959"/>
-              </a:buClr>
-              <a:buSzPts val="1150"/>
-              <a:buFont typeface="Lato"/>
-              <a:buChar char="●"/>
-            </a:pPr>
-            <a:r>
-              <a:rPr lang="fr" sz="1150">
-                <a:solidFill>
-                  <a:srgbClr val="595959"/>
-                </a:solidFill>
-                <a:latin typeface="Lato"/>
-                <a:ea typeface="Lato"/>
-                <a:cs typeface="Lato"/>
-                <a:sym typeface="Lato"/>
-              </a:rPr>
-              <a:t>Conseils et accompagnement pour la visualisation des données</a:t>
-            </a:r>
-            <a:endParaRPr sz="1150">
-              <a:solidFill>
-                <a:srgbClr val="595959"/>
-              </a:solidFill>
-              <a:latin typeface="Lato"/>
-              <a:ea typeface="Lato"/>
-              <a:cs typeface="Lato"/>
-              <a:sym typeface="Lato"/>
-            </a:endParaRPr>
-          </a:p>
-          <a:p>
-            <a:pPr indent="-301625" lvl="0" marL="457200" rtl="0" algn="l">
-              <a:lnSpc>
-                <a:spcPct val="95000"/>
-              </a:lnSpc>
-              <a:spcBef>
-                <a:spcPts val="0"/>
-              </a:spcBef>
-              <a:spcAft>
-                <a:spcPts val="0"/>
-              </a:spcAft>
-              <a:buClr>
-                <a:srgbClr val="595959"/>
-              </a:buClr>
-              <a:buSzPts val="1150"/>
-              <a:buFont typeface="Lato"/>
-              <a:buChar char="●"/>
-            </a:pPr>
-            <a:r>
-              <a:rPr lang="fr" sz="1150">
-                <a:solidFill>
-                  <a:srgbClr val="595959"/>
-                </a:solidFill>
-                <a:latin typeface="Lato"/>
-                <a:ea typeface="Lato"/>
-                <a:cs typeface="Lato"/>
-                <a:sym typeface="Lato"/>
-              </a:rPr>
-              <a:t>Conseils et accompagnement pour la description des données</a:t>
-            </a:r>
-            <a:endParaRPr sz="1150">
-              <a:solidFill>
-                <a:srgbClr val="595959"/>
-              </a:solidFill>
-              <a:latin typeface="Lato"/>
-              <a:ea typeface="Lato"/>
-              <a:cs typeface="Lato"/>
-              <a:sym typeface="Lato"/>
-            </a:endParaRPr>
-          </a:p>
-          <a:p>
-            <a:pPr indent="-301625" lvl="0" marL="457200" rtl="0" algn="l">
-              <a:lnSpc>
-                <a:spcPct val="95000"/>
-              </a:lnSpc>
-              <a:spcBef>
-                <a:spcPts val="0"/>
-              </a:spcBef>
-              <a:spcAft>
-                <a:spcPts val="0"/>
-              </a:spcAft>
-              <a:buClr>
-                <a:srgbClr val="595959"/>
-              </a:buClr>
-              <a:buSzPts val="1150"/>
-              <a:buFont typeface="Lato"/>
-              <a:buChar char="●"/>
-            </a:pPr>
-            <a:r>
-              <a:rPr lang="fr" sz="1150">
-                <a:solidFill>
-                  <a:srgbClr val="595959"/>
-                </a:solidFill>
-                <a:latin typeface="Lato"/>
-                <a:ea typeface="Lato"/>
-                <a:cs typeface="Lato"/>
-                <a:sym typeface="Lato"/>
-              </a:rPr>
-              <a:t>Accompagnement juridique pour la gestion des données personnelles et sensibles</a:t>
-            </a:r>
-            <a:endParaRPr sz="1150">
-              <a:solidFill>
-                <a:srgbClr val="595959"/>
-              </a:solidFill>
-              <a:latin typeface="Lato"/>
-              <a:ea typeface="Lato"/>
-              <a:cs typeface="Lato"/>
-              <a:sym typeface="Lato"/>
-            </a:endParaRPr>
-          </a:p>
-          <a:p>
-            <a:pPr indent="-301625" lvl="0" marL="457200" rtl="0" algn="l">
-              <a:lnSpc>
-                <a:spcPct val="95000"/>
-              </a:lnSpc>
-              <a:spcBef>
-                <a:spcPts val="0"/>
-              </a:spcBef>
-              <a:spcAft>
-                <a:spcPts val="0"/>
-              </a:spcAft>
-              <a:buClr>
-                <a:srgbClr val="595959"/>
-              </a:buClr>
-              <a:buSzPts val="1150"/>
-              <a:buFont typeface="Lato"/>
-              <a:buChar char="●"/>
-            </a:pPr>
-            <a:r>
-              <a:rPr lang="fr" sz="1150">
-                <a:solidFill>
-                  <a:srgbClr val="595959"/>
-                </a:solidFill>
-                <a:latin typeface="Lato"/>
-                <a:ea typeface="Lato"/>
-                <a:cs typeface="Lato"/>
-                <a:sym typeface="Lato"/>
-              </a:rPr>
-              <a:t>Accompagnement à la rédaction de datapapers</a:t>
-            </a:r>
-            <a:endParaRPr sz="1150">
-              <a:solidFill>
-                <a:srgbClr val="595959"/>
-              </a:solidFill>
-              <a:latin typeface="Lato"/>
-              <a:ea typeface="Lato"/>
-              <a:cs typeface="Lato"/>
-              <a:sym typeface="Lato"/>
-            </a:endParaRPr>
-          </a:p>
-          <a:p>
-            <a:pPr indent="-301625" lvl="0" marL="457200" rtl="0" algn="l">
-              <a:lnSpc>
-                <a:spcPct val="95000"/>
-              </a:lnSpc>
-              <a:spcBef>
-                <a:spcPts val="0"/>
-              </a:spcBef>
-              <a:spcAft>
-                <a:spcPts val="0"/>
-              </a:spcAft>
-              <a:buClr>
-                <a:schemeClr val="dk1"/>
-              </a:buClr>
-              <a:buSzPts val="1150"/>
-              <a:buChar char="●"/>
-            </a:pPr>
-            <a:r>
-              <a:rPr lang="fr" sz="1150">
-                <a:solidFill>
-                  <a:srgbClr val="595959"/>
-                </a:solidFill>
-                <a:latin typeface="Lato"/>
-                <a:ea typeface="Lato"/>
-                <a:cs typeface="Lato"/>
-                <a:sym typeface="Lato"/>
-              </a:rPr>
-              <a:t>Accompagnement au dépôt dans l’entrepôt RDG</a:t>
+            <a:pPr indent="0" lvl="0" marL="0" rtl="0" algn="l">
+              <a:spcBef>
+                <a:spcPts val="0"/>
+              </a:spcBef>
+              <a:spcAft>
+                <a:spcPts val="0"/>
+              </a:spcAft>
+              <a:buNone/>
+            </a:pPr>
+            <a:r>
+              <a:rPr lang="fr"/>
+              <a:t>Questions de natures diverses : sur le pgd, sur le stockage, questions juridiques, conseils sur les entrepôts</a:t>
             </a:r>
             <a:endParaRPr/>
           </a:p>
@@ -1862,7 +1862,7 @@
   <p:cSld>
     <p:spTree>
       <p:nvGrpSpPr>
-        <p:cNvPr id="281" name="Shape 281"/>
+        <p:cNvPr id="293" name="Shape 293"/>
         <p:cNvGrpSpPr/>
         <p:nvPr/>
       </p:nvGrpSpPr>
@@ -1876,7 +1876,7 @@
       </p:grpSpPr>
       <p:sp>
         <p:nvSpPr>
-          <p:cNvPr id="282" name="Google Shape;282;g2a11663fee9_2_5:notes"/>
+          <p:cNvPr id="294" name="Google Shape;294;g1ec50aebef9_0_1061:notes"/>
           <p:cNvSpPr/>
           <p:nvPr>
             <p:ph idx="2" type="sldImg"/>
@@ -1911,7 +1911,7 @@
       </p:sp>
       <p:sp>
         <p:nvSpPr>
-          <p:cNvPr id="283" name="Google Shape;283;g2a11663fee9_2_5:notes"/>
+          <p:cNvPr id="295" name="Google Shape;295;g1ec50aebef9_0_1061:notes"/>
           <p:cNvSpPr txBox="1"/>
           <p:nvPr>
             <p:ph idx="1" type="body"/>
@@ -1943,7 +1943,7 @@
             </a:pPr>
             <a:r>
               <a:rPr lang="fr"/>
-              <a:t>Questions de natures diverses : sur le pgd, sur le stockage, questions juridiques, conseils sur les entrepôts</a:t>
+              <a:t>articulation avec les direction de la recherche : effectif et va s’intensifier</a:t>
             </a:r>
             <a:endParaRPr/>
           </a:p>
@@ -1962,7 +1962,7 @@
   <p:cSld>
     <p:spTree>
       <p:nvGrpSpPr>
-        <p:cNvPr id="299" name="Shape 299"/>
+        <p:cNvPr id="304" name="Shape 304"/>
         <p:cNvGrpSpPr/>
         <p:nvPr/>
       </p:nvGrpSpPr>
@@ -1976,7 +1976,7 @@
       </p:grpSpPr>
       <p:sp>
         <p:nvSpPr>
-          <p:cNvPr id="300" name="Google Shape;300;g1ec50aebef9_0_1061:notes"/>
+          <p:cNvPr id="305" name="Google Shape;305;g1ec50aebef9_0_1519:notes"/>
           <p:cNvSpPr/>
           <p:nvPr>
             <p:ph idx="2" type="sldImg"/>
@@ -2011,7 +2011,7 @@
       </p:sp>
       <p:sp>
         <p:nvSpPr>
-          <p:cNvPr id="301" name="Google Shape;301;g1ec50aebef9_0_1061:notes"/>
+          <p:cNvPr id="306" name="Google Shape;306;g1ec50aebef9_0_1519:notes"/>
           <p:cNvSpPr txBox="1"/>
           <p:nvPr>
             <p:ph idx="1" type="body"/>
@@ -2043,7 +2043,7 @@
             </a:pPr>
             <a:r>
               <a:rPr lang="fr"/>
-              <a:t>articulation avec les direction de la recherche : effectif et va s’intensifier</a:t>
+              <a:t>ARDoISE intervient sur des projets de typologies variées de la thèses aux gros projets structurants tels que IRIS-E</a:t>
             </a:r>
             <a:endParaRPr/>
           </a:p>
@@ -2062,7 +2062,7 @@
   <p:cSld>
     <p:spTree>
       <p:nvGrpSpPr>
-        <p:cNvPr id="310" name="Shape 310"/>
+        <p:cNvPr id="314" name="Shape 314"/>
         <p:cNvGrpSpPr/>
         <p:nvPr/>
       </p:nvGrpSpPr>
@@ -2076,7 +2076,7 @@
       </p:grpSpPr>
       <p:sp>
         <p:nvSpPr>
-          <p:cNvPr id="311" name="Google Shape;311;g1ec50aebef9_0_1519:notes"/>
+          <p:cNvPr id="315" name="Google Shape;315;g1ec50aebef9_0_978:notes"/>
           <p:cNvSpPr/>
           <p:nvPr>
             <p:ph idx="2" type="sldImg"/>
@@ -2111,7 +2111,7 @@
       </p:sp>
       <p:sp>
         <p:nvSpPr>
-          <p:cNvPr id="312" name="Google Shape;312;g1ec50aebef9_0_1519:notes"/>
+          <p:cNvPr id="316" name="Google Shape;316;g1ec50aebef9_0_978:notes"/>
           <p:cNvSpPr txBox="1"/>
           <p:nvPr>
             <p:ph idx="1" type="body"/>
@@ -2142,8 +2142,7 @@
               <a:buNone/>
             </a:pPr>
             <a:r>
-              <a:rPr lang="fr"/>
-              <a:t>ARDoISE intervient sur des projets de typologies variées de la thèses aux gros projets structurants tels que IRIS-E</a:t>
+              <a:t/>
             </a:r>
             <a:endParaRPr/>
           </a:p>
@@ -2162,7 +2161,7 @@
   <p:cSld>
     <p:spTree>
       <p:nvGrpSpPr>
-        <p:cNvPr id="320" name="Shape 320"/>
+        <p:cNvPr id="325" name="Shape 325"/>
         <p:cNvGrpSpPr/>
         <p:nvPr/>
       </p:nvGrpSpPr>
@@ -2176,7 +2175,7 @@
       </p:grpSpPr>
       <p:sp>
         <p:nvSpPr>
-          <p:cNvPr id="321" name="Google Shape;321;g1ec50aebef9_0_978:notes"/>
+          <p:cNvPr id="326" name="Google Shape;326;g1ec50aebef9_0_1534:notes"/>
           <p:cNvSpPr/>
           <p:nvPr>
             <p:ph idx="2" type="sldImg"/>
@@ -2211,7 +2210,7 @@
       </p:sp>
       <p:sp>
         <p:nvSpPr>
-          <p:cNvPr id="322" name="Google Shape;322;g1ec50aebef9_0_978:notes"/>
+          <p:cNvPr id="327" name="Google Shape;327;g1ec50aebef9_0_1534:notes"/>
           <p:cNvSpPr txBox="1"/>
           <p:nvPr>
             <p:ph idx="1" type="body"/>
@@ -2242,7 +2241,56 @@
               <a:buNone/>
             </a:pPr>
             <a:r>
-              <a:t/>
+              <a:rPr lang="fr"/>
+              <a:t>Existait déjà un format de webinaires SOcle lancé en 2021, qu’Ardoise a repris à son compte sur les données depuis 2023. 45 min en ligne, sur l’heure de midi, format léger pour première prise de contact avec les chercheurs</a:t>
+            </a:r>
+            <a:endParaRPr/>
+          </a:p>
+          <a:p>
+            <a:pPr indent="0" lvl="0" marL="0" rtl="0" algn="l">
+              <a:spcBef>
+                <a:spcPts val="0"/>
+              </a:spcBef>
+              <a:spcAft>
+                <a:spcPts val="0"/>
+              </a:spcAft>
+              <a:buNone/>
+            </a:pPr>
+            <a:r>
+              <a:rPr lang="fr"/>
+              <a:t>Membres d’ardoise participent aux formations doctorales dans le cadre du collège doctoral breton sur la partie données de la recherche. Croisement problématique SO et intégrité scientifique</a:t>
+            </a:r>
+            <a:endParaRPr/>
+          </a:p>
+          <a:p>
+            <a:pPr indent="0" lvl="0" marL="0" rtl="0" algn="l">
+              <a:spcBef>
+                <a:spcPts val="0"/>
+              </a:spcBef>
+              <a:spcAft>
+                <a:spcPts val="0"/>
+              </a:spcAft>
+              <a:buNone/>
+            </a:pPr>
+            <a:r>
+              <a:rPr lang="fr"/>
+              <a:t>Ardoise donne des formations à l’URFIST, le programme URFIST sur les données de la recherche est riche. La collaboration avec l’URFIST permet de s’assurer de la complémentarité des différentes offres</a:t>
+            </a:r>
+            <a:endParaRPr/>
+          </a:p>
+          <a:p>
+            <a:pPr indent="0" lvl="0" marL="0" rtl="0" algn="l">
+              <a:spcBef>
+                <a:spcPts val="0"/>
+              </a:spcBef>
+              <a:spcAft>
+                <a:spcPts val="0"/>
+              </a:spcAft>
+              <a:buNone/>
+            </a:pPr>
+            <a:r>
+              <a:rPr lang="fr"/>
+              <a:t>Offre de formation déjà existante sur le territoire, On s’articule avec les formations proposées par les partenaires, les formations disciplinaires sur des données spécifiques</a:t>
             </a:r>
             <a:endParaRPr/>
           </a:p>
@@ -2261,7 +2309,7 @@
   <p:cSld>
     <p:spTree>
       <p:nvGrpSpPr>
-        <p:cNvPr id="331" name="Shape 331"/>
+        <p:cNvPr id="338" name="Shape 338"/>
         <p:cNvGrpSpPr/>
         <p:nvPr/>
       </p:nvGrpSpPr>
@@ -2275,7 +2323,7 @@
       </p:grpSpPr>
       <p:sp>
         <p:nvSpPr>
-          <p:cNvPr id="332" name="Google Shape;332;g1ec50aebef9_0_1534:notes"/>
+          <p:cNvPr id="339" name="Google Shape;339;g1ec50aebef9_0_1145:notes"/>
           <p:cNvSpPr/>
           <p:nvPr>
             <p:ph idx="2" type="sldImg"/>
@@ -2310,7 +2358,7 @@
       </p:sp>
       <p:sp>
         <p:nvSpPr>
-          <p:cNvPr id="333" name="Google Shape;333;g1ec50aebef9_0_1534:notes"/>
+          <p:cNvPr id="340" name="Google Shape;340;g1ec50aebef9_0_1145:notes"/>
           <p:cNvSpPr txBox="1"/>
           <p:nvPr>
             <p:ph idx="1" type="body"/>
@@ -2341,56 +2389,7 @@
               <a:buNone/>
             </a:pPr>
             <a:r>
-              <a:rPr lang="fr"/>
-              <a:t>Existait déjà un format de webinaires SOcle lancé en 2021, qu’Ardoise a repris à son compte sur les données depuis 2023. 45 min en ligne, sur l’heure de midi, format léger pour première prise de contact avec les chercheurs</a:t>
-            </a:r>
-            <a:endParaRPr/>
-          </a:p>
-          <a:p>
-            <a:pPr indent="0" lvl="0" marL="0" rtl="0" algn="l">
-              <a:spcBef>
-                <a:spcPts val="0"/>
-              </a:spcBef>
-              <a:spcAft>
-                <a:spcPts val="0"/>
-              </a:spcAft>
-              <a:buNone/>
-            </a:pPr>
-            <a:r>
-              <a:rPr lang="fr"/>
-              <a:t>Membres d’ardoise participent aux formations doctorales dans le cadre du collège doctoral breton sur la partie données de la recherche. Croisement problématique SO et intégrité scientifique</a:t>
-            </a:r>
-            <a:endParaRPr/>
-          </a:p>
-          <a:p>
-            <a:pPr indent="0" lvl="0" marL="0" rtl="0" algn="l">
-              <a:spcBef>
-                <a:spcPts val="0"/>
-              </a:spcBef>
-              <a:spcAft>
-                <a:spcPts val="0"/>
-              </a:spcAft>
-              <a:buNone/>
-            </a:pPr>
-            <a:r>
-              <a:rPr lang="fr"/>
-              <a:t>Ardoise donne des formations à l’URFIST, le programme URFIST sur les données de la recherche est riche. La collaboration avec l’URFIST permet de s’assurer de la complémentarité des différentes offres</a:t>
-            </a:r>
-            <a:endParaRPr/>
-          </a:p>
-          <a:p>
-            <a:pPr indent="0" lvl="0" marL="0" rtl="0" algn="l">
-              <a:spcBef>
-                <a:spcPts val="0"/>
-              </a:spcBef>
-              <a:spcAft>
-                <a:spcPts val="0"/>
-              </a:spcAft>
-              <a:buNone/>
-            </a:pPr>
-            <a:r>
-              <a:rPr lang="fr"/>
-              <a:t>Offre de formation déjà existante sur le territoire, On s’articule avec les formations proposées par les partenaires, les formations disciplinaires sur des données spécifiques</a:t>
+              <a:t/>
             </a:r>
             <a:endParaRPr/>
           </a:p>
@@ -2409,7 +2408,7 @@
   <p:cSld>
     <p:spTree>
       <p:nvGrpSpPr>
-        <p:cNvPr id="344" name="Shape 344"/>
+        <p:cNvPr id="348" name="Shape 348"/>
         <p:cNvGrpSpPr/>
         <p:nvPr/>
       </p:nvGrpSpPr>
@@ -2423,7 +2422,7 @@
       </p:grpSpPr>
       <p:sp>
         <p:nvSpPr>
-          <p:cNvPr id="345" name="Google Shape;345;g1ec50aebef9_0_1145:notes"/>
+          <p:cNvPr id="349" name="Google Shape;349;g2a1efa5c7b6_0_1:notes"/>
           <p:cNvSpPr/>
           <p:nvPr>
             <p:ph idx="2" type="sldImg"/>
@@ -2458,7 +2457,7 @@
       </p:sp>
       <p:sp>
         <p:nvSpPr>
-          <p:cNvPr id="346" name="Google Shape;346;g1ec50aebef9_0_1145:notes"/>
+          <p:cNvPr id="350" name="Google Shape;350;g2a1efa5c7b6_0_1:notes"/>
           <p:cNvSpPr txBox="1"/>
           <p:nvPr>
             <p:ph idx="1" type="body"/>
@@ -2607,7 +2606,7 @@
   <p:cSld>
     <p:spTree>
       <p:nvGrpSpPr>
-        <p:cNvPr id="354" name="Shape 354"/>
+        <p:cNvPr id="355" name="Shape 355"/>
         <p:cNvGrpSpPr/>
         <p:nvPr/>
       </p:nvGrpSpPr>
@@ -2621,7 +2620,7 @@
       </p:grpSpPr>
       <p:sp>
         <p:nvSpPr>
-          <p:cNvPr id="355" name="Google Shape;355;g2a1efa5c7b6_0_1:notes"/>
+          <p:cNvPr id="356" name="Google Shape;356;g2a1efa5c7b6_0_7:notes"/>
           <p:cNvSpPr/>
           <p:nvPr>
             <p:ph idx="2" type="sldImg"/>
@@ -2656,7 +2655,7 @@
       </p:sp>
       <p:sp>
         <p:nvSpPr>
-          <p:cNvPr id="356" name="Google Shape;356;g2a1efa5c7b6_0_1:notes"/>
+          <p:cNvPr id="357" name="Google Shape;357;g2a1efa5c7b6_0_7:notes"/>
           <p:cNvSpPr txBox="1"/>
           <p:nvPr>
             <p:ph idx="1" type="body"/>
@@ -2706,7 +2705,7 @@
   <p:cSld>
     <p:spTree>
       <p:nvGrpSpPr>
-        <p:cNvPr id="361" name="Shape 361"/>
+        <p:cNvPr id="364" name="Shape 364"/>
         <p:cNvGrpSpPr/>
         <p:nvPr/>
       </p:nvGrpSpPr>
@@ -2720,7 +2719,7 @@
       </p:grpSpPr>
       <p:sp>
         <p:nvSpPr>
-          <p:cNvPr id="362" name="Google Shape;362;g2a1efa5c7b6_0_7:notes"/>
+          <p:cNvPr id="365" name="Google Shape;365;g1ec50aebef9_0_1644:notes"/>
           <p:cNvSpPr/>
           <p:nvPr>
             <p:ph idx="2" type="sldImg"/>
@@ -2755,7 +2754,7 @@
       </p:sp>
       <p:sp>
         <p:nvSpPr>
-          <p:cNvPr id="363" name="Google Shape;363;g2a1efa5c7b6_0_7:notes"/>
+          <p:cNvPr id="366" name="Google Shape;366;g1ec50aebef9_0_1644:notes"/>
           <p:cNvSpPr txBox="1"/>
           <p:nvPr>
             <p:ph idx="1" type="body"/>
@@ -2805,7 +2804,7 @@
   <p:cSld>
     <p:spTree>
       <p:nvGrpSpPr>
-        <p:cNvPr id="370" name="Shape 370"/>
+        <p:cNvPr id="371" name="Shape 371"/>
         <p:cNvGrpSpPr/>
         <p:nvPr/>
       </p:nvGrpSpPr>
@@ -2819,7 +2818,7 @@
       </p:grpSpPr>
       <p:sp>
         <p:nvSpPr>
-          <p:cNvPr id="371" name="Google Shape;371;g1ec50aebef9_0_1644:notes"/>
+          <p:cNvPr id="372" name="Google Shape;372;g1ec50aebef9_0_1556:notes"/>
           <p:cNvSpPr/>
           <p:nvPr>
             <p:ph idx="2" type="sldImg"/>
@@ -2854,106 +2853,7 @@
       </p:sp>
       <p:sp>
         <p:nvSpPr>
-          <p:cNvPr id="372" name="Google Shape;372;g1ec50aebef9_0_1644:notes"/>
-          <p:cNvSpPr txBox="1"/>
-          <p:nvPr>
-            <p:ph idx="1" type="body"/>
-          </p:nvPr>
-        </p:nvSpPr>
-        <p:spPr>
-          <a:xfrm>
-            <a:off x="685800" y="4343400"/>
-            <a:ext cx="5486400" cy="4114800"/>
-          </a:xfrm>
-          <a:prstGeom prst="rect">
-            <a:avLst/>
-          </a:prstGeom>
-        </p:spPr>
-        <p:txBody>
-          <a:bodyPr anchorCtr="0" anchor="t" bIns="91425" lIns="91425" spcFirstLastPara="1" rIns="91425" wrap="square" tIns="91425">
-            <a:noAutofit/>
-          </a:bodyPr>
-          <a:lstStyle/>
-          <a:p>
-            <a:pPr indent="0" lvl="0" marL="0" rtl="0" algn="l">
-              <a:spcBef>
-                <a:spcPts val="0"/>
-              </a:spcBef>
-              <a:spcAft>
-                <a:spcPts val="0"/>
-              </a:spcAft>
-              <a:buNone/>
-            </a:pPr>
-            <a:r>
-              <a:t/>
-            </a:r>
-            <a:endParaRPr/>
-          </a:p>
-        </p:txBody>
-      </p:sp>
-    </p:spTree>
-  </p:cSld>
-  <p:clrMapOvr>
-    <a:masterClrMapping/>
-  </p:clrMapOvr>
-</p:notes>
-</file>
-
-<file path=ppt/notesSlides/notesSlide23.xml><?xml version="1.0" encoding="utf-8"?>
-<p:notes xmlns:a="http://schemas.openxmlformats.org/drawingml/2006/main" xmlns:r="http://schemas.openxmlformats.org/officeDocument/2006/relationships" xmlns:mc="http://schemas.openxmlformats.org/markup-compatibility/2006" xmlns:mv="urn:schemas-microsoft-com:mac:vml" xmlns:p="http://schemas.openxmlformats.org/presentationml/2006/main" xmlns:c="http://schemas.openxmlformats.org/drawingml/2006/chart" xmlns:dgm="http://schemas.openxmlformats.org/drawingml/2006/diagram" xmlns:o="urn:schemas-microsoft-com:office:office" xmlns:v="urn:schemas-microsoft-com:vml" xmlns:pvml="urn:schemas-microsoft-com:office:powerpoint" xmlns:com="http://schemas.openxmlformats.org/drawingml/2006/compatibility" xmlns:p14="http://schemas.microsoft.com/office/powerpoint/2010/main" xmlns:p15="http://schemas.microsoft.com/office/powerpoint/2012/main" xmlns:ahyp="http://schemas.microsoft.com/office/drawing/2018/hyperlinkcolor" showMasterPhAnim="0" showMasterSp="0">
-  <p:cSld>
-    <p:spTree>
-      <p:nvGrpSpPr>
-        <p:cNvPr id="377" name="Shape 377"/>
-        <p:cNvGrpSpPr/>
-        <p:nvPr/>
-      </p:nvGrpSpPr>
-      <p:grpSpPr>
-        <a:xfrm>
-          <a:off x="0" y="0"/>
-          <a:ext cx="0" cy="0"/>
-          <a:chOff x="0" y="0"/>
-          <a:chExt cx="0" cy="0"/>
-        </a:xfrm>
-      </p:grpSpPr>
-      <p:sp>
-        <p:nvSpPr>
-          <p:cNvPr id="378" name="Google Shape;378;g1ec50aebef9_0_1556:notes"/>
-          <p:cNvSpPr/>
-          <p:nvPr>
-            <p:ph idx="2" type="sldImg"/>
-          </p:nvPr>
-        </p:nvSpPr>
-        <p:spPr>
-          <a:xfrm>
-            <a:off x="381300" y="685800"/>
-            <a:ext cx="6096000" cy="3429000"/>
-          </a:xfrm>
-          <a:custGeom>
-            <a:rect b="b" l="l" r="r" t="t"/>
-            <a:pathLst>
-              <a:path extrusionOk="0" h="120000" w="120000">
-                <a:moveTo>
-                  <a:pt x="0" y="0"/>
-                </a:moveTo>
-                <a:lnTo>
-                  <a:pt x="120000" y="0"/>
-                </a:lnTo>
-                <a:lnTo>
-                  <a:pt x="120000" y="120000"/>
-                </a:lnTo>
-                <a:lnTo>
-                  <a:pt x="0" y="120000"/>
-                </a:lnTo>
-                <a:close/>
-              </a:path>
-            </a:pathLst>
-          </a:custGeom>
-        </p:spPr>
-      </p:sp>
-      <p:sp>
-        <p:nvSpPr>
-          <p:cNvPr id="379" name="Google Shape;379;g1ec50aebef9_0_1556:notes"/>
+          <p:cNvPr id="373" name="Google Shape;373;g1ec50aebef9_0_1556:notes"/>
           <p:cNvSpPr txBox="1"/>
           <p:nvPr>
             <p:ph idx="1" type="body"/>
@@ -12440,8 +12340,8 @@
         </p:nvSpPr>
         <p:spPr>
           <a:xfrm>
-            <a:off x="729450" y="556650"/>
-            <a:ext cx="7688700" cy="535200"/>
+            <a:off x="1491450" y="480450"/>
+            <a:ext cx="7688400" cy="535200"/>
           </a:xfrm>
           <a:prstGeom prst="rect">
             <a:avLst/>
@@ -12464,7 +12364,7 @@
             </a:pPr>
             <a:r>
               <a:rPr lang="fr"/>
-              <a:t>9 services</a:t>
+              <a:t>Un guichet unique</a:t>
             </a:r>
             <a:endParaRPr/>
           </a:p>
@@ -12480,8 +12380,8 @@
         </p:nvSpPr>
         <p:spPr>
           <a:xfrm>
-            <a:off x="729450" y="1574225"/>
-            <a:ext cx="7688700" cy="3366600"/>
+            <a:off x="729450" y="1294650"/>
+            <a:ext cx="3774300" cy="2147700"/>
           </a:xfrm>
           <a:prstGeom prst="rect">
             <a:avLst/>
@@ -12493,416 +12393,101 @@
           </a:bodyPr>
           <a:lstStyle/>
           <a:p>
-            <a:pPr indent="-323850" lvl="0" marL="457200" rtl="0" algn="l">
-              <a:spcBef>
-                <a:spcPts val="1200"/>
-              </a:spcBef>
-              <a:spcAft>
-                <a:spcPts val="0"/>
-              </a:spcAft>
-              <a:buClr>
-                <a:srgbClr val="000000"/>
-              </a:buClr>
-              <a:buSzPts val="1500"/>
-              <a:buFont typeface="Arial"/>
-              <a:buAutoNum type="arabicPeriod"/>
-            </a:pPr>
-            <a:r>
-              <a:rPr lang="fr" sz="1500">
-                <a:solidFill>
-                  <a:srgbClr val="000000"/>
-                </a:solidFill>
-                <a:latin typeface="Arial"/>
-                <a:ea typeface="Arial"/>
-                <a:cs typeface="Arial"/>
-                <a:sym typeface="Arial"/>
-              </a:rPr>
-              <a:t>Guichet unique vers tous les acteurs de la donnée</a:t>
-            </a:r>
-            <a:endParaRPr i="1" sz="1500">
-              <a:solidFill>
-                <a:srgbClr val="000000"/>
-              </a:solidFill>
-              <a:latin typeface="Arial"/>
-              <a:ea typeface="Arial"/>
-              <a:cs typeface="Arial"/>
-              <a:sym typeface="Arial"/>
-            </a:endParaRPr>
-          </a:p>
-          <a:p>
-            <a:pPr indent="-323850" lvl="0" marL="457200" rtl="0" algn="l">
-              <a:spcBef>
-                <a:spcPts val="0"/>
-              </a:spcBef>
-              <a:spcAft>
-                <a:spcPts val="0"/>
-              </a:spcAft>
-              <a:buClr>
-                <a:srgbClr val="000000"/>
-              </a:buClr>
-              <a:buSzPts val="1500"/>
-              <a:buFont typeface="Arial"/>
-              <a:buAutoNum type="arabicPeriod"/>
-            </a:pPr>
-            <a:r>
-              <a:rPr lang="fr" sz="1500">
-                <a:solidFill>
-                  <a:srgbClr val="000000"/>
-                </a:solidFill>
-                <a:latin typeface="Arial"/>
-                <a:ea typeface="Arial"/>
-                <a:cs typeface="Arial"/>
-                <a:sym typeface="Arial"/>
-              </a:rPr>
-              <a:t>Accompagnement à la rédaction de plans de gestion de données </a:t>
-            </a:r>
-            <a:endParaRPr i="1" sz="1500">
-              <a:solidFill>
-                <a:srgbClr val="000000"/>
-              </a:solidFill>
-              <a:latin typeface="Arial"/>
-              <a:ea typeface="Arial"/>
-              <a:cs typeface="Arial"/>
-              <a:sym typeface="Arial"/>
-            </a:endParaRPr>
-          </a:p>
-          <a:p>
-            <a:pPr indent="-323850" lvl="0" marL="457200" rtl="0" algn="l">
-              <a:spcBef>
-                <a:spcPts val="0"/>
-              </a:spcBef>
-              <a:spcAft>
-                <a:spcPts val="0"/>
-              </a:spcAft>
-              <a:buClr>
-                <a:srgbClr val="000000"/>
-              </a:buClr>
-              <a:buSzPts val="1500"/>
-              <a:buFont typeface="Arial"/>
-              <a:buAutoNum type="arabicPeriod"/>
-            </a:pPr>
-            <a:r>
-              <a:rPr lang="fr" sz="1500">
-                <a:solidFill>
-                  <a:srgbClr val="000000"/>
-                </a:solidFill>
-                <a:latin typeface="Arial"/>
-                <a:ea typeface="Arial"/>
-                <a:cs typeface="Arial"/>
-                <a:sym typeface="Arial"/>
-              </a:rPr>
-              <a:t>Formation et sensibilisation à la gestion FAIR et à l’ouverture des données de la recherche et codes sources et logiciels </a:t>
-            </a:r>
-            <a:endParaRPr i="1" sz="1500">
-              <a:solidFill>
-                <a:srgbClr val="000000"/>
-              </a:solidFill>
-              <a:latin typeface="Arial"/>
-              <a:ea typeface="Arial"/>
-              <a:cs typeface="Arial"/>
-              <a:sym typeface="Arial"/>
-            </a:endParaRPr>
-          </a:p>
-          <a:p>
-            <a:pPr indent="-323850" lvl="0" marL="457200" rtl="0" algn="l">
-              <a:spcBef>
-                <a:spcPts val="0"/>
-              </a:spcBef>
-              <a:spcAft>
-                <a:spcPts val="0"/>
-              </a:spcAft>
-              <a:buClr>
-                <a:srgbClr val="000000"/>
-              </a:buClr>
-              <a:buSzPts val="1500"/>
-              <a:buFont typeface="Arial"/>
-              <a:buAutoNum type="arabicPeriod"/>
-            </a:pPr>
-            <a:r>
-              <a:rPr lang="fr" sz="1500">
-                <a:solidFill>
-                  <a:srgbClr val="000000"/>
-                </a:solidFill>
-                <a:latin typeface="Arial"/>
-                <a:ea typeface="Arial"/>
-                <a:cs typeface="Arial"/>
-                <a:sym typeface="Arial"/>
-              </a:rPr>
-              <a:t>Accompagnement au dépôt, partage et diffusion des données</a:t>
-            </a:r>
-            <a:endParaRPr i="1" sz="1500">
-              <a:solidFill>
-                <a:srgbClr val="000000"/>
-              </a:solidFill>
-              <a:latin typeface="Arial"/>
-              <a:ea typeface="Arial"/>
-              <a:cs typeface="Arial"/>
-              <a:sym typeface="Arial"/>
-            </a:endParaRPr>
-          </a:p>
-          <a:p>
-            <a:pPr indent="-323850" lvl="0" marL="457200" rtl="0" algn="l">
-              <a:spcBef>
-                <a:spcPts val="0"/>
-              </a:spcBef>
-              <a:spcAft>
-                <a:spcPts val="0"/>
-              </a:spcAft>
-              <a:buClr>
-                <a:srgbClr val="000000"/>
-              </a:buClr>
-              <a:buSzPts val="1500"/>
-              <a:buFont typeface="Arial"/>
-              <a:buAutoNum type="arabicPeriod"/>
-            </a:pPr>
-            <a:r>
-              <a:rPr lang="fr" sz="1500">
-                <a:solidFill>
-                  <a:srgbClr val="000000"/>
-                </a:solidFill>
-                <a:latin typeface="Arial"/>
-                <a:ea typeface="Arial"/>
-                <a:cs typeface="Arial"/>
-                <a:sym typeface="Arial"/>
-              </a:rPr>
-              <a:t>Accompagnement à la préservation et la sécurisation des données</a:t>
-            </a:r>
-            <a:r>
-              <a:rPr i="1" lang="fr" sz="1500">
-                <a:solidFill>
-                  <a:srgbClr val="000000"/>
-                </a:solidFill>
-                <a:latin typeface="Arial"/>
-                <a:ea typeface="Arial"/>
-                <a:cs typeface="Arial"/>
-                <a:sym typeface="Arial"/>
-              </a:rPr>
-              <a:t> </a:t>
-            </a:r>
-            <a:endParaRPr i="1" sz="1500">
-              <a:solidFill>
-                <a:srgbClr val="000000"/>
-              </a:solidFill>
-              <a:latin typeface="Arial"/>
-              <a:ea typeface="Arial"/>
-              <a:cs typeface="Arial"/>
-              <a:sym typeface="Arial"/>
-            </a:endParaRPr>
-          </a:p>
-          <a:p>
-            <a:pPr indent="-323850" lvl="0" marL="457200" rtl="0" algn="l">
-              <a:spcBef>
-                <a:spcPts val="0"/>
-              </a:spcBef>
-              <a:spcAft>
-                <a:spcPts val="0"/>
-              </a:spcAft>
-              <a:buClr>
-                <a:srgbClr val="000000"/>
-              </a:buClr>
-              <a:buSzPts val="1500"/>
-              <a:buFont typeface="Arial"/>
-              <a:buAutoNum type="arabicPeriod"/>
-            </a:pPr>
-            <a:r>
-              <a:rPr lang="fr" sz="1500">
-                <a:solidFill>
-                  <a:srgbClr val="000000"/>
-                </a:solidFill>
-                <a:latin typeface="Arial"/>
-                <a:ea typeface="Arial"/>
-                <a:cs typeface="Arial"/>
-                <a:sym typeface="Arial"/>
-              </a:rPr>
-              <a:t>Conseils juridiques et éthiques</a:t>
-            </a:r>
-            <a:endParaRPr i="1" sz="1500">
-              <a:solidFill>
-                <a:srgbClr val="000000"/>
-              </a:solidFill>
-              <a:latin typeface="Arial"/>
-              <a:ea typeface="Arial"/>
-              <a:cs typeface="Arial"/>
-              <a:sym typeface="Arial"/>
-            </a:endParaRPr>
-          </a:p>
-          <a:p>
-            <a:pPr indent="-323850" lvl="0" marL="457200" rtl="0" algn="l">
-              <a:spcBef>
-                <a:spcPts val="0"/>
-              </a:spcBef>
-              <a:spcAft>
-                <a:spcPts val="0"/>
-              </a:spcAft>
-              <a:buClr>
-                <a:srgbClr val="000000"/>
-              </a:buClr>
-              <a:buSzPts val="1500"/>
-              <a:buFont typeface="Arial"/>
-              <a:buAutoNum type="arabicPeriod"/>
-            </a:pPr>
-            <a:r>
-              <a:rPr lang="fr" sz="1500">
-                <a:solidFill>
-                  <a:srgbClr val="000000"/>
-                </a:solidFill>
-                <a:latin typeface="Arial"/>
-                <a:ea typeface="Arial"/>
-                <a:cs typeface="Arial"/>
-                <a:sym typeface="Arial"/>
-              </a:rPr>
-              <a:t>Accompagnement à l’ouverture des codes sources et logiciels</a:t>
-            </a:r>
-            <a:endParaRPr i="1" sz="1500">
-              <a:solidFill>
-                <a:srgbClr val="000000"/>
-              </a:solidFill>
-              <a:latin typeface="Arial"/>
-              <a:ea typeface="Arial"/>
-              <a:cs typeface="Arial"/>
-              <a:sym typeface="Arial"/>
-            </a:endParaRPr>
-          </a:p>
-          <a:p>
-            <a:pPr indent="-323850" lvl="0" marL="457200" rtl="0" algn="l">
-              <a:spcBef>
-                <a:spcPts val="0"/>
-              </a:spcBef>
-              <a:spcAft>
-                <a:spcPts val="0"/>
-              </a:spcAft>
-              <a:buClr>
-                <a:srgbClr val="000000"/>
-              </a:buClr>
-              <a:buSzPts val="1500"/>
-              <a:buFont typeface="Arial"/>
-              <a:buAutoNum type="arabicPeriod"/>
-            </a:pPr>
-            <a:r>
-              <a:rPr lang="fr" sz="1500">
-                <a:solidFill>
-                  <a:srgbClr val="000000"/>
-                </a:solidFill>
-                <a:latin typeface="Arial"/>
-                <a:ea typeface="Arial"/>
-                <a:cs typeface="Arial"/>
-                <a:sym typeface="Arial"/>
-              </a:rPr>
-              <a:t>Accompagnement à la reproductibilité de la recherche et à l’utilisation des cahiers de laboratoire électroniques</a:t>
-            </a:r>
-            <a:r>
-              <a:rPr i="1" lang="fr" sz="1500">
-                <a:solidFill>
-                  <a:srgbClr val="000000"/>
-                </a:solidFill>
-                <a:latin typeface="Arial"/>
-                <a:ea typeface="Arial"/>
-                <a:cs typeface="Arial"/>
-                <a:sym typeface="Arial"/>
-              </a:rPr>
-              <a:t> </a:t>
-            </a:r>
-            <a:endParaRPr i="1" sz="1500">
-              <a:solidFill>
-                <a:srgbClr val="000000"/>
-              </a:solidFill>
-              <a:latin typeface="Arial"/>
-              <a:ea typeface="Arial"/>
-              <a:cs typeface="Arial"/>
-              <a:sym typeface="Arial"/>
-            </a:endParaRPr>
-          </a:p>
-          <a:p>
-            <a:pPr indent="-323850" lvl="0" marL="457200" rtl="0" algn="l">
-              <a:spcBef>
-                <a:spcPts val="0"/>
-              </a:spcBef>
-              <a:spcAft>
-                <a:spcPts val="0"/>
-              </a:spcAft>
-              <a:buClr>
-                <a:srgbClr val="000000"/>
-              </a:buClr>
-              <a:buSzPts val="1500"/>
-              <a:buFont typeface="Arial"/>
-              <a:buAutoNum type="arabicPeriod"/>
-            </a:pPr>
-            <a:r>
-              <a:rPr lang="fr" sz="1500">
-                <a:solidFill>
-                  <a:srgbClr val="000000"/>
-                </a:solidFill>
-                <a:latin typeface="Arial"/>
-                <a:ea typeface="Arial"/>
-                <a:cs typeface="Arial"/>
-                <a:sym typeface="Arial"/>
-              </a:rPr>
-              <a:t>Espace recherche dédié aux données de la recherche</a:t>
-            </a:r>
-            <a:endParaRPr sz="1700"/>
-          </a:p>
-        </p:txBody>
-      </p:sp>
-    </p:spTree>
-  </p:cSld>
-  <p:clrMapOvr>
-    <a:masterClrMapping/>
-  </p:clrMapOvr>
-</p:sld>
-</file>
-
-<file path=ppt/slides/slide13.xml><?xml version="1.0" encoding="utf-8"?>
-<p:sld xmlns:a="http://schemas.openxmlformats.org/drawingml/2006/main" xmlns:r="http://schemas.openxmlformats.org/officeDocument/2006/relationships" xmlns:mc="http://schemas.openxmlformats.org/markup-compatibility/2006" xmlns:mv="urn:schemas-microsoft-com:mac:vml" xmlns:p="http://schemas.openxmlformats.org/presentationml/2006/main" xmlns:c="http://schemas.openxmlformats.org/drawingml/2006/chart" xmlns:dgm="http://schemas.openxmlformats.org/drawingml/2006/diagram" xmlns:o="urn:schemas-microsoft-com:office:office" xmlns:v="urn:schemas-microsoft-com:vml" xmlns:pvml="urn:schemas-microsoft-com:office:powerpoint" xmlns:com="http://schemas.openxmlformats.org/drawingml/2006/compatibility" xmlns:p14="http://schemas.microsoft.com/office/powerpoint/2010/main" xmlns:p15="http://schemas.microsoft.com/office/powerpoint/2012/main" xmlns:ahyp="http://schemas.microsoft.com/office/drawing/2018/hyperlinkcolor">
-  <p:cSld>
-    <p:spTree>
-      <p:nvGrpSpPr>
-        <p:cNvPr id="271" name="Shape 271"/>
-        <p:cNvGrpSpPr/>
-        <p:nvPr/>
-      </p:nvGrpSpPr>
-      <p:grpSpPr>
-        <a:xfrm>
-          <a:off x="0" y="0"/>
-          <a:ext cx="0" cy="0"/>
-          <a:chOff x="0" y="0"/>
-          <a:chExt cx="0" cy="0"/>
-        </a:xfrm>
-      </p:grpSpPr>
-      <p:sp>
-        <p:nvSpPr>
-          <p:cNvPr id="272" name="Google Shape;272;p25"/>
-          <p:cNvSpPr txBox="1"/>
-          <p:nvPr>
-            <p:ph type="title"/>
-          </p:nvPr>
-        </p:nvSpPr>
-        <p:spPr>
-          <a:xfrm>
-            <a:off x="1491450" y="480450"/>
-            <a:ext cx="7688400" cy="535200"/>
-          </a:xfrm>
-          <a:prstGeom prst="rect">
-            <a:avLst/>
-          </a:prstGeom>
-        </p:spPr>
-        <p:txBody>
-          <a:bodyPr anchorCtr="0" anchor="t" bIns="91425" lIns="91425" spcFirstLastPara="1" rIns="91425" wrap="square" tIns="91425">
-            <a:normAutofit fontScale="90000"/>
-          </a:bodyPr>
-          <a:lstStyle/>
-          <a:p>
             <a:pPr indent="0" lvl="0" marL="0" rtl="0" algn="l">
-              <a:spcBef>
-                <a:spcPts val="0"/>
-              </a:spcBef>
-              <a:spcAft>
-                <a:spcPts val="0"/>
-              </a:spcAft>
-              <a:buNone/>
+              <a:lnSpc>
+                <a:spcPct val="95000"/>
+              </a:lnSpc>
+              <a:spcBef>
+                <a:spcPts val="0"/>
+              </a:spcBef>
+              <a:spcAft>
+                <a:spcPts val="0"/>
+              </a:spcAft>
+              <a:buNone/>
+            </a:pPr>
+            <a:r>
+              <a:rPr b="1" lang="fr"/>
+              <a:t>Différents points d’entrées</a:t>
+            </a:r>
+            <a:endParaRPr b="1"/>
+          </a:p>
+          <a:p>
+            <a:pPr indent="-311150" lvl="0" marL="457200" rtl="0" algn="l">
+              <a:lnSpc>
+                <a:spcPct val="95000"/>
+              </a:lnSpc>
+              <a:spcBef>
+                <a:spcPts val="1000"/>
+              </a:spcBef>
+              <a:spcAft>
+                <a:spcPts val="0"/>
+              </a:spcAft>
+              <a:buSzPts val="1300"/>
+              <a:buChar char="➔"/>
             </a:pPr>
             <a:r>
               <a:rPr lang="fr"/>
-              <a:t>Un guichet unique</a:t>
+              <a:t>Une adresse</a:t>
+            </a:r>
+            <a:endParaRPr/>
+          </a:p>
+          <a:p>
+            <a:pPr indent="-311150" lvl="0" marL="457200" rtl="0" algn="l">
+              <a:lnSpc>
+                <a:spcPct val="95000"/>
+              </a:lnSpc>
+              <a:spcBef>
+                <a:spcPts val="0"/>
+              </a:spcBef>
+              <a:spcAft>
+                <a:spcPts val="0"/>
+              </a:spcAft>
+              <a:buSzPts val="1300"/>
+              <a:buChar char="➔"/>
+            </a:pPr>
+            <a:r>
+              <a:rPr lang="fr"/>
+              <a:t>Pages sur les sites science ouverte</a:t>
+            </a:r>
+            <a:endParaRPr/>
+          </a:p>
+          <a:p>
+            <a:pPr indent="-311150" lvl="0" marL="457200" rtl="0" algn="l">
+              <a:lnSpc>
+                <a:spcPct val="95000"/>
+              </a:lnSpc>
+              <a:spcBef>
+                <a:spcPts val="0"/>
+              </a:spcBef>
+              <a:spcAft>
+                <a:spcPts val="0"/>
+              </a:spcAft>
+              <a:buSzPts val="1300"/>
+              <a:buChar char="➔"/>
+            </a:pPr>
+            <a:r>
+              <a:rPr lang="fr"/>
+              <a:t>DMP OPidor</a:t>
+            </a:r>
+            <a:endParaRPr/>
+          </a:p>
+          <a:p>
+            <a:pPr indent="-311150" lvl="0" marL="457200" rtl="0" algn="l">
+              <a:lnSpc>
+                <a:spcPct val="95000"/>
+              </a:lnSpc>
+              <a:spcBef>
+                <a:spcPts val="0"/>
+              </a:spcBef>
+              <a:spcAft>
+                <a:spcPts val="0"/>
+              </a:spcAft>
+              <a:buSzPts val="1300"/>
+              <a:buChar char="➔"/>
+            </a:pPr>
+            <a:r>
+              <a:rPr lang="fr"/>
+              <a:t>Collaboration et articulation avec les directions de la recherche autour des projets financés : OSCAR</a:t>
             </a:r>
             <a:endParaRPr/>
           </a:p>
@@ -12910,130 +12495,7 @@
       </p:sp>
       <p:sp>
         <p:nvSpPr>
-          <p:cNvPr id="273" name="Google Shape;273;p25"/>
-          <p:cNvSpPr txBox="1"/>
-          <p:nvPr>
-            <p:ph idx="1" type="body"/>
-          </p:nvPr>
-        </p:nvSpPr>
-        <p:spPr>
-          <a:xfrm>
-            <a:off x="729450" y="1294650"/>
-            <a:ext cx="3774300" cy="2147700"/>
-          </a:xfrm>
-          <a:prstGeom prst="rect">
-            <a:avLst/>
-          </a:prstGeom>
-        </p:spPr>
-        <p:txBody>
-          <a:bodyPr anchorCtr="0" anchor="t" bIns="91425" lIns="91425" spcFirstLastPara="1" rIns="91425" wrap="square" tIns="91425">
-            <a:normAutofit/>
-          </a:bodyPr>
-          <a:lstStyle/>
-          <a:p>
-            <a:pPr indent="0" lvl="0" marL="0" rtl="0" algn="l">
-              <a:lnSpc>
-                <a:spcPct val="95000"/>
-              </a:lnSpc>
-              <a:spcBef>
-                <a:spcPts val="0"/>
-              </a:spcBef>
-              <a:spcAft>
-                <a:spcPts val="0"/>
-              </a:spcAft>
-              <a:buNone/>
-            </a:pPr>
-            <a:r>
-              <a:rPr b="1" lang="fr"/>
-              <a:t>Différents points d’entrées</a:t>
-            </a:r>
-            <a:endParaRPr b="1"/>
-          </a:p>
-          <a:p>
-            <a:pPr indent="-311150" lvl="0" marL="457200" rtl="0" algn="l">
-              <a:lnSpc>
-                <a:spcPct val="95000"/>
-              </a:lnSpc>
-              <a:spcBef>
-                <a:spcPts val="1000"/>
-              </a:spcBef>
-              <a:spcAft>
-                <a:spcPts val="0"/>
-              </a:spcAft>
-              <a:buSzPts val="1300"/>
-              <a:buChar char="➔"/>
-            </a:pPr>
-            <a:r>
-              <a:rPr lang="fr"/>
-              <a:t>Une adresse</a:t>
-            </a:r>
-            <a:endParaRPr/>
-          </a:p>
-          <a:p>
-            <a:pPr indent="-311150" lvl="0" marL="457200" rtl="0" algn="l">
-              <a:lnSpc>
-                <a:spcPct val="95000"/>
-              </a:lnSpc>
-              <a:spcBef>
-                <a:spcPts val="0"/>
-              </a:spcBef>
-              <a:spcAft>
-                <a:spcPts val="0"/>
-              </a:spcAft>
-              <a:buSzPts val="1300"/>
-              <a:buChar char="➔"/>
-            </a:pPr>
-            <a:r>
-              <a:rPr lang="fr"/>
-              <a:t>Pages sur les sites science ouverte</a:t>
-            </a:r>
-            <a:endParaRPr/>
-          </a:p>
-          <a:p>
-            <a:pPr indent="-311150" lvl="0" marL="457200" rtl="0" algn="l">
-              <a:lnSpc>
-                <a:spcPct val="95000"/>
-              </a:lnSpc>
-              <a:spcBef>
-                <a:spcPts val="0"/>
-              </a:spcBef>
-              <a:spcAft>
-                <a:spcPts val="0"/>
-              </a:spcAft>
-              <a:buSzPts val="1300"/>
-              <a:buChar char="➔"/>
-            </a:pPr>
-            <a:r>
-              <a:rPr lang="fr"/>
-              <a:t>DMP OPidor</a:t>
-            </a:r>
-            <a:endParaRPr/>
-          </a:p>
-          <a:p>
-            <a:pPr indent="-311150" lvl="0" marL="457200" rtl="0" algn="l">
-              <a:lnSpc>
-                <a:spcPct val="95000"/>
-              </a:lnSpc>
-              <a:spcBef>
-                <a:spcPts val="0"/>
-              </a:spcBef>
-              <a:spcAft>
-                <a:spcPts val="0"/>
-              </a:spcAft>
-              <a:buSzPts val="1300"/>
-              <a:buChar char="➔"/>
-            </a:pPr>
-            <a:r>
-              <a:rPr lang="fr"/>
-              <a:t>Collaboration et articulation avec les directions de la recherche autour des projets financés : OSCAR</a:t>
-            </a:r>
-            <a:endParaRPr/>
-          </a:p>
-        </p:txBody>
-      </p:sp>
-      <p:sp>
-        <p:nvSpPr>
-          <p:cNvPr id="274" name="Google Shape;274;p25"/>
+          <p:cNvPr id="268" name="Google Shape;268;p24"/>
           <p:cNvSpPr/>
           <p:nvPr/>
         </p:nvSpPr>
@@ -13117,7 +12579,7 @@
                   </a:extLst>
                 </a:hlinkClick>
               </a:rPr>
-              <a:t>guichet-ardoise@groupes.renater.fr</a:t>
+              <a:t>guichet-ardoise@renater.groupes.fr</a:t>
             </a:r>
             <a:endParaRPr b="1" sz="1200">
               <a:solidFill>
@@ -13153,7 +12615,7 @@
       </p:sp>
       <p:sp>
         <p:nvSpPr>
-          <p:cNvPr id="275" name="Google Shape;275;p25"/>
+          <p:cNvPr id="269" name="Google Shape;269;p24"/>
           <p:cNvSpPr txBox="1"/>
           <p:nvPr>
             <p:ph idx="2" type="body"/>
@@ -13300,7 +12762,7 @@
       </p:sp>
       <p:sp>
         <p:nvSpPr>
-          <p:cNvPr id="276" name="Google Shape;276;p25"/>
+          <p:cNvPr id="270" name="Google Shape;270;p24"/>
           <p:cNvSpPr/>
           <p:nvPr/>
         </p:nvSpPr>
@@ -13448,7 +12910,7 @@
       </p:sp>
       <p:sp>
         <p:nvSpPr>
-          <p:cNvPr id="277" name="Google Shape;277;p25"/>
+          <p:cNvPr id="271" name="Google Shape;271;p24"/>
           <p:cNvSpPr txBox="1"/>
           <p:nvPr/>
         </p:nvSpPr>
@@ -13506,7 +12968,7 @@
       </p:sp>
       <p:sp>
         <p:nvSpPr>
-          <p:cNvPr id="278" name="Google Shape;278;p25"/>
+          <p:cNvPr id="272" name="Google Shape;272;p24"/>
           <p:cNvSpPr txBox="1"/>
           <p:nvPr/>
         </p:nvSpPr>
@@ -13833,7 +13295,7 @@
       </p:sp>
       <p:pic>
         <p:nvPicPr>
-          <p:cNvPr id="279" name="Google Shape;279;p25"/>
+          <p:cNvPr id="273" name="Google Shape;273;p24"/>
           <p:cNvPicPr preferRelativeResize="0"/>
           <p:nvPr/>
         </p:nvPicPr>
@@ -13861,7 +13323,7 @@
       </p:pic>
       <p:pic>
         <p:nvPicPr>
-          <p:cNvPr id="280" name="Google Shape;280;p25"/>
+          <p:cNvPr id="274" name="Google Shape;274;p24"/>
           <p:cNvPicPr preferRelativeResize="0"/>
           <p:nvPr/>
         </p:nvPicPr>
@@ -13895,12 +13357,12 @@
 </p:sld>
 </file>
 
-<file path=ppt/slides/slide14.xml><?xml version="1.0" encoding="utf-8"?>
+<file path=ppt/slides/slide13.xml><?xml version="1.0" encoding="utf-8"?>
 <p:sld xmlns:a="http://schemas.openxmlformats.org/drawingml/2006/main" xmlns:r="http://schemas.openxmlformats.org/officeDocument/2006/relationships" xmlns:mc="http://schemas.openxmlformats.org/markup-compatibility/2006" xmlns:mv="urn:schemas-microsoft-com:mac:vml" xmlns:p="http://schemas.openxmlformats.org/presentationml/2006/main" xmlns:c="http://schemas.openxmlformats.org/drawingml/2006/chart" xmlns:dgm="http://schemas.openxmlformats.org/drawingml/2006/diagram" xmlns:o="urn:schemas-microsoft-com:office:office" xmlns:v="urn:schemas-microsoft-com:vml" xmlns:pvml="urn:schemas-microsoft-com:office:powerpoint" xmlns:com="http://schemas.openxmlformats.org/drawingml/2006/compatibility" xmlns:p14="http://schemas.microsoft.com/office/powerpoint/2010/main" xmlns:p15="http://schemas.microsoft.com/office/powerpoint/2012/main" xmlns:ahyp="http://schemas.microsoft.com/office/drawing/2018/hyperlinkcolor">
   <p:cSld>
     <p:spTree>
       <p:nvGrpSpPr>
-        <p:cNvPr id="284" name="Shape 284"/>
+        <p:cNvPr id="278" name="Shape 278"/>
         <p:cNvGrpSpPr/>
         <p:nvPr/>
       </p:nvGrpSpPr>
@@ -13914,7 +13376,7 @@
       </p:grpSpPr>
       <p:sp>
         <p:nvSpPr>
-          <p:cNvPr id="285" name="Google Shape;285;p26"/>
+          <p:cNvPr id="279" name="Google Shape;279;p25"/>
           <p:cNvSpPr/>
           <p:nvPr/>
         </p:nvSpPr>
@@ -13971,7 +13433,7 @@
       </p:sp>
       <p:sp>
         <p:nvSpPr>
-          <p:cNvPr id="286" name="Google Shape;286;p26"/>
+          <p:cNvPr id="280" name="Google Shape;280;p25"/>
           <p:cNvSpPr/>
           <p:nvPr/>
         </p:nvSpPr>
@@ -14028,7 +13490,7 @@
       </p:sp>
       <p:sp>
         <p:nvSpPr>
-          <p:cNvPr id="287" name="Google Shape;287;p26"/>
+          <p:cNvPr id="281" name="Google Shape;281;p25"/>
           <p:cNvSpPr/>
           <p:nvPr/>
         </p:nvSpPr>
@@ -14085,7 +13547,7 @@
       </p:sp>
       <p:sp>
         <p:nvSpPr>
-          <p:cNvPr id="288" name="Google Shape;288;p26"/>
+          <p:cNvPr id="282" name="Google Shape;282;p25"/>
           <p:cNvSpPr/>
           <p:nvPr/>
         </p:nvSpPr>
@@ -14142,7 +13604,7 @@
       </p:sp>
       <p:sp>
         <p:nvSpPr>
-          <p:cNvPr id="289" name="Google Shape;289;p26"/>
+          <p:cNvPr id="283" name="Google Shape;283;p25"/>
           <p:cNvSpPr/>
           <p:nvPr/>
         </p:nvSpPr>
@@ -14199,7 +13661,7 @@
       </p:sp>
       <p:sp>
         <p:nvSpPr>
-          <p:cNvPr id="290" name="Google Shape;290;p26"/>
+          <p:cNvPr id="284" name="Google Shape;284;p25"/>
           <p:cNvSpPr txBox="1"/>
           <p:nvPr>
             <p:ph type="title"/>
@@ -14239,7 +13701,7 @@
       </p:sp>
       <p:sp>
         <p:nvSpPr>
-          <p:cNvPr id="291" name="Google Shape;291;p26"/>
+          <p:cNvPr id="285" name="Google Shape;285;p25"/>
           <p:cNvSpPr/>
           <p:nvPr/>
         </p:nvSpPr>
@@ -14296,7 +13758,7 @@
       </p:sp>
       <p:sp>
         <p:nvSpPr>
-          <p:cNvPr id="292" name="Google Shape;292;p26"/>
+          <p:cNvPr id="286" name="Google Shape;286;p25"/>
           <p:cNvSpPr txBox="1"/>
           <p:nvPr/>
         </p:nvSpPr>
@@ -14386,7 +13848,7 @@
       </p:sp>
       <p:sp>
         <p:nvSpPr>
-          <p:cNvPr id="293" name="Google Shape;293;p26"/>
+          <p:cNvPr id="287" name="Google Shape;287;p25"/>
           <p:cNvSpPr txBox="1"/>
           <p:nvPr/>
         </p:nvSpPr>
@@ -14484,7 +13946,7 @@
       </p:sp>
       <p:sp>
         <p:nvSpPr>
-          <p:cNvPr id="294" name="Google Shape;294;p26"/>
+          <p:cNvPr id="288" name="Google Shape;288;p25"/>
           <p:cNvSpPr txBox="1"/>
           <p:nvPr/>
         </p:nvSpPr>
@@ -14629,7 +14091,7 @@
       </p:sp>
       <p:sp>
         <p:nvSpPr>
-          <p:cNvPr id="295" name="Google Shape;295;p26"/>
+          <p:cNvPr id="289" name="Google Shape;289;p25"/>
           <p:cNvSpPr txBox="1"/>
           <p:nvPr/>
         </p:nvSpPr>
@@ -14690,7 +14152,7 @@
       </p:sp>
       <p:sp>
         <p:nvSpPr>
-          <p:cNvPr id="296" name="Google Shape;296;p26"/>
+          <p:cNvPr id="290" name="Google Shape;290;p25"/>
           <p:cNvSpPr txBox="1"/>
           <p:nvPr/>
         </p:nvSpPr>
@@ -14788,7 +14250,7 @@
       </p:sp>
       <p:sp>
         <p:nvSpPr>
-          <p:cNvPr id="297" name="Google Shape;297;p26"/>
+          <p:cNvPr id="291" name="Google Shape;291;p25"/>
           <p:cNvSpPr txBox="1"/>
           <p:nvPr/>
         </p:nvSpPr>
@@ -14894,7 +14356,7 @@
       </p:sp>
       <p:pic>
         <p:nvPicPr>
-          <p:cNvPr id="298" name="Google Shape;298;p26"/>
+          <p:cNvPr id="292" name="Google Shape;292;p25"/>
           <p:cNvPicPr preferRelativeResize="0"/>
           <p:nvPr/>
         </p:nvPicPr>
@@ -14910,6 +14372,503 @@
           <a:xfrm>
             <a:off x="8211942" y="59200"/>
             <a:ext cx="785032" cy="1148401"/>
+          </a:xfrm>
+          <a:prstGeom prst="rect">
+            <a:avLst/>
+          </a:prstGeom>
+          <a:noFill/>
+          <a:ln>
+            <a:noFill/>
+          </a:ln>
+        </p:spPr>
+      </p:pic>
+    </p:spTree>
+  </p:cSld>
+  <p:clrMapOvr>
+    <a:masterClrMapping/>
+  </p:clrMapOvr>
+</p:sld>
+</file>
+
+<file path=ppt/slides/slide14.xml><?xml version="1.0" encoding="utf-8"?>
+<p:sld xmlns:a="http://schemas.openxmlformats.org/drawingml/2006/main" xmlns:r="http://schemas.openxmlformats.org/officeDocument/2006/relationships" xmlns:mc="http://schemas.openxmlformats.org/markup-compatibility/2006" xmlns:mv="urn:schemas-microsoft-com:mac:vml" xmlns:p="http://schemas.openxmlformats.org/presentationml/2006/main" xmlns:c="http://schemas.openxmlformats.org/drawingml/2006/chart" xmlns:dgm="http://schemas.openxmlformats.org/drawingml/2006/diagram" xmlns:o="urn:schemas-microsoft-com:office:office" xmlns:v="urn:schemas-microsoft-com:vml" xmlns:pvml="urn:schemas-microsoft-com:office:powerpoint" xmlns:com="http://schemas.openxmlformats.org/drawingml/2006/compatibility" xmlns:p14="http://schemas.microsoft.com/office/powerpoint/2010/main" xmlns:p15="http://schemas.microsoft.com/office/powerpoint/2012/main" xmlns:ahyp="http://schemas.microsoft.com/office/drawing/2018/hyperlinkcolor">
+  <p:cSld>
+    <p:spTree>
+      <p:nvGrpSpPr>
+        <p:cNvPr id="296" name="Shape 296"/>
+        <p:cNvGrpSpPr/>
+        <p:nvPr/>
+      </p:nvGrpSpPr>
+      <p:grpSpPr>
+        <a:xfrm>
+          <a:off x="0" y="0"/>
+          <a:ext cx="0" cy="0"/>
+          <a:chOff x="0" y="0"/>
+          <a:chExt cx="0" cy="0"/>
+        </a:xfrm>
+      </p:grpSpPr>
+      <p:sp>
+        <p:nvSpPr>
+          <p:cNvPr id="297" name="Google Shape;297;p26"/>
+          <p:cNvSpPr txBox="1"/>
+          <p:nvPr>
+            <p:ph type="title"/>
+          </p:nvPr>
+        </p:nvSpPr>
+        <p:spPr>
+          <a:xfrm>
+            <a:off x="1491450" y="381000"/>
+            <a:ext cx="7688400" cy="535200"/>
+          </a:xfrm>
+          <a:prstGeom prst="rect">
+            <a:avLst/>
+          </a:prstGeom>
+        </p:spPr>
+        <p:txBody>
+          <a:bodyPr anchorCtr="0" anchor="t" bIns="91425" lIns="91425" spcFirstLastPara="1" rIns="91425" wrap="square" tIns="91425">
+            <a:normAutofit fontScale="90000"/>
+          </a:bodyPr>
+          <a:lstStyle/>
+          <a:p>
+            <a:pPr indent="0" lvl="0" marL="0" rtl="0" algn="l">
+              <a:spcBef>
+                <a:spcPts val="0"/>
+              </a:spcBef>
+              <a:spcAft>
+                <a:spcPts val="0"/>
+              </a:spcAft>
+              <a:buNone/>
+            </a:pPr>
+            <a:r>
+              <a:rPr lang="fr"/>
+              <a:t>Accompagnement PGD (Plan de Gestion de données)</a:t>
+            </a:r>
+            <a:endParaRPr/>
+          </a:p>
+        </p:txBody>
+      </p:sp>
+      <p:sp>
+        <p:nvSpPr>
+          <p:cNvPr id="298" name="Google Shape;298;p26"/>
+          <p:cNvSpPr txBox="1"/>
+          <p:nvPr>
+            <p:ph idx="1" type="body"/>
+          </p:nvPr>
+        </p:nvSpPr>
+        <p:spPr>
+          <a:xfrm>
+            <a:off x="729325" y="2275700"/>
+            <a:ext cx="3774300" cy="2521500"/>
+          </a:xfrm>
+          <a:prstGeom prst="rect">
+            <a:avLst/>
+          </a:prstGeom>
+          <a:solidFill>
+            <a:schemeClr val="accent3"/>
+          </a:solidFill>
+        </p:spPr>
+        <p:txBody>
+          <a:bodyPr anchorCtr="0" anchor="t" bIns="91425" lIns="91425" spcFirstLastPara="1" rIns="91425" wrap="square" tIns="91425">
+            <a:normAutofit lnSpcReduction="10000"/>
+          </a:bodyPr>
+          <a:lstStyle/>
+          <a:p>
+            <a:pPr indent="0" lvl="0" marL="0" rtl="0" algn="l">
+              <a:spcBef>
+                <a:spcPts val="0"/>
+              </a:spcBef>
+              <a:spcAft>
+                <a:spcPts val="0"/>
+              </a:spcAft>
+              <a:buNone/>
+            </a:pPr>
+            <a:r>
+              <a:rPr b="1" lang="fr">
+                <a:solidFill>
+                  <a:schemeClr val="lt1"/>
+                </a:solidFill>
+              </a:rPr>
+              <a:t>Modalités d’accompagnement</a:t>
+            </a:r>
+            <a:endParaRPr>
+              <a:solidFill>
+                <a:schemeClr val="lt1"/>
+              </a:solidFill>
+            </a:endParaRPr>
+          </a:p>
+          <a:p>
+            <a:pPr indent="-311150" lvl="0" marL="457200" rtl="0" algn="l">
+              <a:spcBef>
+                <a:spcPts val="1200"/>
+              </a:spcBef>
+              <a:spcAft>
+                <a:spcPts val="0"/>
+              </a:spcAft>
+              <a:buClr>
+                <a:schemeClr val="lt1"/>
+              </a:buClr>
+              <a:buSzPts val="1300"/>
+              <a:buChar char="➔"/>
+            </a:pPr>
+            <a:r>
+              <a:rPr lang="fr">
+                <a:solidFill>
+                  <a:schemeClr val="lt1"/>
+                </a:solidFill>
+              </a:rPr>
+              <a:t>Articulation avec les directions de la recherche / sollicitation spontanée des chercheurs</a:t>
+            </a:r>
+            <a:endParaRPr>
+              <a:solidFill>
+                <a:schemeClr val="lt1"/>
+              </a:solidFill>
+            </a:endParaRPr>
+          </a:p>
+          <a:p>
+            <a:pPr indent="-311150" lvl="0" marL="457200" rtl="0" algn="l">
+              <a:spcBef>
+                <a:spcPts val="0"/>
+              </a:spcBef>
+              <a:spcAft>
+                <a:spcPts val="0"/>
+              </a:spcAft>
+              <a:buClr>
+                <a:schemeClr val="lt1"/>
+              </a:buClr>
+              <a:buSzPts val="1300"/>
+              <a:buChar char="➔"/>
+            </a:pPr>
+            <a:r>
+              <a:rPr lang="fr">
+                <a:solidFill>
+                  <a:schemeClr val="lt1"/>
+                </a:solidFill>
+              </a:rPr>
+              <a:t>Rendez-vous personnalisés : relecture ou montage du PGD avec réunion d’équipe</a:t>
+            </a:r>
+            <a:endParaRPr>
+              <a:solidFill>
+                <a:schemeClr val="lt1"/>
+              </a:solidFill>
+            </a:endParaRPr>
+          </a:p>
+          <a:p>
+            <a:pPr indent="-311150" lvl="0" marL="457200" rtl="0" algn="l">
+              <a:spcBef>
+                <a:spcPts val="0"/>
+              </a:spcBef>
+              <a:spcAft>
+                <a:spcPts val="0"/>
+              </a:spcAft>
+              <a:buClr>
+                <a:schemeClr val="lt1"/>
+              </a:buClr>
+              <a:buSzPts val="1300"/>
+              <a:buChar char="➔"/>
+            </a:pPr>
+            <a:r>
+              <a:rPr lang="fr">
+                <a:solidFill>
+                  <a:schemeClr val="lt1"/>
+                </a:solidFill>
+              </a:rPr>
+              <a:t>Systématisation en cours de l’accompagnement des projets financés grâce à une c</a:t>
+            </a:r>
+            <a:r>
+              <a:rPr lang="fr">
+                <a:solidFill>
+                  <a:schemeClr val="lt1"/>
+                </a:solidFill>
+              </a:rPr>
+              <a:t>ollaboration avec les directions de la recherche</a:t>
+            </a:r>
+            <a:endParaRPr>
+              <a:solidFill>
+                <a:schemeClr val="lt1"/>
+              </a:solidFill>
+            </a:endParaRPr>
+          </a:p>
+        </p:txBody>
+      </p:sp>
+      <p:sp>
+        <p:nvSpPr>
+          <p:cNvPr id="299" name="Google Shape;299;p26"/>
+          <p:cNvSpPr txBox="1"/>
+          <p:nvPr>
+            <p:ph idx="2" type="body"/>
+          </p:nvPr>
+        </p:nvSpPr>
+        <p:spPr>
+          <a:xfrm>
+            <a:off x="4643550" y="2275700"/>
+            <a:ext cx="4353300" cy="3760200"/>
+          </a:xfrm>
+          <a:prstGeom prst="rect">
+            <a:avLst/>
+          </a:prstGeom>
+        </p:spPr>
+        <p:txBody>
+          <a:bodyPr anchorCtr="0" anchor="t" bIns="91425" lIns="91425" spcFirstLastPara="1" rIns="91425" wrap="square" tIns="91425">
+            <a:normAutofit/>
+          </a:bodyPr>
+          <a:lstStyle/>
+          <a:p>
+            <a:pPr indent="0" lvl="0" marL="0" rtl="0" algn="l">
+              <a:spcBef>
+                <a:spcPts val="0"/>
+              </a:spcBef>
+              <a:spcAft>
+                <a:spcPts val="0"/>
+              </a:spcAft>
+              <a:buNone/>
+            </a:pPr>
+            <a:r>
+              <a:rPr lang="fr"/>
+              <a:t>Ce service inclut :</a:t>
+            </a:r>
+            <a:endParaRPr/>
+          </a:p>
+          <a:p>
+            <a:pPr indent="-311150" lvl="0" marL="457200" rtl="0" algn="l">
+              <a:spcBef>
+                <a:spcPts val="1200"/>
+              </a:spcBef>
+              <a:spcAft>
+                <a:spcPts val="0"/>
+              </a:spcAft>
+              <a:buSzPts val="1300"/>
+              <a:buChar char="➔"/>
+            </a:pPr>
+            <a:r>
+              <a:rPr lang="fr"/>
+              <a:t>Rendez-vous personnalisés</a:t>
+            </a:r>
+            <a:endParaRPr/>
+          </a:p>
+          <a:p>
+            <a:pPr indent="-311150" lvl="0" marL="457200" rtl="0" algn="l">
+              <a:spcBef>
+                <a:spcPts val="0"/>
+              </a:spcBef>
+              <a:spcAft>
+                <a:spcPts val="0"/>
+              </a:spcAft>
+              <a:buSzPts val="1300"/>
+              <a:buChar char="➔"/>
+            </a:pPr>
+            <a:r>
+              <a:rPr lang="fr"/>
+              <a:t>R</a:t>
+            </a:r>
+            <a:r>
+              <a:rPr lang="fr"/>
+              <a:t>electure des PGD</a:t>
+            </a:r>
+            <a:endParaRPr/>
+          </a:p>
+          <a:p>
+            <a:pPr indent="-311150" lvl="0" marL="457200" rtl="0" algn="l">
+              <a:spcBef>
+                <a:spcPts val="0"/>
+              </a:spcBef>
+              <a:spcAft>
+                <a:spcPts val="0"/>
+              </a:spcAft>
+              <a:buSzPts val="1300"/>
+              <a:buChar char="➔"/>
+            </a:pPr>
+            <a:r>
+              <a:rPr lang="fr"/>
+              <a:t>Rédaction de recommandations sur DMP OPIDoR</a:t>
+            </a:r>
+            <a:endParaRPr/>
+          </a:p>
+          <a:p>
+            <a:pPr indent="-311150" lvl="0" marL="457200" rtl="0" algn="l">
+              <a:spcBef>
+                <a:spcPts val="0"/>
+              </a:spcBef>
+              <a:spcAft>
+                <a:spcPts val="0"/>
+              </a:spcAft>
+              <a:buSzPts val="1300"/>
+              <a:buChar char="➔"/>
+            </a:pPr>
+            <a:r>
+              <a:rPr lang="fr"/>
+              <a:t>Assistance sur les différentes étapes du cycle de vie des données</a:t>
+            </a:r>
+            <a:endParaRPr/>
+          </a:p>
+          <a:p>
+            <a:pPr indent="-311150" lvl="0" marL="457200" rtl="0" algn="l">
+              <a:spcBef>
+                <a:spcPts val="0"/>
+              </a:spcBef>
+              <a:spcAft>
+                <a:spcPts val="0"/>
+              </a:spcAft>
+              <a:buSzPts val="1300"/>
+              <a:buChar char="➔"/>
+            </a:pPr>
+            <a:r>
+              <a:rPr lang="fr"/>
+              <a:t>Assistance sur les questions liées aux données sensibles et personnelles</a:t>
+            </a:r>
+            <a:endParaRPr/>
+          </a:p>
+          <a:p>
+            <a:pPr indent="-311150" lvl="0" marL="457200" rtl="0" algn="l">
+              <a:spcBef>
+                <a:spcPts val="0"/>
+              </a:spcBef>
+              <a:spcAft>
+                <a:spcPts val="0"/>
+              </a:spcAft>
+              <a:buSzPts val="1300"/>
+              <a:buChar char="➔"/>
+            </a:pPr>
+            <a:r>
+              <a:rPr lang="fr"/>
+              <a:t>Redirection vers les plateformes disciplinaires spécialisées</a:t>
+            </a:r>
+            <a:endParaRPr/>
+          </a:p>
+        </p:txBody>
+      </p:sp>
+      <p:pic>
+        <p:nvPicPr>
+          <p:cNvPr id="300" name="Google Shape;300;p26"/>
+          <p:cNvPicPr preferRelativeResize="0"/>
+          <p:nvPr/>
+        </p:nvPicPr>
+        <p:blipFill>
+          <a:blip r:embed="rId3">
+            <a:alphaModFix/>
+          </a:blip>
+          <a:stretch>
+            <a:fillRect/>
+          </a:stretch>
+        </p:blipFill>
+        <p:spPr>
+          <a:xfrm>
+            <a:off x="8211942" y="59200"/>
+            <a:ext cx="785032" cy="1148401"/>
+          </a:xfrm>
+          <a:prstGeom prst="rect">
+            <a:avLst/>
+          </a:prstGeom>
+          <a:noFill/>
+          <a:ln>
+            <a:noFill/>
+          </a:ln>
+        </p:spPr>
+      </p:pic>
+      <p:pic>
+        <p:nvPicPr>
+          <p:cNvPr id="301" name="Google Shape;301;p26"/>
+          <p:cNvPicPr preferRelativeResize="0"/>
+          <p:nvPr/>
+        </p:nvPicPr>
+        <p:blipFill>
+          <a:blip r:embed="rId4">
+            <a:alphaModFix/>
+          </a:blip>
+          <a:stretch>
+            <a:fillRect/>
+          </a:stretch>
+        </p:blipFill>
+        <p:spPr>
+          <a:xfrm>
+            <a:off x="818825" y="510887"/>
+            <a:ext cx="626749" cy="626749"/>
+          </a:xfrm>
+          <a:prstGeom prst="rect">
+            <a:avLst/>
+          </a:prstGeom>
+          <a:noFill/>
+          <a:ln>
+            <a:noFill/>
+          </a:ln>
+        </p:spPr>
+      </p:pic>
+      <p:sp>
+        <p:nvSpPr>
+          <p:cNvPr id="302" name="Google Shape;302;p26"/>
+          <p:cNvSpPr txBox="1"/>
+          <p:nvPr/>
+        </p:nvSpPr>
+        <p:spPr>
+          <a:xfrm>
+            <a:off x="729325" y="1423325"/>
+            <a:ext cx="8100000" cy="615000"/>
+          </a:xfrm>
+          <a:prstGeom prst="rect">
+            <a:avLst/>
+          </a:prstGeom>
+          <a:solidFill>
+            <a:schemeClr val="dk1"/>
+          </a:solidFill>
+          <a:ln>
+            <a:noFill/>
+          </a:ln>
+        </p:spPr>
+        <p:txBody>
+          <a:bodyPr anchorCtr="0" anchor="t" bIns="91425" lIns="91425" spcFirstLastPara="1" rIns="91425" wrap="square" tIns="91425">
+            <a:spAutoFit/>
+          </a:bodyPr>
+          <a:lstStyle/>
+          <a:p>
+            <a:pPr indent="0" lvl="0" marL="0" rtl="0" algn="l">
+              <a:lnSpc>
+                <a:spcPct val="115000"/>
+              </a:lnSpc>
+              <a:spcBef>
+                <a:spcPts val="0"/>
+              </a:spcBef>
+              <a:spcAft>
+                <a:spcPts val="1200"/>
+              </a:spcAft>
+              <a:buNone/>
+            </a:pPr>
+            <a:r>
+              <a:rPr lang="fr" sz="1300">
+                <a:solidFill>
+                  <a:schemeClr val="lt1"/>
+                </a:solidFill>
+                <a:latin typeface="Lato"/>
+                <a:ea typeface="Lato"/>
+                <a:cs typeface="Lato"/>
+                <a:sym typeface="Lato"/>
+              </a:rPr>
+              <a:t>Service d’expertise à destination des porteurs de projets, afin de les assister sur tous les sujets liés au cycle de vie des données, pendant la phase de montage du projet, et en suivi des projets</a:t>
+            </a:r>
+            <a:endParaRPr>
+              <a:solidFill>
+                <a:schemeClr val="lt1"/>
+              </a:solidFill>
+            </a:endParaRPr>
+          </a:p>
+        </p:txBody>
+      </p:sp>
+      <p:pic>
+        <p:nvPicPr>
+          <p:cNvPr id="303" name="Google Shape;303;p26"/>
+          <p:cNvPicPr preferRelativeResize="0"/>
+          <p:nvPr/>
+        </p:nvPicPr>
+        <p:blipFill>
+          <a:blip r:embed="rId5">
+            <a:alphaModFix/>
+          </a:blip>
+          <a:stretch>
+            <a:fillRect/>
+          </a:stretch>
+        </p:blipFill>
+        <p:spPr>
+          <a:xfrm>
+            <a:off x="7746175" y="2393040"/>
+            <a:ext cx="1083150" cy="431475"/>
           </a:xfrm>
           <a:prstGeom prst="rect">
             <a:avLst/>
@@ -14933,7 +14892,7 @@
   <p:cSld>
     <p:spTree>
       <p:nvGrpSpPr>
-        <p:cNvPr id="302" name="Shape 302"/>
+        <p:cNvPr id="307" name="Shape 307"/>
         <p:cNvGrpSpPr/>
         <p:nvPr/>
       </p:nvGrpSpPr>
@@ -14947,7 +14906,7 @@
       </p:grpSpPr>
       <p:sp>
         <p:nvSpPr>
-          <p:cNvPr id="303" name="Google Shape;303;p27"/>
+          <p:cNvPr id="308" name="Google Shape;308;p27"/>
           <p:cNvSpPr txBox="1"/>
           <p:nvPr>
             <p:ph type="title"/>
@@ -14955,7 +14914,7 @@
         </p:nvSpPr>
         <p:spPr>
           <a:xfrm>
-            <a:off x="1491450" y="381000"/>
+            <a:off x="729450" y="480450"/>
             <a:ext cx="7688400" cy="535200"/>
           </a:xfrm>
           <a:prstGeom prst="rect">
@@ -14979,7 +14938,7 @@
             </a:pPr>
             <a:r>
               <a:rPr lang="fr"/>
-              <a:t>Accompagnement PGD (Plan de Gestion de données)</a:t>
+              <a:t>Accompagnement PGD </a:t>
             </a:r>
             <a:endParaRPr/>
           </a:p>
@@ -14987,7 +14946,7 @@
       </p:sp>
       <p:sp>
         <p:nvSpPr>
-          <p:cNvPr id="304" name="Google Shape;304;p27"/>
+          <p:cNvPr id="309" name="Google Shape;309;p27"/>
           <p:cNvSpPr txBox="1"/>
           <p:nvPr>
             <p:ph idx="1" type="body"/>
@@ -14995,19 +14954,16 @@
         </p:nvSpPr>
         <p:spPr>
           <a:xfrm>
-            <a:off x="729325" y="2275700"/>
-            <a:ext cx="3774300" cy="2521500"/>
+            <a:off x="729325" y="1393075"/>
+            <a:ext cx="3774300" cy="2892600"/>
           </a:xfrm>
           <a:prstGeom prst="rect">
             <a:avLst/>
           </a:prstGeom>
-          <a:solidFill>
-            <a:schemeClr val="accent3"/>
-          </a:solidFill>
         </p:spPr>
         <p:txBody>
           <a:bodyPr anchorCtr="0" anchor="t" bIns="91425" lIns="91425" spcFirstLastPara="1" rIns="91425" wrap="square" tIns="91425">
-            <a:normAutofit lnSpcReduction="10000"/>
+            <a:normAutofit fontScale="40000" lnSpcReduction="10000"/>
           </a:bodyPr>
           <a:lstStyle/>
           <a:p>
@@ -15021,116 +14977,207 @@
               <a:buNone/>
             </a:pPr>
             <a:r>
-              <a:rPr b="1" lang="fr">
-                <a:solidFill>
-                  <a:schemeClr val="lt1"/>
-                </a:solidFill>
-              </a:rPr>
-              <a:t>Modalités d’accompagnement</a:t>
-            </a:r>
-            <a:endParaRPr>
-              <a:solidFill>
-                <a:schemeClr val="lt1"/>
-              </a:solidFill>
-            </a:endParaRPr>
-          </a:p>
-          <a:p>
-            <a:pPr indent="-311150" lvl="0" marL="457200" rtl="0" algn="l">
+              <a:rPr b="1" lang="fr" sz="3250"/>
+              <a:t>L’accompagnement en quelques chiffres</a:t>
+            </a:r>
+            <a:endParaRPr b="1" sz="3250"/>
+          </a:p>
+          <a:p>
+            <a:pPr indent="-297180" lvl="0" marL="457200" rtl="0" algn="l">
               <a:spcBef>
                 <a:spcPts val="1200"/>
               </a:spcBef>
               <a:spcAft>
                 <a:spcPts val="0"/>
               </a:spcAft>
-              <a:buClr>
-                <a:schemeClr val="lt1"/>
-              </a:buClr>
-              <a:buSzPts val="1300"/>
+              <a:buSzPct val="100000"/>
               <a:buChar char="➔"/>
             </a:pPr>
             <a:r>
-              <a:rPr lang="fr">
-                <a:solidFill>
-                  <a:schemeClr val="lt1"/>
-                </a:solidFill>
-              </a:rPr>
-              <a:t>Articulation avec les directions de la recherche / sollicitation spontanée des chercheurs</a:t>
-            </a:r>
-            <a:endParaRPr>
-              <a:solidFill>
-                <a:schemeClr val="lt1"/>
-              </a:solidFill>
-            </a:endParaRPr>
-          </a:p>
-          <a:p>
-            <a:pPr indent="-311150" lvl="0" marL="457200" rtl="0" algn="l">
-              <a:spcBef>
-                <a:spcPts val="0"/>
-              </a:spcBef>
-              <a:spcAft>
-                <a:spcPts val="0"/>
-              </a:spcAft>
-              <a:buClr>
-                <a:schemeClr val="lt1"/>
-              </a:buClr>
-              <a:buSzPts val="1300"/>
+              <a:rPr b="1" lang="fr" sz="2700"/>
+              <a:t>24 PGD</a:t>
+            </a:r>
+            <a:r>
+              <a:rPr lang="fr" sz="2700"/>
+              <a:t> accompagnés depuis janvier 2023</a:t>
+            </a:r>
+            <a:endParaRPr sz="2700"/>
+          </a:p>
+          <a:p>
+            <a:pPr indent="-297180" lvl="0" marL="457200" rtl="0" algn="l">
+              <a:spcBef>
+                <a:spcPts val="0"/>
+              </a:spcBef>
+              <a:spcAft>
+                <a:spcPts val="0"/>
+              </a:spcAft>
+              <a:buSzPct val="100000"/>
               <a:buChar char="➔"/>
             </a:pPr>
             <a:r>
-              <a:rPr lang="fr">
-                <a:solidFill>
-                  <a:schemeClr val="lt1"/>
-                </a:solidFill>
-              </a:rPr>
-              <a:t>Rendez-vous personnalisés : relecture ou montage du PGD avec réunion d’équipe</a:t>
-            </a:r>
-            <a:endParaRPr>
-              <a:solidFill>
-                <a:schemeClr val="lt1"/>
-              </a:solidFill>
-            </a:endParaRPr>
-          </a:p>
-          <a:p>
-            <a:pPr indent="-311150" lvl="0" marL="457200" rtl="0" algn="l">
-              <a:spcBef>
-                <a:spcPts val="0"/>
-              </a:spcBef>
-              <a:spcAft>
-                <a:spcPts val="0"/>
-              </a:spcAft>
-              <a:buClr>
-                <a:schemeClr val="lt1"/>
-              </a:buClr>
-              <a:buSzPts val="1300"/>
+              <a:rPr b="1" lang="fr" sz="2700"/>
+              <a:t>40h </a:t>
+            </a:r>
+            <a:r>
+              <a:rPr lang="fr" sz="2700"/>
+              <a:t>de rendez-vous</a:t>
+            </a:r>
+            <a:endParaRPr sz="2700"/>
+          </a:p>
+          <a:p>
+            <a:pPr indent="0" lvl="0" marL="0" rtl="0" algn="l">
+              <a:spcBef>
+                <a:spcPts val="1200"/>
+              </a:spcBef>
+              <a:spcAft>
+                <a:spcPts val="0"/>
+              </a:spcAft>
+              <a:buNone/>
+            </a:pPr>
+            <a:r>
+              <a:rPr b="1" lang="fr" sz="3200"/>
+              <a:t>Quelques exemples de projets accompagnées</a:t>
+            </a:r>
+            <a:r>
+              <a:rPr lang="fr" sz="2700"/>
+              <a:t> </a:t>
+            </a:r>
+            <a:endParaRPr sz="2700"/>
+          </a:p>
+          <a:p>
+            <a:pPr indent="-297180" lvl="0" marL="457200" rtl="0" algn="l">
+              <a:spcBef>
+                <a:spcPts val="1200"/>
+              </a:spcBef>
+              <a:spcAft>
+                <a:spcPts val="0"/>
+              </a:spcAft>
+              <a:buSzPct val="100000"/>
               <a:buChar char="➔"/>
             </a:pPr>
             <a:r>
-              <a:rPr lang="fr">
-                <a:solidFill>
-                  <a:schemeClr val="lt1"/>
-                </a:solidFill>
-              </a:rPr>
-              <a:t>Systématisation en cours de l’accompagnement des projets financés grâce à une c</a:t>
-            </a:r>
-            <a:r>
-              <a:rPr lang="fr">
-                <a:solidFill>
-                  <a:schemeClr val="lt1"/>
-                </a:solidFill>
-              </a:rPr>
-              <a:t>ollaboration avec les directions de la recherche</a:t>
-            </a:r>
-            <a:endParaRPr>
-              <a:solidFill>
-                <a:schemeClr val="lt1"/>
-              </a:solidFill>
-            </a:endParaRPr>
+              <a:rPr b="1" lang="fr" sz="2700"/>
+              <a:t>projets ANR</a:t>
+            </a:r>
+            <a:r>
+              <a:rPr lang="fr" sz="2700"/>
+              <a:t> LIVING LAB, AIR, PARCEDES, PAGAIE, IRIS-E,...</a:t>
+            </a:r>
+            <a:endParaRPr sz="2700"/>
+          </a:p>
+          <a:p>
+            <a:pPr indent="-297180" lvl="0" marL="457200" rtl="0" algn="l">
+              <a:spcBef>
+                <a:spcPts val="0"/>
+              </a:spcBef>
+              <a:spcAft>
+                <a:spcPts val="0"/>
+              </a:spcAft>
+              <a:buSzPct val="100000"/>
+              <a:buChar char="➔"/>
+            </a:pPr>
+            <a:r>
+              <a:rPr b="1" lang="fr" sz="2700"/>
+              <a:t>projets PIA</a:t>
+            </a:r>
+            <a:r>
+              <a:rPr lang="fr" sz="2700"/>
+              <a:t> REVEA, DIGISPORT, …</a:t>
+            </a:r>
+            <a:endParaRPr sz="2700"/>
+          </a:p>
+          <a:p>
+            <a:pPr indent="-297180" lvl="0" marL="457200" rtl="0" algn="l">
+              <a:spcBef>
+                <a:spcPts val="0"/>
+              </a:spcBef>
+              <a:spcAft>
+                <a:spcPts val="0"/>
+              </a:spcAft>
+              <a:buSzPct val="100000"/>
+              <a:buChar char="➔"/>
+            </a:pPr>
+            <a:r>
+              <a:rPr b="1" lang="fr" sz="2700"/>
+              <a:t>projets européens</a:t>
+            </a:r>
+            <a:r>
+              <a:rPr lang="fr" sz="2700"/>
+              <a:t> SCORE, ERC STAGE, SURCRIME</a:t>
+            </a:r>
+            <a:endParaRPr sz="2700"/>
+          </a:p>
+          <a:p>
+            <a:pPr indent="-297180" lvl="0" marL="457200" rtl="0" algn="l">
+              <a:spcBef>
+                <a:spcPts val="0"/>
+              </a:spcBef>
+              <a:spcAft>
+                <a:spcPts val="0"/>
+              </a:spcAft>
+              <a:buSzPct val="100000"/>
+              <a:buChar char="➔"/>
+            </a:pPr>
+            <a:r>
+              <a:rPr lang="fr" sz="2700"/>
+              <a:t>projets Bienvenüe : RESOUND,...</a:t>
+            </a:r>
+            <a:endParaRPr sz="2700"/>
+          </a:p>
+          <a:p>
+            <a:pPr indent="-297180" lvl="0" marL="457200" rtl="0" algn="l">
+              <a:spcBef>
+                <a:spcPts val="0"/>
+              </a:spcBef>
+              <a:spcAft>
+                <a:spcPts val="0"/>
+              </a:spcAft>
+              <a:buSzPct val="100000"/>
+              <a:buChar char="➔"/>
+            </a:pPr>
+            <a:r>
+              <a:rPr lang="fr" sz="2700"/>
+              <a:t>projets non financés : CIL,...</a:t>
+            </a:r>
+            <a:endParaRPr sz="2700"/>
+          </a:p>
+          <a:p>
+            <a:pPr indent="-297180" lvl="0" marL="457200" rtl="0" algn="l">
+              <a:spcBef>
+                <a:spcPts val="0"/>
+              </a:spcBef>
+              <a:spcAft>
+                <a:spcPts val="0"/>
+              </a:spcAft>
+              <a:buSzPct val="100000"/>
+              <a:buChar char="➔"/>
+            </a:pPr>
+            <a:r>
+              <a:rPr lang="fr" sz="2700"/>
+              <a:t>thèses</a:t>
+            </a:r>
+            <a:endParaRPr sz="2700"/>
+          </a:p>
+          <a:p>
+            <a:pPr indent="0" lvl="0" marL="0" rtl="0" algn="l">
+              <a:spcBef>
+                <a:spcPts val="1200"/>
+              </a:spcBef>
+              <a:spcAft>
+                <a:spcPts val="1200"/>
+              </a:spcAft>
+              <a:buNone/>
+            </a:pPr>
+            <a:r>
+              <a:t/>
+            </a:r>
+            <a:endParaRPr/>
           </a:p>
         </p:txBody>
       </p:sp>
       <p:sp>
         <p:nvSpPr>
-          <p:cNvPr id="305" name="Google Shape;305;p27"/>
+          <p:cNvPr id="310" name="Google Shape;310;p27"/>
           <p:cNvSpPr txBox="1"/>
           <p:nvPr>
             <p:ph idx="2" type="body"/>
@@ -15138,16 +15185,19 @@
         </p:nvSpPr>
         <p:spPr>
           <a:xfrm>
-            <a:off x="4643550" y="2275700"/>
-            <a:ext cx="4353300" cy="3760200"/>
+            <a:off x="4643604" y="1926475"/>
+            <a:ext cx="3774300" cy="2261100"/>
           </a:xfrm>
           <a:prstGeom prst="rect">
             <a:avLst/>
           </a:prstGeom>
+          <a:solidFill>
+            <a:schemeClr val="lt2"/>
+          </a:solidFill>
         </p:spPr>
         <p:txBody>
           <a:bodyPr anchorCtr="0" anchor="t" bIns="91425" lIns="91425" spcFirstLastPara="1" rIns="91425" wrap="square" tIns="91425">
-            <a:normAutofit/>
+            <a:normAutofit fontScale="70000" lnSpcReduction="20000"/>
           </a:bodyPr>
           <a:lstStyle/>
           <a:p>
@@ -15162,113 +15212,72 @@
             </a:pPr>
             <a:r>
               <a:rPr lang="fr"/>
-              <a:t>Ce service inclut :</a:t>
+              <a:t>Projet fédérateur de l’EPE et de ses partenaires, ce projet lauréat du projet national "Excellences sous toutes ses formes" du PIA, le projet "Interdisciplinary Research &amp; Innovative Solutions for Environmental transition" (IRIS-E) réunit les forces académiques et socioéconomiques du territoire afin de faire de la métropole rennaise et de la Région Bretagne le laboratoire européen pour la transition environnementale.</a:t>
             </a:r>
             <a:endParaRPr/>
           </a:p>
           <a:p>
-            <a:pPr indent="-311150" lvl="0" marL="457200" rtl="0" algn="l">
+            <a:pPr indent="0" lvl="0" marL="0" rtl="0" algn="l">
               <a:spcBef>
                 <a:spcPts val="1200"/>
               </a:spcBef>
               <a:spcAft>
                 <a:spcPts val="0"/>
               </a:spcAft>
-              <a:buSzPts val="1300"/>
+              <a:buNone/>
+            </a:pPr>
+            <a:r>
+              <a:rPr lang="fr"/>
+              <a:t>&gt; Meta projet d’où seront issus des projets de recherche</a:t>
+            </a:r>
+            <a:endParaRPr/>
+          </a:p>
+          <a:p>
+            <a:pPr indent="-286385" lvl="0" marL="457200" rtl="0" algn="l">
+              <a:spcBef>
+                <a:spcPts val="1200"/>
+              </a:spcBef>
+              <a:spcAft>
+                <a:spcPts val="0"/>
+              </a:spcAft>
+              <a:buSzPct val="100000"/>
               <a:buChar char="➔"/>
             </a:pPr>
             <a:r>
               <a:rPr lang="fr"/>
-              <a:t>Rendez-vous personnalisés</a:t>
+              <a:t>Elaboration d’1 méta PGD qui encadre les PGD des projets IRIS-E</a:t>
             </a:r>
             <a:endParaRPr/>
           </a:p>
           <a:p>
-            <a:pPr indent="-311150" lvl="0" marL="457200" rtl="0" algn="l">
-              <a:spcBef>
-                <a:spcPts val="0"/>
-              </a:spcBef>
-              <a:spcAft>
-                <a:spcPts val="0"/>
-              </a:spcAft>
-              <a:buSzPts val="1300"/>
+            <a:pPr indent="-286385" lvl="0" marL="457200" rtl="0" algn="l">
+              <a:spcBef>
+                <a:spcPts val="0"/>
+              </a:spcBef>
+              <a:spcAft>
+                <a:spcPts val="0"/>
+              </a:spcAft>
+              <a:buSzPct val="100000"/>
               <a:buChar char="➔"/>
             </a:pPr>
             <a:r>
               <a:rPr lang="fr"/>
-              <a:t>R</a:t>
-            </a:r>
-            <a:r>
-              <a:rPr lang="fr"/>
-              <a:t>electure des PGD</a:t>
+              <a:t>Redirection de tous les porteurs de projets IRIS-E vers le guichet ARDoISE</a:t>
             </a:r>
             <a:endParaRPr/>
           </a:p>
           <a:p>
-            <a:pPr indent="-311150" lvl="0" marL="457200" rtl="0" algn="l">
-              <a:spcBef>
-                <a:spcPts val="0"/>
-              </a:spcBef>
-              <a:spcAft>
-                <a:spcPts val="0"/>
-              </a:spcAft>
-              <a:buSzPts val="1300"/>
-              <a:buChar char="➔"/>
-            </a:pPr>
-            <a:r>
-              <a:rPr lang="fr"/>
-              <a:t>Rédaction de recommandations sur DMP OPIDoR</a:t>
-            </a:r>
-            <a:endParaRPr/>
-          </a:p>
-          <a:p>
-            <a:pPr indent="-311150" lvl="0" marL="457200" rtl="0" algn="l">
-              <a:spcBef>
-                <a:spcPts val="0"/>
-              </a:spcBef>
-              <a:spcAft>
-                <a:spcPts val="0"/>
-              </a:spcAft>
-              <a:buSzPts val="1300"/>
-              <a:buChar char="➔"/>
-            </a:pPr>
-            <a:r>
-              <a:rPr lang="fr"/>
-              <a:t>Assistance sur les différentes étapes du cycle de vie des données</a:t>
-            </a:r>
-            <a:endParaRPr/>
-          </a:p>
-          <a:p>
-            <a:pPr indent="-311150" lvl="0" marL="457200" rtl="0" algn="l">
-              <a:spcBef>
-                <a:spcPts val="0"/>
-              </a:spcBef>
-              <a:spcAft>
-                <a:spcPts val="0"/>
-              </a:spcAft>
-              <a:buSzPts val="1300"/>
-              <a:buChar char="➔"/>
-            </a:pPr>
-            <a:r>
-              <a:rPr lang="fr"/>
-              <a:t>Assistance sur les questions liées aux données sensibles et personnelles</a:t>
-            </a:r>
-            <a:endParaRPr/>
-          </a:p>
-          <a:p>
-            <a:pPr indent="-311150" lvl="0" marL="457200" rtl="0" algn="l">
-              <a:spcBef>
-                <a:spcPts val="0"/>
-              </a:spcBef>
-              <a:spcAft>
-                <a:spcPts val="0"/>
-              </a:spcAft>
-              <a:buSzPts val="1300"/>
-              <a:buChar char="➔"/>
-            </a:pPr>
-            <a:r>
-              <a:rPr lang="fr"/>
-              <a:t>Redirection vers les plateformes disciplinaires spécialisées</a:t>
+            <a:pPr indent="0" lvl="0" marL="0" rtl="0" algn="l">
+              <a:spcBef>
+                <a:spcPts val="1200"/>
+              </a:spcBef>
+              <a:spcAft>
+                <a:spcPts val="1200"/>
+              </a:spcAft>
+              <a:buNone/>
+            </a:pPr>
+            <a:r>
+              <a:t/>
             </a:r>
             <a:endParaRPr/>
           </a:p>
@@ -15276,7 +15285,7 @@
       </p:sp>
       <p:pic>
         <p:nvPicPr>
-          <p:cNvPr id="306" name="Google Shape;306;p27"/>
+          <p:cNvPr id="311" name="Google Shape;311;p27"/>
           <p:cNvPicPr preferRelativeResize="0"/>
           <p:nvPr/>
         </p:nvPicPr>
@@ -15290,8 +15299,8 @@
         </p:blipFill>
         <p:spPr>
           <a:xfrm>
-            <a:off x="8211942" y="59200"/>
-            <a:ext cx="785032" cy="1148401"/>
+            <a:off x="4732025" y="1355863"/>
+            <a:ext cx="951470" cy="535199"/>
           </a:xfrm>
           <a:prstGeom prst="rect">
             <a:avLst/>
@@ -15304,7 +15313,7 @@
       </p:pic>
       <p:pic>
         <p:nvPicPr>
-          <p:cNvPr id="307" name="Google Shape;307;p27"/>
+          <p:cNvPr id="312" name="Google Shape;312;p27"/>
           <p:cNvPicPr preferRelativeResize="0"/>
           <p:nvPr/>
         </p:nvPicPr>
@@ -15318,8 +15327,8 @@
         </p:blipFill>
         <p:spPr>
           <a:xfrm>
-            <a:off x="818825" y="510887"/>
-            <a:ext cx="626749" cy="626749"/>
+            <a:off x="8211942" y="59200"/>
+            <a:ext cx="785032" cy="1148401"/>
           </a:xfrm>
           <a:prstGeom prst="rect">
             <a:avLst/>
@@ -15332,13 +15341,13 @@
       </p:pic>
       <p:sp>
         <p:nvSpPr>
-          <p:cNvPr id="308" name="Google Shape;308;p27"/>
+          <p:cNvPr id="313" name="Google Shape;313;p27"/>
           <p:cNvSpPr txBox="1"/>
           <p:nvPr/>
         </p:nvSpPr>
         <p:spPr>
           <a:xfrm>
-            <a:off x="729325" y="1423325"/>
+            <a:off x="500725" y="4318925"/>
             <a:ext cx="8100000" cy="615000"/>
           </a:xfrm>
           <a:prstGeom prst="rect">
@@ -15379,7 +15388,7 @@
                 <a:cs typeface="Lato"/>
                 <a:sym typeface="Lato"/>
               </a:rPr>
-              <a:t>Service d’expertise à destination des porteurs de projets, afin de les assister sur tous les sujets liés au cycle de vie des données, pendant la phase de montage du projet, et en suivi des projets</a:t>
+              <a:t>Partenariat renforcé avec les directions de la recherche : redirection automatique des projets financés vers le guichet ARDoISE</a:t>
             </a:r>
             <a:endParaRPr>
               <a:solidFill>
@@ -15389,34 +15398,6 @@
           </a:p>
         </p:txBody>
       </p:sp>
-      <p:pic>
-        <p:nvPicPr>
-          <p:cNvPr id="309" name="Google Shape;309;p27"/>
-          <p:cNvPicPr preferRelativeResize="0"/>
-          <p:nvPr/>
-        </p:nvPicPr>
-        <p:blipFill>
-          <a:blip r:embed="rId5">
-            <a:alphaModFix/>
-          </a:blip>
-          <a:stretch>
-            <a:fillRect/>
-          </a:stretch>
-        </p:blipFill>
-        <p:spPr>
-          <a:xfrm>
-            <a:off x="7746175" y="2393040"/>
-            <a:ext cx="1083150" cy="431475"/>
-          </a:xfrm>
-          <a:prstGeom prst="rect">
-            <a:avLst/>
-          </a:prstGeom>
-          <a:noFill/>
-          <a:ln>
-            <a:noFill/>
-          </a:ln>
-        </p:spPr>
-      </p:pic>
     </p:spTree>
   </p:cSld>
   <p:clrMapOvr>
@@ -15430,7 +15411,7 @@
   <p:cSld>
     <p:spTree>
       <p:nvGrpSpPr>
-        <p:cNvPr id="313" name="Shape 313"/>
+        <p:cNvPr id="317" name="Shape 317"/>
         <p:cNvGrpSpPr/>
         <p:nvPr/>
       </p:nvGrpSpPr>
@@ -15444,7 +15425,7 @@
       </p:grpSpPr>
       <p:sp>
         <p:nvSpPr>
-          <p:cNvPr id="314" name="Google Shape;314;p28"/>
+          <p:cNvPr id="318" name="Google Shape;318;p28"/>
           <p:cNvSpPr txBox="1"/>
           <p:nvPr>
             <p:ph type="title"/>
@@ -15452,7 +15433,7 @@
         </p:nvSpPr>
         <p:spPr>
           <a:xfrm>
-            <a:off x="729450" y="480450"/>
+            <a:off x="1567650" y="533400"/>
             <a:ext cx="7688400" cy="535200"/>
           </a:xfrm>
           <a:prstGeom prst="rect">
@@ -15476,7 +15457,7 @@
             </a:pPr>
             <a:r>
               <a:rPr lang="fr"/>
-              <a:t>Accompagnement PGD </a:t>
+              <a:t>Sensibilisation et formation</a:t>
             </a:r>
             <a:endParaRPr/>
           </a:p>
@@ -15484,7 +15465,7 @@
       </p:sp>
       <p:sp>
         <p:nvSpPr>
-          <p:cNvPr id="315" name="Google Shape;315;p28"/>
+          <p:cNvPr id="319" name="Google Shape;319;p28"/>
           <p:cNvSpPr txBox="1"/>
           <p:nvPr>
             <p:ph idx="1" type="body"/>
@@ -15492,230 +15473,220 @@
         </p:nvSpPr>
         <p:spPr>
           <a:xfrm>
-            <a:off x="729325" y="1393075"/>
-            <a:ext cx="3774300" cy="2892600"/>
+            <a:off x="729325" y="1621675"/>
+            <a:ext cx="3774300" cy="2787900"/>
           </a:xfrm>
           <a:prstGeom prst="rect">
             <a:avLst/>
           </a:prstGeom>
+          <a:solidFill>
+            <a:schemeClr val="accent3"/>
+          </a:solidFill>
         </p:spPr>
         <p:txBody>
           <a:bodyPr anchorCtr="0" anchor="t" bIns="91425" lIns="91425" spcFirstLastPara="1" rIns="91425" wrap="square" tIns="91425">
-            <a:normAutofit fontScale="40000" lnSpcReduction="10000"/>
+            <a:normAutofit/>
           </a:bodyPr>
           <a:lstStyle/>
           <a:p>
             <a:pPr indent="0" lvl="0" marL="0" rtl="0" algn="l">
-              <a:spcBef>
-                <a:spcPts val="0"/>
-              </a:spcBef>
-              <a:spcAft>
-                <a:spcPts val="0"/>
-              </a:spcAft>
-              <a:buNone/>
-            </a:pPr>
-            <a:r>
-              <a:rPr b="1" lang="fr" sz="3250"/>
-              <a:t>L’accompagnement en quelques chiffres</a:t>
-            </a:r>
-            <a:endParaRPr b="1" sz="3250"/>
-          </a:p>
-          <a:p>
-            <a:pPr indent="-297180" lvl="0" marL="457200" rtl="0" algn="l">
+              <a:lnSpc>
+                <a:spcPct val="95000"/>
+              </a:lnSpc>
               <a:spcBef>
                 <a:spcPts val="1200"/>
               </a:spcBef>
               <a:spcAft>
                 <a:spcPts val="0"/>
               </a:spcAft>
-              <a:buSzPct val="100000"/>
+              <a:buNone/>
+            </a:pPr>
+            <a:r>
+              <a:rPr b="1" lang="fr" sz="1352">
+                <a:solidFill>
+                  <a:schemeClr val="lt1"/>
+                </a:solidFill>
+              </a:rPr>
+              <a:t>Missions</a:t>
+            </a:r>
+            <a:endParaRPr b="1" sz="1352">
+              <a:solidFill>
+                <a:schemeClr val="lt1"/>
+              </a:solidFill>
+            </a:endParaRPr>
+          </a:p>
+          <a:p>
+            <a:pPr indent="-308133" lvl="0" marL="457200" rtl="0" algn="l">
+              <a:lnSpc>
+                <a:spcPct val="95000"/>
+              </a:lnSpc>
+              <a:spcBef>
+                <a:spcPts val="1200"/>
+              </a:spcBef>
+              <a:spcAft>
+                <a:spcPts val="0"/>
+              </a:spcAft>
+              <a:buClr>
+                <a:schemeClr val="lt1"/>
+              </a:buClr>
+              <a:buSzPts val="1253"/>
               <a:buChar char="➔"/>
             </a:pPr>
             <a:r>
-              <a:rPr b="1" lang="fr" sz="2700"/>
-              <a:t>24 PGD</a:t>
-            </a:r>
-            <a:r>
-              <a:rPr lang="fr" sz="2700"/>
-              <a:t> accompagnés depuis janvier 2023</a:t>
-            </a:r>
-            <a:endParaRPr sz="2700"/>
-          </a:p>
-          <a:p>
-            <a:pPr indent="-297180" lvl="0" marL="457200" rtl="0" algn="l">
-              <a:spcBef>
-                <a:spcPts val="0"/>
-              </a:spcBef>
-              <a:spcAft>
-                <a:spcPts val="0"/>
-              </a:spcAft>
-              <a:buSzPct val="100000"/>
+              <a:rPr lang="fr" sz="1252">
+                <a:solidFill>
+                  <a:schemeClr val="lt1"/>
+                </a:solidFill>
+              </a:rPr>
+              <a:t>Organisation d’actions de sensibilisation</a:t>
+            </a:r>
+            <a:endParaRPr sz="1252">
+              <a:solidFill>
+                <a:schemeClr val="lt1"/>
+              </a:solidFill>
+            </a:endParaRPr>
+          </a:p>
+          <a:p>
+            <a:pPr indent="-308133" lvl="0" marL="457200" rtl="0" algn="l">
+              <a:lnSpc>
+                <a:spcPct val="95000"/>
+              </a:lnSpc>
+              <a:spcBef>
+                <a:spcPts val="0"/>
+              </a:spcBef>
+              <a:spcAft>
+                <a:spcPts val="0"/>
+              </a:spcAft>
+              <a:buClr>
+                <a:schemeClr val="lt1"/>
+              </a:buClr>
+              <a:buSzPts val="1253"/>
+              <a:buFont typeface="Lato"/>
               <a:buChar char="➔"/>
             </a:pPr>
             <a:r>
-              <a:rPr b="1" lang="fr" sz="2700"/>
-              <a:t>40h </a:t>
-            </a:r>
-            <a:r>
-              <a:rPr lang="fr" sz="2700"/>
-              <a:t>de rendez-vous</a:t>
-            </a:r>
-            <a:endParaRPr sz="2700"/>
-          </a:p>
-          <a:p>
-            <a:pPr indent="0" lvl="0" marL="0" rtl="0" algn="l">
-              <a:spcBef>
-                <a:spcPts val="1200"/>
-              </a:spcBef>
-              <a:spcAft>
-                <a:spcPts val="0"/>
-              </a:spcAft>
-              <a:buNone/>
-            </a:pPr>
-            <a:r>
-              <a:rPr b="1" lang="fr" sz="3200"/>
-              <a:t>Quelques exemples de projets accompagnées</a:t>
-            </a:r>
-            <a:r>
-              <a:rPr lang="fr" sz="2700"/>
-              <a:t> </a:t>
-            </a:r>
-            <a:endParaRPr sz="2700"/>
-          </a:p>
-          <a:p>
-            <a:pPr indent="-297180" lvl="0" marL="457200" rtl="0" algn="l">
-              <a:spcBef>
-                <a:spcPts val="1200"/>
-              </a:spcBef>
-              <a:spcAft>
-                <a:spcPts val="0"/>
-              </a:spcAft>
-              <a:buSzPct val="100000"/>
+              <a:rPr lang="fr" sz="1252">
+                <a:solidFill>
+                  <a:schemeClr val="lt1"/>
+                </a:solidFill>
+              </a:rPr>
+              <a:t>Coordination</a:t>
+            </a:r>
+            <a:r>
+              <a:rPr lang="fr" sz="1252">
+                <a:solidFill>
+                  <a:schemeClr val="lt1"/>
+                </a:solidFill>
+              </a:rPr>
+              <a:t> de l’offre de formation</a:t>
+            </a:r>
+            <a:endParaRPr sz="1252">
+              <a:solidFill>
+                <a:schemeClr val="lt1"/>
+              </a:solidFill>
+            </a:endParaRPr>
+          </a:p>
+          <a:p>
+            <a:pPr indent="-308133" lvl="0" marL="457200" rtl="0" algn="l">
+              <a:lnSpc>
+                <a:spcPct val="95000"/>
+              </a:lnSpc>
+              <a:spcBef>
+                <a:spcPts val="0"/>
+              </a:spcBef>
+              <a:spcAft>
+                <a:spcPts val="0"/>
+              </a:spcAft>
+              <a:buClr>
+                <a:schemeClr val="lt1"/>
+              </a:buClr>
+              <a:buSzPts val="1253"/>
+              <a:buFont typeface="Lato"/>
               <a:buChar char="➔"/>
             </a:pPr>
             <a:r>
-              <a:rPr b="1" lang="fr" sz="2700"/>
-              <a:t>projets ANR</a:t>
-            </a:r>
-            <a:r>
-              <a:rPr lang="fr" sz="2700"/>
-              <a:t> LIVING LAB, AIR, PARCEDES, PAGAIE, IRIS-E,...</a:t>
-            </a:r>
-            <a:endParaRPr sz="2700"/>
-          </a:p>
-          <a:p>
-            <a:pPr indent="-297180" lvl="0" marL="457200" rtl="0" algn="l">
-              <a:spcBef>
-                <a:spcPts val="0"/>
-              </a:spcBef>
-              <a:spcAft>
-                <a:spcPts val="0"/>
-              </a:spcAft>
-              <a:buSzPct val="100000"/>
+              <a:rPr lang="fr" sz="1252">
+                <a:solidFill>
+                  <a:schemeClr val="lt1"/>
+                </a:solidFill>
+              </a:rPr>
+              <a:t>Ateliers ardoise (en direction du réseau ardoise et de la communauté)</a:t>
+            </a:r>
+            <a:endParaRPr sz="1252">
+              <a:solidFill>
+                <a:schemeClr val="lt1"/>
+              </a:solidFill>
+            </a:endParaRPr>
+          </a:p>
+          <a:p>
+            <a:pPr indent="-308133" lvl="0" marL="457200" rtl="0" algn="l">
+              <a:lnSpc>
+                <a:spcPct val="95000"/>
+              </a:lnSpc>
+              <a:spcBef>
+                <a:spcPts val="0"/>
+              </a:spcBef>
+              <a:spcAft>
+                <a:spcPts val="0"/>
+              </a:spcAft>
+              <a:buClr>
+                <a:schemeClr val="lt1"/>
+              </a:buClr>
+              <a:buSzPts val="1253"/>
+              <a:buFont typeface="Lato"/>
               <a:buChar char="➔"/>
             </a:pPr>
             <a:r>
-              <a:rPr b="1" lang="fr" sz="2700"/>
-              <a:t>projets PIA</a:t>
-            </a:r>
-            <a:r>
-              <a:rPr lang="fr" sz="2700"/>
-              <a:t> REVEA, DIGISPORT, …</a:t>
-            </a:r>
-            <a:endParaRPr sz="2700"/>
-          </a:p>
-          <a:p>
-            <a:pPr indent="-297180" lvl="0" marL="457200" rtl="0" algn="l">
-              <a:spcBef>
-                <a:spcPts val="0"/>
-              </a:spcBef>
-              <a:spcAft>
-                <a:spcPts val="0"/>
-              </a:spcAft>
-              <a:buSzPct val="100000"/>
+              <a:rPr lang="fr" sz="1252">
+                <a:solidFill>
+                  <a:schemeClr val="lt1"/>
+                </a:solidFill>
+              </a:rPr>
+              <a:t>Sollicitation de formateurs en interne à l’atelier ou extérieurs</a:t>
+            </a:r>
+            <a:endParaRPr sz="1252">
+              <a:solidFill>
+                <a:schemeClr val="lt1"/>
+              </a:solidFill>
+            </a:endParaRPr>
+          </a:p>
+          <a:p>
+            <a:pPr indent="-308133" lvl="0" marL="457200" rtl="0" algn="l">
+              <a:lnSpc>
+                <a:spcPct val="95000"/>
+              </a:lnSpc>
+              <a:spcBef>
+                <a:spcPts val="0"/>
+              </a:spcBef>
+              <a:spcAft>
+                <a:spcPts val="0"/>
+              </a:spcAft>
+              <a:buClr>
+                <a:schemeClr val="lt1"/>
+              </a:buClr>
+              <a:buSzPts val="1253"/>
+              <a:buFont typeface="Lato"/>
               <a:buChar char="➔"/>
             </a:pPr>
             <a:r>
-              <a:rPr b="1" lang="fr" sz="2700"/>
-              <a:t>projets européens</a:t>
-            </a:r>
-            <a:r>
-              <a:rPr lang="fr" sz="2700"/>
-              <a:t> SCORE, ERC STAGE, SURCRIME</a:t>
-            </a:r>
-            <a:endParaRPr sz="2700"/>
-          </a:p>
-          <a:p>
-            <a:pPr indent="-297180" lvl="0" marL="457200" rtl="0" algn="l">
-              <a:spcBef>
-                <a:spcPts val="0"/>
-              </a:spcBef>
-              <a:spcAft>
-                <a:spcPts val="0"/>
-              </a:spcAft>
-              <a:buSzPct val="100000"/>
-              <a:buChar char="➔"/>
-            </a:pPr>
-            <a:r>
-              <a:rPr lang="fr" sz="2700"/>
-              <a:t>projets Bienvenüe : RESOUND,...</a:t>
-            </a:r>
-            <a:endParaRPr sz="2700"/>
-          </a:p>
-          <a:p>
-            <a:pPr indent="-297180" lvl="0" marL="457200" rtl="0" algn="l">
-              <a:spcBef>
-                <a:spcPts val="0"/>
-              </a:spcBef>
-              <a:spcAft>
-                <a:spcPts val="0"/>
-              </a:spcAft>
-              <a:buSzPct val="100000"/>
-              <a:buChar char="➔"/>
-            </a:pPr>
-            <a:r>
-              <a:rPr lang="fr" sz="2700"/>
-              <a:t>projets non financés : CIL,...</a:t>
-            </a:r>
-            <a:endParaRPr sz="2700"/>
-          </a:p>
-          <a:p>
-            <a:pPr indent="-297180" lvl="0" marL="457200" rtl="0" algn="l">
-              <a:spcBef>
-                <a:spcPts val="0"/>
-              </a:spcBef>
-              <a:spcAft>
-                <a:spcPts val="0"/>
-              </a:spcAft>
-              <a:buSzPct val="100000"/>
-              <a:buChar char="➔"/>
-            </a:pPr>
-            <a:r>
-              <a:rPr lang="fr" sz="2700"/>
-              <a:t>thèses</a:t>
-            </a:r>
-            <a:endParaRPr sz="2700"/>
-          </a:p>
-          <a:p>
-            <a:pPr indent="0" lvl="0" marL="0" rtl="0" algn="l">
-              <a:spcBef>
-                <a:spcPts val="1200"/>
-              </a:spcBef>
-              <a:spcAft>
-                <a:spcPts val="1200"/>
-              </a:spcAft>
-              <a:buNone/>
-            </a:pPr>
-            <a:r>
-              <a:t/>
-            </a:r>
-            <a:endParaRPr/>
+              <a:rPr lang="fr" sz="1252">
+                <a:solidFill>
+                  <a:schemeClr val="lt1"/>
+                </a:solidFill>
+              </a:rPr>
+              <a:t>Actions de formation à la gestion des données de recherche : écoles doctorales, formation permanente, formations à la demande</a:t>
+            </a:r>
+            <a:endParaRPr>
+              <a:solidFill>
+                <a:schemeClr val="lt1"/>
+              </a:solidFill>
+            </a:endParaRPr>
           </a:p>
         </p:txBody>
       </p:sp>
       <p:sp>
         <p:nvSpPr>
-          <p:cNvPr id="316" name="Google Shape;316;p28"/>
+          <p:cNvPr id="320" name="Google Shape;320;p28"/>
           <p:cNvSpPr txBox="1"/>
           <p:nvPr>
             <p:ph idx="2" type="body"/>
@@ -15723,19 +15694,16 @@
         </p:nvSpPr>
         <p:spPr>
           <a:xfrm>
-            <a:off x="4643604" y="1926475"/>
+            <a:off x="5024604" y="1621675"/>
             <a:ext cx="3774300" cy="2261100"/>
           </a:xfrm>
           <a:prstGeom prst="rect">
             <a:avLst/>
           </a:prstGeom>
-          <a:solidFill>
-            <a:schemeClr val="lt2"/>
-          </a:solidFill>
         </p:spPr>
         <p:txBody>
           <a:bodyPr anchorCtr="0" anchor="t" bIns="91425" lIns="91425" spcFirstLastPara="1" rIns="91425" wrap="square" tIns="91425">
-            <a:normAutofit fontScale="70000" lnSpcReduction="20000"/>
+            <a:normAutofit fontScale="85000" lnSpcReduction="20000"/>
           </a:bodyPr>
           <a:lstStyle/>
           <a:p>
@@ -15749,29 +15717,13 @@
               <a:buNone/>
             </a:pPr>
             <a:r>
-              <a:rPr lang="fr"/>
-              <a:t>Projet fédérateur de l’EPE et de ses partenaires, ce projet lauréat du projet national "Excellences sous toutes ses formes" du PIA, le projet "Interdisciplinary Research &amp; Innovative Solutions for Environmental transition" (IRIS-E) réunit les forces académiques et socioéconomiques du territoire afin de faire de la métropole rennaise et de la Région Bretagne le laboratoire européen pour la transition environnementale.</a:t>
-            </a:r>
-            <a:endParaRPr/>
-          </a:p>
-          <a:p>
-            <a:pPr indent="0" lvl="0" marL="0" rtl="0" algn="l">
-              <a:spcBef>
-                <a:spcPts val="1200"/>
-              </a:spcBef>
-              <a:spcAft>
-                <a:spcPts val="0"/>
-              </a:spcAft>
-              <a:buNone/>
-            </a:pPr>
-            <a:r>
-              <a:rPr lang="fr"/>
-              <a:t>&gt; Meta projet d’où seront issus des projets de recherche</a:t>
-            </a:r>
-            <a:endParaRPr/>
-          </a:p>
-          <a:p>
-            <a:pPr indent="-286385" lvl="0" marL="457200" rtl="0" algn="l">
+              <a:rPr b="1" lang="fr" sz="1535"/>
+              <a:t>Interventions dans les laboratoires</a:t>
+            </a:r>
+            <a:endParaRPr b="1" sz="1535"/>
+          </a:p>
+          <a:p>
+            <a:pPr indent="-298767" lvl="0" marL="457200" rtl="0" algn="l">
               <a:spcBef>
                 <a:spcPts val="1200"/>
               </a:spcBef>
@@ -15783,12 +15735,12 @@
             </a:pPr>
             <a:r>
               <a:rPr lang="fr"/>
-              <a:t>Elaboration d’1 méta PGD qui encadre les PGD des projets IRIS-E</a:t>
+              <a:t>VIPS</a:t>
             </a:r>
             <a:endParaRPr/>
           </a:p>
           <a:p>
-            <a:pPr indent="-286385" lvl="0" marL="457200" rtl="0" algn="l">
+            <a:pPr indent="-298767" lvl="0" marL="457200" rtl="0" algn="l">
               <a:spcBef>
                 <a:spcPts val="0"/>
               </a:spcBef>
@@ -15800,22 +15752,108 @@
             </a:pPr>
             <a:r>
               <a:rPr lang="fr"/>
-              <a:t>Redirection de tous les porteurs de projets IRIS-E vers le guichet ARDoISE</a:t>
+              <a:t>M2S</a:t>
             </a:r>
             <a:endParaRPr/>
           </a:p>
           <a:p>
+            <a:pPr indent="-298767" lvl="0" marL="457200" rtl="0" algn="l">
+              <a:spcBef>
+                <a:spcPts val="0"/>
+              </a:spcBef>
+              <a:spcAft>
+                <a:spcPts val="0"/>
+              </a:spcAft>
+              <a:buSzPct val="100000"/>
+              <a:buChar char="➔"/>
+            </a:pPr>
+            <a:r>
+              <a:rPr lang="fr"/>
+              <a:t>RPPsy</a:t>
+            </a:r>
+            <a:endParaRPr/>
+          </a:p>
+          <a:p>
+            <a:pPr indent="-298767" lvl="0" marL="457200" rtl="0" algn="l">
+              <a:spcBef>
+                <a:spcPts val="0"/>
+              </a:spcBef>
+              <a:spcAft>
+                <a:spcPts val="0"/>
+              </a:spcAft>
+              <a:buSzPct val="100000"/>
+              <a:buChar char="➔"/>
+            </a:pPr>
+            <a:r>
+              <a:rPr lang="fr"/>
+              <a:t>Tempora</a:t>
+            </a:r>
+            <a:endParaRPr/>
+          </a:p>
+          <a:p>
+            <a:pPr indent="-298767" lvl="0" marL="457200" rtl="0" algn="l">
+              <a:spcBef>
+                <a:spcPts val="0"/>
+              </a:spcBef>
+              <a:spcAft>
+                <a:spcPts val="0"/>
+              </a:spcAft>
+              <a:buSzPct val="100000"/>
+              <a:buChar char="➔"/>
+            </a:pPr>
+            <a:r>
+              <a:rPr lang="fr"/>
+              <a:t>ISCR</a:t>
+            </a:r>
+            <a:endParaRPr/>
+          </a:p>
+          <a:p>
             <a:pPr indent="0" lvl="0" marL="0" rtl="0" algn="l">
               <a:spcBef>
                 <a:spcPts val="1200"/>
               </a:spcBef>
               <a:spcAft>
+                <a:spcPts val="0"/>
+              </a:spcAft>
+              <a:buNone/>
+            </a:pPr>
+            <a:r>
+              <a:rPr b="1" lang="fr" sz="1535"/>
+              <a:t>Organisation d’événements </a:t>
+            </a:r>
+            <a:endParaRPr b="1" sz="1535"/>
+          </a:p>
+          <a:p>
+            <a:pPr indent="-298767" lvl="0" marL="457200" rtl="0" algn="l">
+              <a:spcBef>
                 <a:spcPts val="1200"/>
-              </a:spcAft>
-              <a:buNone/>
-            </a:pPr>
-            <a:r>
-              <a:t/>
+              </a:spcBef>
+              <a:spcAft>
+                <a:spcPts val="0"/>
+              </a:spcAft>
+              <a:buSzPct val="100000"/>
+              <a:buChar char="➔"/>
+            </a:pPr>
+            <a:r>
+              <a:rPr lang="fr"/>
+              <a:t>Love data week en 2022 et 2023</a:t>
+            </a:r>
+            <a:endParaRPr/>
+          </a:p>
+          <a:p>
+            <a:pPr indent="-298767" lvl="0" marL="457200" rtl="0" algn="l">
+              <a:spcBef>
+                <a:spcPts val="0"/>
+              </a:spcBef>
+              <a:spcAft>
+                <a:spcPts val="0"/>
+              </a:spcAft>
+              <a:buSzPct val="100000"/>
+              <a:buChar char="➔"/>
+            </a:pPr>
+            <a:r>
+              <a:rPr lang="fr"/>
+              <a:t>Participation au Printemps de la donnée en 2024</a:t>
             </a:r>
             <a:endParaRPr/>
           </a:p>
@@ -15823,7 +15861,7 @@
       </p:sp>
       <p:pic>
         <p:nvPicPr>
-          <p:cNvPr id="317" name="Google Shape;317;p28"/>
+          <p:cNvPr id="321" name="Google Shape;321;p28"/>
           <p:cNvPicPr preferRelativeResize="0"/>
           <p:nvPr/>
         </p:nvPicPr>
@@ -15837,8 +15875,8 @@
         </p:blipFill>
         <p:spPr>
           <a:xfrm>
-            <a:off x="4732025" y="1355863"/>
-            <a:ext cx="951470" cy="535199"/>
+            <a:off x="8211942" y="59200"/>
+            <a:ext cx="785032" cy="1148401"/>
           </a:xfrm>
           <a:prstGeom prst="rect">
             <a:avLst/>
@@ -15851,7 +15889,7 @@
       </p:pic>
       <p:pic>
         <p:nvPicPr>
-          <p:cNvPr id="318" name="Google Shape;318;p28"/>
+          <p:cNvPr id="322" name="Google Shape;322;p28"/>
           <p:cNvPicPr preferRelativeResize="0"/>
           <p:nvPr/>
         </p:nvPicPr>
@@ -15865,8 +15903,8 @@
         </p:blipFill>
         <p:spPr>
           <a:xfrm>
-            <a:off x="8211942" y="59200"/>
-            <a:ext cx="785032" cy="1148401"/>
+            <a:off x="6930000" y="3909950"/>
+            <a:ext cx="836850" cy="1185050"/>
           </a:xfrm>
           <a:prstGeom prst="rect">
             <a:avLst/>
@@ -15877,65 +15915,62 @@
           </a:ln>
         </p:spPr>
       </p:pic>
-      <p:sp>
-        <p:nvSpPr>
-          <p:cNvPr id="319" name="Google Shape;319;p28"/>
-          <p:cNvSpPr txBox="1"/>
+      <p:pic>
+        <p:nvPicPr>
+          <p:cNvPr id="323" name="Google Shape;323;p28"/>
+          <p:cNvPicPr preferRelativeResize="0"/>
           <p:nvPr/>
-        </p:nvSpPr>
-        <p:spPr>
-          <a:xfrm>
-            <a:off x="500725" y="4318925"/>
-            <a:ext cx="8100000" cy="615000"/>
+        </p:nvPicPr>
+        <p:blipFill>
+          <a:blip r:embed="rId5">
+            <a:alphaModFix/>
+          </a:blip>
+          <a:stretch>
+            <a:fillRect/>
+          </a:stretch>
+        </p:blipFill>
+        <p:spPr>
+          <a:xfrm>
+            <a:off x="5143500" y="4339975"/>
+            <a:ext cx="1300050" cy="389125"/>
           </a:xfrm>
           <a:prstGeom prst="rect">
             <a:avLst/>
           </a:prstGeom>
-          <a:solidFill>
-            <a:schemeClr val="dk1"/>
-          </a:solidFill>
+          <a:noFill/>
           <a:ln>
             <a:noFill/>
           </a:ln>
         </p:spPr>
-        <p:txBody>
-          <a:bodyPr anchorCtr="0" anchor="t" bIns="91425" lIns="91425" spcFirstLastPara="1" rIns="91425" wrap="square" tIns="91425">
-            <a:spAutoFit/>
-          </a:bodyPr>
-          <a:lstStyle/>
-          <a:p>
-            <a:pPr indent="0" lvl="0" marL="0" rtl="0" algn="l">
-              <a:lnSpc>
-                <a:spcPct val="115000"/>
-              </a:lnSpc>
-              <a:spcBef>
-                <a:spcPts val="0"/>
-              </a:spcBef>
-              <a:spcAft>
-                <a:spcPts val="1200"/>
-              </a:spcAft>
-              <a:buNone/>
-            </a:pPr>
-            <a:r>
-              <a:rPr lang="fr" sz="1300">
-                <a:solidFill>
-                  <a:schemeClr val="lt1"/>
-                </a:solidFill>
-                <a:latin typeface="Lato"/>
-                <a:ea typeface="Lato"/>
-                <a:cs typeface="Lato"/>
-                <a:sym typeface="Lato"/>
-              </a:rPr>
-              <a:t>Partenariat renforcé avec les directions de la recherche : redirection automatique des projets financés vers le guichet ARDoISE</a:t>
-            </a:r>
-            <a:endParaRPr>
-              <a:solidFill>
-                <a:schemeClr val="lt1"/>
-              </a:solidFill>
-            </a:endParaRPr>
-          </a:p>
-        </p:txBody>
-      </p:sp>
+      </p:pic>
+      <p:pic>
+        <p:nvPicPr>
+          <p:cNvPr id="324" name="Google Shape;324;p28"/>
+          <p:cNvPicPr preferRelativeResize="0"/>
+          <p:nvPr/>
+        </p:nvPicPr>
+        <p:blipFill>
+          <a:blip r:embed="rId6">
+            <a:alphaModFix/>
+          </a:blip>
+          <a:stretch>
+            <a:fillRect/>
+          </a:stretch>
+        </p:blipFill>
+        <p:spPr>
+          <a:xfrm>
+            <a:off x="818825" y="510887"/>
+            <a:ext cx="626749" cy="626749"/>
+          </a:xfrm>
+          <a:prstGeom prst="rect">
+            <a:avLst/>
+          </a:prstGeom>
+          <a:noFill/>
+          <a:ln>
+            <a:noFill/>
+          </a:ln>
+        </p:spPr>
+      </p:pic>
     </p:spTree>
   </p:cSld>
   <p:clrMapOvr>
@@ -15949,7 +15984,7 @@
   <p:cSld>
     <p:spTree>
       <p:nvGrpSpPr>
-        <p:cNvPr id="323" name="Shape 323"/>
+        <p:cNvPr id="328" name="Shape 328"/>
         <p:cNvGrpSpPr/>
         <p:nvPr/>
       </p:nvGrpSpPr>
@@ -15963,7 +15998,7 @@
       </p:grpSpPr>
       <p:sp>
         <p:nvSpPr>
-          <p:cNvPr id="324" name="Google Shape;324;p29"/>
+          <p:cNvPr id="329" name="Google Shape;329;p29"/>
           <p:cNvSpPr txBox="1"/>
           <p:nvPr>
             <p:ph type="title"/>
@@ -15971,7 +16006,7 @@
         </p:nvSpPr>
         <p:spPr>
           <a:xfrm>
-            <a:off x="1567650" y="533400"/>
+            <a:off x="1491450" y="480450"/>
             <a:ext cx="7688400" cy="535200"/>
           </a:xfrm>
           <a:prstGeom prst="rect">
@@ -15980,7 +16015,7 @@
         </p:spPr>
         <p:txBody>
           <a:bodyPr anchorCtr="0" anchor="t" bIns="91425" lIns="91425" spcFirstLastPara="1" rIns="91425" wrap="square" tIns="91425">
-            <a:normAutofit fontScale="90000"/>
+            <a:noAutofit/>
           </a:bodyPr>
           <a:lstStyle/>
           <a:p>
@@ -15991,19 +16026,20 @@
               <a:spcAft>
                 <a:spcPts val="0"/>
               </a:spcAft>
-              <a:buNone/>
-            </a:pPr>
-            <a:r>
-              <a:rPr lang="fr"/>
-              <a:t>Sensibilisation et formation</a:t>
-            </a:r>
-            <a:endParaRPr/>
+              <a:buSzPts val="990"/>
+              <a:buNone/>
+            </a:pPr>
+            <a:r>
+              <a:rPr lang="fr" sz="2040"/>
+              <a:t>Une offre complète de formation</a:t>
+            </a:r>
+            <a:endParaRPr sz="2040"/>
           </a:p>
         </p:txBody>
       </p:sp>
       <p:sp>
         <p:nvSpPr>
-          <p:cNvPr id="325" name="Google Shape;325;p29"/>
+          <p:cNvPr id="330" name="Google Shape;330;p29"/>
           <p:cNvSpPr txBox="1"/>
           <p:nvPr>
             <p:ph idx="1" type="body"/>
@@ -16011,8 +16047,8 @@
         </p:nvSpPr>
         <p:spPr>
           <a:xfrm>
-            <a:off x="729325" y="1621675"/>
-            <a:ext cx="3774300" cy="2787900"/>
+            <a:off x="143300" y="1320425"/>
+            <a:ext cx="2177400" cy="3112800"/>
           </a:xfrm>
           <a:prstGeom prst="rect">
             <a:avLst/>
@@ -16028,36 +16064,38 @@
           <a:lstStyle/>
           <a:p>
             <a:pPr indent="0" lvl="0" marL="0" rtl="0" algn="l">
-              <a:lnSpc>
-                <a:spcPct val="95000"/>
-              </a:lnSpc>
-              <a:spcBef>
-                <a:spcPts val="1200"/>
-              </a:spcBef>
-              <a:spcAft>
-                <a:spcPts val="0"/>
-              </a:spcAft>
-              <a:buNone/>
-            </a:pPr>
-            <a:r>
-              <a:rPr b="1" lang="fr" sz="1352">
+              <a:spcBef>
+                <a:spcPts val="0"/>
+              </a:spcBef>
+              <a:spcAft>
+                <a:spcPts val="0"/>
+              </a:spcAft>
+              <a:buNone/>
+            </a:pPr>
+            <a:r>
+              <a:rPr b="1" lang="fr" sz="1235">
                 <a:solidFill>
                   <a:schemeClr val="lt1"/>
                 </a:solidFill>
               </a:rPr>
-              <a:t>Missions</a:t>
-            </a:r>
-            <a:endParaRPr b="1" sz="1352">
+              <a:t>Cycle mensuel de webinaires</a:t>
+            </a:r>
+            <a:r>
+              <a:rPr b="1" lang="fr" sz="1535">
+                <a:solidFill>
+                  <a:schemeClr val="lt1"/>
+                </a:solidFill>
+              </a:rPr>
+              <a:t> </a:t>
+            </a:r>
+            <a:endParaRPr b="1" sz="1535">
               <a:solidFill>
                 <a:schemeClr val="lt1"/>
               </a:solidFill>
             </a:endParaRPr>
           </a:p>
           <a:p>
-            <a:pPr indent="-308133" lvl="0" marL="457200" rtl="0" algn="l">
-              <a:lnSpc>
-                <a:spcPct val="95000"/>
-              </a:lnSpc>
+            <a:pPr indent="-292100" lvl="0" marL="457200" rtl="0" algn="l">
               <a:spcBef>
                 <a:spcPts val="1200"/>
               </a:spcBef>
@@ -16067,28 +16105,25 @@
               <a:buClr>
                 <a:schemeClr val="lt1"/>
               </a:buClr>
-              <a:buSzPts val="1253"/>
+              <a:buSzPts val="1000"/>
               <a:buChar char="➔"/>
             </a:pPr>
             <a:r>
-              <a:rPr lang="fr" sz="1252">
+              <a:rPr lang="fr" sz="1000">
                 <a:solidFill>
                   <a:schemeClr val="lt1"/>
                 </a:solidFill>
               </a:rPr>
-              <a:t>Organisation d’actions de sensibilisation</a:t>
-            </a:r>
-            <a:endParaRPr sz="1252">
+              <a:t>“Rédiger son PGD”</a:t>
+            </a:r>
+            <a:endParaRPr sz="1000">
               <a:solidFill>
                 <a:schemeClr val="lt1"/>
               </a:solidFill>
             </a:endParaRPr>
           </a:p>
           <a:p>
-            <a:pPr indent="-308133" lvl="0" marL="457200" rtl="0" algn="l">
-              <a:lnSpc>
-                <a:spcPct val="95000"/>
-              </a:lnSpc>
+            <a:pPr indent="-292100" lvl="0" marL="457200" rtl="0" algn="l">
               <a:spcBef>
                 <a:spcPts val="0"/>
               </a:spcBef>
@@ -16098,37 +16133,25 @@
               <a:buClr>
                 <a:schemeClr val="lt1"/>
               </a:buClr>
-              <a:buSzPts val="1253"/>
-              <a:buFont typeface="Lato"/>
+              <a:buSzPts val="1000"/>
               <a:buChar char="➔"/>
             </a:pPr>
             <a:r>
-              <a:rPr lang="fr" sz="1252">
+              <a:rPr lang="fr" sz="1000">
                 <a:solidFill>
                   <a:schemeClr val="lt1"/>
                 </a:solidFill>
               </a:rPr>
-              <a:t>Coordination</a:t>
-            </a:r>
-            <a:r>
-              <a:rPr lang="fr" sz="1252">
-                <a:solidFill>
-                  <a:schemeClr val="lt1"/>
-                </a:solidFill>
-              </a:rPr>
-              <a:t> de l’offre de formation</a:t>
-            </a:r>
-            <a:endParaRPr sz="1252">
+              <a:t>“Déposer ses données dans recherche data gouv, </a:t>
+            </a:r>
+            <a:endParaRPr sz="1000">
               <a:solidFill>
                 <a:schemeClr val="lt1"/>
               </a:solidFill>
             </a:endParaRPr>
           </a:p>
           <a:p>
-            <a:pPr indent="-308133" lvl="0" marL="457200" rtl="0" algn="l">
-              <a:lnSpc>
-                <a:spcPct val="95000"/>
-              </a:lnSpc>
+            <a:pPr indent="-292100" lvl="0" marL="457200" rtl="0" algn="l">
               <a:spcBef>
                 <a:spcPts val="0"/>
               </a:spcBef>
@@ -16138,29 +16161,25 @@
               <a:buClr>
                 <a:schemeClr val="lt1"/>
               </a:buClr>
-              <a:buSzPts val="1253"/>
-              <a:buFont typeface="Lato"/>
+              <a:buSzPts val="1000"/>
               <a:buChar char="➔"/>
             </a:pPr>
             <a:r>
-              <a:rPr lang="fr" sz="1252">
+              <a:rPr lang="fr" sz="1000">
                 <a:solidFill>
                   <a:schemeClr val="lt1"/>
                 </a:solidFill>
               </a:rPr>
-              <a:t>Ateliers ardoise (en direction du réseau ardoise et de la communauté)</a:t>
-            </a:r>
-            <a:endParaRPr sz="1252">
+              <a:t>“Wikidata pour la recherche” (en partenariat avec résidence Wikimedia à l’URFIST)</a:t>
+            </a:r>
+            <a:endParaRPr sz="1000">
               <a:solidFill>
                 <a:schemeClr val="lt1"/>
               </a:solidFill>
             </a:endParaRPr>
           </a:p>
           <a:p>
-            <a:pPr indent="-308133" lvl="0" marL="457200" rtl="0" algn="l">
-              <a:lnSpc>
-                <a:spcPct val="95000"/>
-              </a:lnSpc>
+            <a:pPr indent="-292100" lvl="0" marL="457200" rtl="0" algn="l">
               <a:spcBef>
                 <a:spcPts val="0"/>
               </a:spcBef>
@@ -16170,29 +16189,25 @@
               <a:buClr>
                 <a:schemeClr val="lt1"/>
               </a:buClr>
-              <a:buSzPts val="1253"/>
-              <a:buFont typeface="Lato"/>
+              <a:buSzPts val="1000"/>
               <a:buChar char="➔"/>
             </a:pPr>
             <a:r>
-              <a:rPr lang="fr" sz="1252">
+              <a:rPr lang="fr" sz="1000">
                 <a:solidFill>
                   <a:schemeClr val="lt1"/>
                 </a:solidFill>
               </a:rPr>
-              <a:t>Sollicitation de formateurs en interne à l’atelier ou extérieurs</a:t>
-            </a:r>
-            <a:endParaRPr sz="1252">
+              <a:t>“Découvrir les cahiers de laboratoire électroniques”</a:t>
+            </a:r>
+            <a:endParaRPr sz="1000">
               <a:solidFill>
                 <a:schemeClr val="lt1"/>
               </a:solidFill>
             </a:endParaRPr>
           </a:p>
           <a:p>
-            <a:pPr indent="-308133" lvl="0" marL="457200" rtl="0" algn="l">
-              <a:lnSpc>
-                <a:spcPct val="95000"/>
-              </a:lnSpc>
+            <a:pPr indent="-292100" lvl="0" marL="457200" rtl="0" algn="l">
               <a:spcBef>
                 <a:spcPts val="0"/>
               </a:spcBef>
@@ -16202,29 +16217,56 @@
               <a:buClr>
                 <a:schemeClr val="lt1"/>
               </a:buClr>
-              <a:buSzPts val="1253"/>
-              <a:buFont typeface="Lato"/>
+              <a:buSzPts val="1000"/>
               <a:buChar char="➔"/>
             </a:pPr>
             <a:r>
-              <a:rPr lang="fr" sz="1252">
+              <a:rPr lang="fr" sz="1000">
                 <a:solidFill>
                   <a:schemeClr val="lt1"/>
                 </a:solidFill>
               </a:rPr>
-              <a:t>Actions de formation à la gestion des données de recherche : écoles doctorales, formation permanente, formations à la demande</a:t>
-            </a:r>
-            <a:endParaRPr>
+              <a:t>“Rédiger un data paper”</a:t>
+            </a:r>
+            <a:endParaRPr sz="1000">
               <a:solidFill>
                 <a:schemeClr val="lt1"/>
               </a:solidFill>
             </a:endParaRPr>
           </a:p>
+          <a:p>
+            <a:pPr indent="-292100" lvl="0" marL="457200" rtl="0" algn="l">
+              <a:spcBef>
+                <a:spcPts val="0"/>
+              </a:spcBef>
+              <a:spcAft>
+                <a:spcPts val="0"/>
+              </a:spcAft>
+              <a:buClr>
+                <a:schemeClr val="lt1"/>
+              </a:buClr>
+              <a:buSzPts val="1000"/>
+              <a:buChar char="➔"/>
+            </a:pPr>
+            <a:r>
+              <a:rPr lang="fr" sz="1000">
+                <a:solidFill>
+                  <a:schemeClr val="lt1"/>
+                </a:solidFill>
+              </a:rPr>
+              <a:t>“Parcours juridique”</a:t>
+            </a:r>
+            <a:endParaRPr sz="1000">
+              <a:solidFill>
+                <a:schemeClr val="lt1"/>
+              </a:solidFill>
+            </a:endParaRPr>
+          </a:p>
         </p:txBody>
       </p:sp>
       <p:sp>
         <p:nvSpPr>
-          <p:cNvPr id="326" name="Google Shape;326;p29"/>
+          <p:cNvPr id="331" name="Google Shape;331;p29"/>
           <p:cNvSpPr txBox="1"/>
           <p:nvPr>
             <p:ph idx="2" type="body"/>
@@ -16232,12 +16274,182 @@
         </p:nvSpPr>
         <p:spPr>
           <a:xfrm>
-            <a:off x="5024604" y="1621675"/>
-            <a:ext cx="3774300" cy="2261100"/>
+            <a:off x="2297029" y="1320375"/>
+            <a:ext cx="2589600" cy="3408900"/>
           </a:xfrm>
           <a:prstGeom prst="rect">
             <a:avLst/>
           </a:prstGeom>
+        </p:spPr>
+        <p:txBody>
+          <a:bodyPr anchorCtr="0" anchor="t" bIns="91425" lIns="91425" spcFirstLastPara="1" rIns="91425" wrap="square" tIns="91425">
+            <a:normAutofit fontScale="77500" lnSpcReduction="10000"/>
+          </a:bodyPr>
+          <a:lstStyle/>
+          <a:p>
+            <a:pPr indent="0" lvl="0" marL="0" rtl="0" algn="l">
+              <a:spcBef>
+                <a:spcPts val="0"/>
+              </a:spcBef>
+              <a:spcAft>
+                <a:spcPts val="0"/>
+              </a:spcAft>
+              <a:buNone/>
+            </a:pPr>
+            <a:r>
+              <a:rPr b="1" lang="fr" sz="1558">
+                <a:solidFill>
+                  <a:schemeClr val="dk2"/>
+                </a:solidFill>
+              </a:rPr>
+              <a:t>Formations doctorales</a:t>
+            </a:r>
+            <a:endParaRPr b="1" sz="1558">
+              <a:solidFill>
+                <a:schemeClr val="dk2"/>
+              </a:solidFill>
+            </a:endParaRPr>
+          </a:p>
+          <a:p>
+            <a:pPr indent="-292576" lvl="0" marL="457200" rtl="0" algn="l">
+              <a:spcBef>
+                <a:spcPts val="1200"/>
+              </a:spcBef>
+              <a:spcAft>
+                <a:spcPts val="0"/>
+              </a:spcAft>
+              <a:buSzPct val="100000"/>
+              <a:buChar char="➔"/>
+            </a:pPr>
+            <a:r>
+              <a:rPr lang="fr"/>
+              <a:t>“Introduction à la gestion des données pour une recherche fiable : formats de fichiers, nommage et description “</a:t>
+            </a:r>
+            <a:endParaRPr/>
+          </a:p>
+          <a:p>
+            <a:pPr indent="-292576" lvl="0" marL="457200" rtl="0" algn="l">
+              <a:spcBef>
+                <a:spcPts val="0"/>
+              </a:spcBef>
+              <a:spcAft>
+                <a:spcPts val="0"/>
+              </a:spcAft>
+              <a:buSzPct val="100000"/>
+              <a:buChar char="➔"/>
+            </a:pPr>
+            <a:r>
+              <a:rPr lang="fr"/>
+              <a:t>“La protection des données à caractère personnel dans le cadre d’une recherche scientifique”</a:t>
+            </a:r>
+            <a:endParaRPr/>
+          </a:p>
+          <a:p>
+            <a:pPr indent="-292576" lvl="0" marL="457200" rtl="0" algn="l">
+              <a:spcBef>
+                <a:spcPts val="0"/>
+              </a:spcBef>
+              <a:spcAft>
+                <a:spcPts val="0"/>
+              </a:spcAft>
+              <a:buSzPct val="100000"/>
+              <a:buChar char="➔"/>
+            </a:pPr>
+            <a:r>
+              <a:rPr lang="fr"/>
+              <a:t>“L'accès aux données de la recherche, garant d'intégrité scientifique : où et comment diffuser les données ?”</a:t>
+            </a:r>
+            <a:endParaRPr/>
+          </a:p>
+          <a:p>
+            <a:pPr indent="-292576" lvl="0" marL="457200" rtl="0" algn="l">
+              <a:spcBef>
+                <a:spcPts val="0"/>
+              </a:spcBef>
+              <a:spcAft>
+                <a:spcPts val="0"/>
+              </a:spcAft>
+              <a:buSzPct val="100000"/>
+              <a:buChar char="➔"/>
+            </a:pPr>
+            <a:r>
+              <a:rPr lang="fr"/>
+              <a:t>“Trouver et réutiliser ses données en SHS dans le respect du droit”</a:t>
+            </a:r>
+            <a:endParaRPr/>
+          </a:p>
+          <a:p>
+            <a:pPr indent="-292576" lvl="0" marL="457200" rtl="0" algn="l">
+              <a:spcBef>
+                <a:spcPts val="0"/>
+              </a:spcBef>
+              <a:spcAft>
+                <a:spcPts val="0"/>
+              </a:spcAft>
+              <a:buSzPct val="100000"/>
+              <a:buChar char="➔"/>
+            </a:pPr>
+            <a:r>
+              <a:rPr lang="fr"/>
+              <a:t>“Anonymisation des données”</a:t>
+            </a:r>
+            <a:endParaRPr/>
+          </a:p>
+          <a:p>
+            <a:pPr indent="-292576" lvl="0" marL="457200" rtl="0" algn="l">
+              <a:spcBef>
+                <a:spcPts val="0"/>
+              </a:spcBef>
+              <a:spcAft>
+                <a:spcPts val="0"/>
+              </a:spcAft>
+              <a:buSzPct val="100000"/>
+              <a:buChar char="➔"/>
+            </a:pPr>
+            <a:r>
+              <a:rPr lang="fr"/>
+              <a:t>“Quarto et R “</a:t>
+            </a:r>
+            <a:endParaRPr/>
+          </a:p>
+          <a:p>
+            <a:pPr indent="-292576" lvl="0" marL="457200" rtl="0" algn="l">
+              <a:spcBef>
+                <a:spcPts val="0"/>
+              </a:spcBef>
+              <a:spcAft>
+                <a:spcPts val="0"/>
+              </a:spcAft>
+              <a:buSzPct val="100000"/>
+              <a:buChar char="➔"/>
+            </a:pPr>
+            <a:r>
+              <a:rPr lang="fr"/>
+              <a:t>“Jupyter notebooks et langage python”</a:t>
+            </a:r>
+            <a:endParaRPr/>
+          </a:p>
+        </p:txBody>
+      </p:sp>
+      <p:sp>
+        <p:nvSpPr>
+          <p:cNvPr id="332" name="Google Shape;332;p29"/>
+          <p:cNvSpPr txBox="1"/>
+          <p:nvPr>
+            <p:ph idx="2" type="body"/>
+          </p:nvPr>
+        </p:nvSpPr>
+        <p:spPr>
+          <a:xfrm>
+            <a:off x="4987550" y="1320425"/>
+            <a:ext cx="2066100" cy="3112800"/>
+          </a:xfrm>
+          <a:prstGeom prst="rect">
+            <a:avLst/>
+          </a:prstGeom>
+          <a:solidFill>
+            <a:schemeClr val="lt2"/>
+          </a:solidFill>
         </p:spPr>
         <p:txBody>
           <a:bodyPr anchorCtr="0" anchor="t" bIns="91425" lIns="91425" spcFirstLastPara="1" rIns="91425" wrap="square" tIns="91425">
@@ -16255,13 +16467,13 @@
               <a:buNone/>
             </a:pPr>
             <a:r>
-              <a:rPr b="1" lang="fr" sz="1535"/>
-              <a:t>Interventions dans les laboratoires</a:t>
-            </a:r>
-            <a:endParaRPr b="1" sz="1535"/>
-          </a:p>
-          <a:p>
-            <a:pPr indent="-298767" lvl="0" marL="457200" rtl="0" algn="l">
+              <a:rPr b="1" lang="fr"/>
+              <a:t>Formations URFIST Rennes</a:t>
+            </a:r>
+            <a:endParaRPr b="1"/>
+          </a:p>
+          <a:p>
+            <a:pPr indent="-290671" lvl="0" marL="457200" rtl="0" algn="l">
               <a:spcBef>
                 <a:spcPts val="1200"/>
               </a:spcBef>
@@ -16272,13 +16484,17 @@
               <a:buChar char="➔"/>
             </a:pPr>
             <a:r>
-              <a:rPr lang="fr"/>
-              <a:t>VIPS</a:t>
-            </a:r>
-            <a:endParaRPr/>
-          </a:p>
-          <a:p>
-            <a:pPr indent="-298767" lvl="0" marL="457200" rtl="0" algn="l">
+              <a:rPr lang="fr" sz="1150"/>
+              <a:t>F</a:t>
+            </a:r>
+            <a:r>
+              <a:rPr lang="fr" sz="1150"/>
+              <a:t>ormations ARDoISE : “Ecrire en Markdown”</a:t>
+            </a:r>
+            <a:endParaRPr sz="1150"/>
+          </a:p>
+          <a:p>
+            <a:pPr indent="-290671" lvl="0" marL="457200" rtl="0" algn="l">
               <a:spcBef>
                 <a:spcPts val="0"/>
               </a:spcBef>
@@ -16289,13 +16505,38 @@
               <a:buChar char="➔"/>
             </a:pPr>
             <a:r>
-              <a:rPr lang="fr"/>
-              <a:t>M2S</a:t>
-            </a:r>
-            <a:endParaRPr/>
-          </a:p>
-          <a:p>
-            <a:pPr indent="-298767" lvl="0" marL="457200" rtl="0" algn="l">
+              <a:rPr lang="fr" sz="1150"/>
+              <a:t>Programme URFIST sur les données de la recherche : “Rédiger un datapaper”, “</a:t>
+            </a:r>
+            <a:r>
+              <a:rPr lang="fr" sz="1150">
+                <a:uFill>
+                  <a:noFill/>
+                </a:uFill>
+                <a:hlinkClick r:id="rId3"/>
+              </a:rPr>
+              <a:t>Analyse de données qualitatives avec le logiciel NVivo</a:t>
+            </a:r>
+            <a:r>
+              <a:rPr lang="fr" sz="1150"/>
+              <a:t>”, “Gérer et diffuser ses données de recherche : introduction aux enjeux, méthodes, pratiques”, Pourquoi et comment rédiger un PGD / DMP</a:t>
+            </a:r>
+            <a:r>
+              <a:rPr lang="fr" sz="1150" u="sng">
+                <a:solidFill>
+                  <a:schemeClr val="hlink"/>
+                </a:solidFill>
+                <a:latin typeface="Arial"/>
+                <a:ea typeface="Arial"/>
+                <a:cs typeface="Arial"/>
+                <a:sym typeface="Arial"/>
+              </a:rPr>
+              <a:t>  </a:t>
+            </a:r>
+            <a:endParaRPr sz="1150"/>
+          </a:p>
+          <a:p>
+            <a:pPr indent="-290671" lvl="0" marL="457200" rtl="0" algn="l">
               <a:spcBef>
                 <a:spcPts val="0"/>
               </a:spcBef>
@@ -16306,128 +16547,123 @@
               <a:buChar char="➔"/>
             </a:pPr>
             <a:r>
-              <a:rPr lang="fr"/>
-              <a:t>RPPsy</a:t>
+              <a:rPr lang="fr" sz="1150"/>
+              <a:t>Participation à l’élaboration du programme concernant les données</a:t>
             </a:r>
             <a:endParaRPr/>
           </a:p>
-          <a:p>
-            <a:pPr indent="-298767" lvl="0" marL="457200" rtl="0" algn="l">
-              <a:spcBef>
-                <a:spcPts val="0"/>
-              </a:spcBef>
-              <a:spcAft>
-                <a:spcPts val="0"/>
-              </a:spcAft>
-              <a:buSzPct val="100000"/>
+        </p:txBody>
+      </p:sp>
+      <p:sp>
+        <p:nvSpPr>
+          <p:cNvPr id="333" name="Google Shape;333;p29"/>
+          <p:cNvSpPr txBox="1"/>
+          <p:nvPr>
+            <p:ph idx="2" type="body"/>
+          </p:nvPr>
+        </p:nvSpPr>
+        <p:spPr>
+          <a:xfrm>
+            <a:off x="7053925" y="1320450"/>
+            <a:ext cx="1943100" cy="1869900"/>
+          </a:xfrm>
+          <a:prstGeom prst="rect">
+            <a:avLst/>
+          </a:prstGeom>
+        </p:spPr>
+        <p:txBody>
+          <a:bodyPr anchorCtr="0" anchor="t" bIns="91425" lIns="91425" spcFirstLastPara="1" rIns="91425" wrap="square" tIns="91425">
+            <a:normAutofit/>
+          </a:bodyPr>
+          <a:lstStyle/>
+          <a:p>
+            <a:pPr indent="0" lvl="0" marL="0" rtl="0" algn="l">
+              <a:spcBef>
+                <a:spcPts val="0"/>
+              </a:spcBef>
+              <a:spcAft>
+                <a:spcPts val="0"/>
+              </a:spcAft>
+              <a:buNone/>
+            </a:pPr>
+            <a:r>
+              <a:rPr b="1" lang="fr" sz="1200"/>
+              <a:t>Formations à la demande</a:t>
+            </a:r>
+            <a:endParaRPr b="1" sz="1200"/>
+          </a:p>
+          <a:p>
+            <a:pPr indent="-292100" lvl="0" marL="457200" rtl="0" algn="l">
+              <a:spcBef>
+                <a:spcPts val="1200"/>
+              </a:spcBef>
+              <a:spcAft>
+                <a:spcPts val="0"/>
+              </a:spcAft>
+              <a:buSzPts val="1000"/>
               <a:buChar char="➔"/>
             </a:pPr>
             <a:r>
-              <a:rPr lang="fr"/>
-              <a:t>Tempora</a:t>
-            </a:r>
-            <a:endParaRPr/>
-          </a:p>
-          <a:p>
-            <a:pPr indent="-298767" lvl="0" marL="457200" rtl="0" algn="l">
-              <a:spcBef>
-                <a:spcPts val="0"/>
-              </a:spcBef>
-              <a:spcAft>
-                <a:spcPts val="0"/>
-              </a:spcAft>
-              <a:buSzPct val="100000"/>
+              <a:rPr lang="fr" sz="1000"/>
+              <a:t>ISCR</a:t>
+            </a:r>
+            <a:endParaRPr sz="1000"/>
+          </a:p>
+          <a:p>
+            <a:pPr indent="-292100" lvl="0" marL="457200" rtl="0" algn="l">
+              <a:spcBef>
+                <a:spcPts val="0"/>
+              </a:spcBef>
+              <a:spcAft>
+                <a:spcPts val="0"/>
+              </a:spcAft>
+              <a:buSzPts val="1000"/>
               <a:buChar char="➔"/>
             </a:pPr>
             <a:r>
-              <a:rPr lang="fr"/>
+              <a:rPr lang="fr" sz="1000"/>
+              <a:t>RPPsy,  VIPS2, </a:t>
+            </a:r>
+            <a:r>
+              <a:rPr lang="fr" sz="1000"/>
               <a:t>ISCR</a:t>
             </a:r>
-            <a:endParaRPr/>
-          </a:p>
-          <a:p>
-            <a:pPr indent="0" lvl="0" marL="0" rtl="0" algn="l">
-              <a:spcBef>
-                <a:spcPts val="1200"/>
-              </a:spcBef>
-              <a:spcAft>
-                <a:spcPts val="0"/>
-              </a:spcAft>
-              <a:buNone/>
-            </a:pPr>
-            <a:r>
-              <a:rPr b="1" lang="fr" sz="1535"/>
-              <a:t>Organisation d’événements </a:t>
-            </a:r>
-            <a:endParaRPr b="1" sz="1535"/>
-          </a:p>
-          <a:p>
-            <a:pPr indent="-298767" lvl="0" marL="457200" rtl="0" algn="l">
-              <a:spcBef>
-                <a:spcPts val="1200"/>
-              </a:spcBef>
-              <a:spcAft>
-                <a:spcPts val="0"/>
-              </a:spcAft>
-              <a:buSzPct val="100000"/>
+            <a:r>
+              <a:rPr lang="fr" sz="1000"/>
+              <a:t> :</a:t>
+            </a:r>
+            <a:r>
+              <a:rPr lang="fr" sz="1000"/>
+              <a:t> “</a:t>
+            </a:r>
+            <a:r>
+              <a:rPr lang="fr" sz="1000"/>
+              <a:t>Gestion des données de la recherche : des enjeux à la pratique”</a:t>
+            </a:r>
+            <a:endParaRPr sz="1000"/>
+          </a:p>
+          <a:p>
+            <a:pPr indent="-292100" lvl="0" marL="457200" rtl="0" algn="l">
+              <a:spcBef>
+                <a:spcPts val="0"/>
+              </a:spcBef>
+              <a:spcAft>
+                <a:spcPts val="0"/>
+              </a:spcAft>
+              <a:buSzPts val="1000"/>
               <a:buChar char="➔"/>
             </a:pPr>
             <a:r>
-              <a:rPr lang="fr"/>
-              <a:t>Love data week en 2022 et 2023</a:t>
-            </a:r>
-            <a:endParaRPr/>
-          </a:p>
-          <a:p>
-            <a:pPr indent="-298767" lvl="0" marL="457200" rtl="0" algn="l">
-              <a:spcBef>
-                <a:spcPts val="0"/>
-              </a:spcBef>
-              <a:spcAft>
-                <a:spcPts val="0"/>
-              </a:spcAft>
-              <a:buSzPct val="100000"/>
-              <a:buChar char="➔"/>
-            </a:pPr>
-            <a:r>
-              <a:rPr lang="fr"/>
-              <a:t>Participation au Printemps de la donnée en 2024</a:t>
-            </a:r>
-            <a:endParaRPr/>
+              <a:rPr lang="fr" sz="1000"/>
+              <a:t>Café des doctorants M2S</a:t>
+            </a:r>
+            <a:endParaRPr sz="1000"/>
           </a:p>
         </p:txBody>
       </p:sp>
       <p:pic>
         <p:nvPicPr>
-          <p:cNvPr id="327" name="Google Shape;327;p29"/>
-          <p:cNvPicPr preferRelativeResize="0"/>
-          <p:nvPr/>
-        </p:nvPicPr>
-        <p:blipFill>
-          <a:blip r:embed="rId3">
-            <a:alphaModFix/>
-          </a:blip>
-          <a:stretch>
-            <a:fillRect/>
-          </a:stretch>
-        </p:blipFill>
-        <p:spPr>
-          <a:xfrm>
-            <a:off x="8211942" y="59200"/>
-            <a:ext cx="785032" cy="1148401"/>
-          </a:xfrm>
-          <a:prstGeom prst="rect">
-            <a:avLst/>
-          </a:prstGeom>
-          <a:noFill/>
-          <a:ln>
-            <a:noFill/>
-          </a:ln>
-        </p:spPr>
-      </p:pic>
-      <p:pic>
-        <p:nvPicPr>
-          <p:cNvPr id="328" name="Google Shape;328;p29"/>
+          <p:cNvPr id="334" name="Google Shape;334;p29"/>
           <p:cNvPicPr preferRelativeResize="0"/>
           <p:nvPr/>
         </p:nvPicPr>
@@ -16441,8 +16677,8 @@
         </p:blipFill>
         <p:spPr>
           <a:xfrm>
-            <a:off x="6930000" y="3909950"/>
-            <a:ext cx="836850" cy="1185050"/>
+            <a:off x="8211942" y="59200"/>
+            <a:ext cx="785032" cy="1148401"/>
           </a:xfrm>
           <a:prstGeom prst="rect">
             <a:avLst/>
@@ -16453,24 +16689,16 @@
           </a:ln>
         </p:spPr>
       </p:pic>
-      <p:pic>
-        <p:nvPicPr>
-          <p:cNvPr id="329" name="Google Shape;329;p29"/>
-          <p:cNvPicPr preferRelativeResize="0"/>
+      <p:sp>
+        <p:nvSpPr>
+          <p:cNvPr id="335" name="Google Shape;335;p29"/>
+          <p:cNvSpPr txBox="1"/>
           <p:nvPr/>
-        </p:nvPicPr>
-        <p:blipFill>
-          <a:blip r:embed="rId5">
-            <a:alphaModFix/>
-          </a:blip>
-          <a:stretch>
-            <a:fillRect/>
-          </a:stretch>
-        </p:blipFill>
-        <p:spPr>
-          <a:xfrm>
-            <a:off x="5143500" y="4339975"/>
-            <a:ext cx="1300050" cy="389125"/>
+        </p:nvSpPr>
+        <p:spPr>
+          <a:xfrm>
+            <a:off x="7053925" y="3018975"/>
+            <a:ext cx="1831500" cy="1405500"/>
           </a:xfrm>
           <a:prstGeom prst="rect">
             <a:avLst/>
@@ -16480,15 +16708,333 @@
             <a:noFill/>
           </a:ln>
         </p:spPr>
-      </p:pic>
+        <p:txBody>
+          <a:bodyPr anchorCtr="0" anchor="t" bIns="91425" lIns="91425" spcFirstLastPara="1" rIns="91425" wrap="square" tIns="91425">
+            <a:noAutofit/>
+          </a:bodyPr>
+          <a:lstStyle/>
+          <a:p>
+            <a:pPr indent="0" lvl="0" marL="0" rtl="0" algn="l">
+              <a:spcBef>
+                <a:spcPts val="0"/>
+              </a:spcBef>
+              <a:spcAft>
+                <a:spcPts val="0"/>
+              </a:spcAft>
+              <a:buNone/>
+            </a:pPr>
+            <a:r>
+              <a:rPr b="1" lang="fr" sz="1200">
+                <a:solidFill>
+                  <a:schemeClr val="accent1"/>
+                </a:solidFill>
+                <a:latin typeface="Lato"/>
+                <a:ea typeface="Lato"/>
+                <a:cs typeface="Lato"/>
+                <a:sym typeface="Lato"/>
+              </a:rPr>
+              <a:t>Formations proposées par partenaires</a:t>
+            </a:r>
+            <a:r>
+              <a:rPr lang="fr" sz="1300">
+                <a:solidFill>
+                  <a:schemeClr val="accent1"/>
+                </a:solidFill>
+                <a:latin typeface="Lato"/>
+                <a:ea typeface="Lato"/>
+                <a:cs typeface="Lato"/>
+                <a:sym typeface="Lato"/>
+              </a:rPr>
+              <a:t> </a:t>
+            </a:r>
+            <a:endParaRPr sz="1300">
+              <a:solidFill>
+                <a:schemeClr val="accent1"/>
+              </a:solidFill>
+              <a:latin typeface="Lato"/>
+              <a:ea typeface="Lato"/>
+              <a:cs typeface="Lato"/>
+              <a:sym typeface="Lato"/>
+            </a:endParaRPr>
+          </a:p>
+          <a:p>
+            <a:pPr indent="-292100" lvl="0" marL="457200" rtl="0" algn="l">
+              <a:spcBef>
+                <a:spcPts val="0"/>
+              </a:spcBef>
+              <a:spcAft>
+                <a:spcPts val="0"/>
+              </a:spcAft>
+              <a:buClr>
+                <a:schemeClr val="accent1"/>
+              </a:buClr>
+              <a:buSzPts val="1000"/>
+              <a:buFont typeface="Lato"/>
+              <a:buChar char="➔"/>
+            </a:pPr>
+            <a:r>
+              <a:rPr lang="fr" sz="1000">
+                <a:solidFill>
+                  <a:schemeClr val="accent1"/>
+                </a:solidFill>
+                <a:latin typeface="Lato"/>
+                <a:ea typeface="Lato"/>
+                <a:cs typeface="Lato"/>
+                <a:sym typeface="Lato"/>
+              </a:rPr>
+              <a:t>Formations Datalab MSHB Rennes</a:t>
+            </a:r>
+            <a:endParaRPr sz="1000">
+              <a:solidFill>
+                <a:schemeClr val="accent1"/>
+              </a:solidFill>
+              <a:latin typeface="Lato"/>
+              <a:ea typeface="Lato"/>
+              <a:cs typeface="Lato"/>
+              <a:sym typeface="Lato"/>
+            </a:endParaRPr>
+          </a:p>
+          <a:p>
+            <a:pPr indent="-292100" lvl="0" marL="457200" rtl="0" algn="l">
+              <a:spcBef>
+                <a:spcPts val="0"/>
+              </a:spcBef>
+              <a:spcAft>
+                <a:spcPts val="0"/>
+              </a:spcAft>
+              <a:buClr>
+                <a:schemeClr val="accent1"/>
+              </a:buClr>
+              <a:buSzPts val="1000"/>
+              <a:buFont typeface="Lato"/>
+              <a:buChar char="➔"/>
+            </a:pPr>
+            <a:r>
+              <a:rPr lang="fr" sz="1000">
+                <a:solidFill>
+                  <a:schemeClr val="accent1"/>
+                </a:solidFill>
+                <a:latin typeface="Lato"/>
+                <a:ea typeface="Lato"/>
+                <a:cs typeface="Lato"/>
+                <a:sym typeface="Lato"/>
+              </a:rPr>
+              <a:t>Semaine Data SHS (PUD)</a:t>
+            </a:r>
+            <a:endParaRPr sz="1000">
+              <a:solidFill>
+                <a:schemeClr val="accent1"/>
+              </a:solidFill>
+              <a:latin typeface="Lato"/>
+              <a:ea typeface="Lato"/>
+              <a:cs typeface="Lato"/>
+              <a:sym typeface="Lato"/>
+            </a:endParaRPr>
+          </a:p>
+          <a:p>
+            <a:pPr indent="-292100" lvl="0" marL="457200" rtl="0" algn="l">
+              <a:spcBef>
+                <a:spcPts val="0"/>
+              </a:spcBef>
+              <a:spcAft>
+                <a:spcPts val="0"/>
+              </a:spcAft>
+              <a:buClr>
+                <a:schemeClr val="accent1"/>
+              </a:buClr>
+              <a:buSzPts val="1000"/>
+              <a:buFont typeface="Lato"/>
+              <a:buChar char="➔"/>
+            </a:pPr>
+            <a:r>
+              <a:rPr lang="fr" sz="1000">
+                <a:solidFill>
+                  <a:schemeClr val="accent1"/>
+                </a:solidFill>
+                <a:latin typeface="Lato"/>
+                <a:ea typeface="Lato"/>
+                <a:cs typeface="Lato"/>
+                <a:sym typeface="Lato"/>
+              </a:rPr>
+              <a:t>Formations OSUR</a:t>
+            </a:r>
+            <a:endParaRPr sz="1000">
+              <a:solidFill>
+                <a:schemeClr val="accent1"/>
+              </a:solidFill>
+              <a:latin typeface="Lato"/>
+              <a:ea typeface="Lato"/>
+              <a:cs typeface="Lato"/>
+              <a:sym typeface="Lato"/>
+            </a:endParaRPr>
+          </a:p>
+          <a:p>
+            <a:pPr indent="-292100" lvl="0" marL="457200" rtl="0" algn="l">
+              <a:spcBef>
+                <a:spcPts val="0"/>
+              </a:spcBef>
+              <a:spcAft>
+                <a:spcPts val="0"/>
+              </a:spcAft>
+              <a:buClr>
+                <a:schemeClr val="accent1"/>
+              </a:buClr>
+              <a:buSzPts val="1000"/>
+              <a:buFont typeface="Lato"/>
+              <a:buChar char="➔"/>
+            </a:pPr>
+            <a:r>
+              <a:rPr lang="fr" sz="1000">
+                <a:solidFill>
+                  <a:schemeClr val="accent1"/>
+                </a:solidFill>
+                <a:latin typeface="Lato"/>
+                <a:ea typeface="Lato"/>
+                <a:cs typeface="Lato"/>
+                <a:sym typeface="Lato"/>
+              </a:rPr>
+              <a:t>…</a:t>
+            </a:r>
+            <a:endParaRPr sz="1000">
+              <a:solidFill>
+                <a:schemeClr val="accent1"/>
+              </a:solidFill>
+              <a:latin typeface="Lato"/>
+              <a:ea typeface="Lato"/>
+              <a:cs typeface="Lato"/>
+              <a:sym typeface="Lato"/>
+            </a:endParaRPr>
+          </a:p>
+        </p:txBody>
+      </p:sp>
+      <p:sp>
+        <p:nvSpPr>
+          <p:cNvPr id="336" name="Google Shape;336;p29"/>
+          <p:cNvSpPr txBox="1"/>
+          <p:nvPr>
+            <p:ph idx="1" type="body"/>
+          </p:nvPr>
+        </p:nvSpPr>
+        <p:spPr>
+          <a:xfrm>
+            <a:off x="143300" y="4539625"/>
+            <a:ext cx="8853600" cy="535200"/>
+          </a:xfrm>
+          <a:prstGeom prst="rect">
+            <a:avLst/>
+          </a:prstGeom>
+          <a:solidFill>
+            <a:schemeClr val="dk1"/>
+          </a:solidFill>
+        </p:spPr>
+        <p:txBody>
+          <a:bodyPr anchorCtr="0" anchor="t" bIns="91425" lIns="91425" spcFirstLastPara="1" rIns="91425" wrap="square" tIns="91425">
+            <a:noAutofit/>
+          </a:bodyPr>
+          <a:lstStyle/>
+          <a:p>
+            <a:pPr indent="0" lvl="0" marL="0" rtl="0" algn="ctr">
+              <a:spcBef>
+                <a:spcPts val="0"/>
+              </a:spcBef>
+              <a:spcAft>
+                <a:spcPts val="0"/>
+              </a:spcAft>
+              <a:buNone/>
+            </a:pPr>
+            <a:r>
+              <a:rPr lang="fr" sz="1400">
+                <a:solidFill>
+                  <a:schemeClr val="lt1"/>
+                </a:solidFill>
+              </a:rPr>
+              <a:t>Une offre de formation construite en complémentarité (thématiques, publics, formats)</a:t>
+            </a:r>
+            <a:endParaRPr sz="1500">
+              <a:solidFill>
+                <a:schemeClr val="lt1"/>
+              </a:solidFill>
+              <a:latin typeface="Arial"/>
+              <a:ea typeface="Arial"/>
+              <a:cs typeface="Arial"/>
+              <a:sym typeface="Arial"/>
+            </a:endParaRPr>
+          </a:p>
+          <a:p>
+            <a:pPr indent="0" lvl="0" marL="0" rtl="0" algn="ctr">
+              <a:spcBef>
+                <a:spcPts val="1200"/>
+              </a:spcBef>
+              <a:spcAft>
+                <a:spcPts val="0"/>
+              </a:spcAft>
+              <a:buNone/>
+            </a:pPr>
+            <a:r>
+              <a:t/>
+            </a:r>
+            <a:endParaRPr>
+              <a:solidFill>
+                <a:schemeClr val="lt1"/>
+              </a:solidFill>
+            </a:endParaRPr>
+          </a:p>
+          <a:p>
+            <a:pPr indent="0" lvl="0" marL="0" rtl="0" algn="ctr">
+              <a:lnSpc>
+                <a:spcPct val="75000"/>
+              </a:lnSpc>
+              <a:spcBef>
+                <a:spcPts val="1200"/>
+              </a:spcBef>
+              <a:spcAft>
+                <a:spcPts val="0"/>
+              </a:spcAft>
+              <a:buSzPts val="275"/>
+              <a:buNone/>
+            </a:pPr>
+            <a:r>
+              <a:t/>
+            </a:r>
+            <a:endParaRPr sz="1400">
+              <a:solidFill>
+                <a:schemeClr val="lt1"/>
+              </a:solidFill>
+            </a:endParaRPr>
+          </a:p>
+          <a:p>
+            <a:pPr indent="0" lvl="0" marL="0" rtl="0" algn="l">
+              <a:lnSpc>
+                <a:spcPct val="95000"/>
+              </a:lnSpc>
+              <a:spcBef>
+                <a:spcPts val="0"/>
+              </a:spcBef>
+              <a:spcAft>
+                <a:spcPts val="1200"/>
+              </a:spcAft>
+              <a:buSzPts val="275"/>
+              <a:buNone/>
+            </a:pPr>
+            <a:r>
+              <a:t/>
+            </a:r>
+            <a:endParaRPr sz="1400">
+              <a:solidFill>
+                <a:schemeClr val="lt1"/>
+              </a:solidFill>
+            </a:endParaRPr>
+          </a:p>
+        </p:txBody>
+      </p:sp>
       <p:pic>
         <p:nvPicPr>
-          <p:cNvPr id="330" name="Google Shape;330;p29"/>
+          <p:cNvPr id="337" name="Google Shape;337;p29"/>
           <p:cNvPicPr preferRelativeResize="0"/>
           <p:nvPr/>
         </p:nvPicPr>
         <p:blipFill>
-          <a:blip r:embed="rId6">
+          <a:blip r:embed="rId5">
             <a:alphaModFix/>
           </a:blip>
           <a:stretch>
@@ -16522,7 +17068,7 @@
   <p:cSld>
     <p:spTree>
       <p:nvGrpSpPr>
-        <p:cNvPr id="334" name="Shape 334"/>
+        <p:cNvPr id="341" name="Shape 341"/>
         <p:cNvGrpSpPr/>
         <p:nvPr/>
       </p:nvGrpSpPr>
@@ -16536,7 +17082,7 @@
       </p:grpSpPr>
       <p:sp>
         <p:nvSpPr>
-          <p:cNvPr id="335" name="Google Shape;335;p30"/>
+          <p:cNvPr id="342" name="Google Shape;342;p30"/>
           <p:cNvSpPr txBox="1"/>
           <p:nvPr>
             <p:ph type="title"/>
@@ -16544,8 +17090,8 @@
         </p:nvSpPr>
         <p:spPr>
           <a:xfrm>
-            <a:off x="1491450" y="480450"/>
-            <a:ext cx="7688400" cy="535200"/>
+            <a:off x="1512650" y="388325"/>
+            <a:ext cx="8070900" cy="535200"/>
           </a:xfrm>
           <a:prstGeom prst="rect">
             <a:avLst/>
@@ -16568,16 +17114,33 @@
               <a:buNone/>
             </a:pPr>
             <a:r>
-              <a:rPr lang="fr" sz="2040"/>
-              <a:t>Une offre complète de formation</a:t>
-            </a:r>
-            <a:endParaRPr sz="2040"/>
+              <a:rPr lang="fr" sz="2140"/>
+              <a:t>Un espace institutionnel sur l’entrepôt </a:t>
+            </a:r>
+            <a:endParaRPr sz="2140"/>
+          </a:p>
+          <a:p>
+            <a:pPr indent="0" lvl="0" marL="0" rtl="0" algn="l">
+              <a:spcBef>
+                <a:spcPts val="0"/>
+              </a:spcBef>
+              <a:spcAft>
+                <a:spcPts val="0"/>
+              </a:spcAft>
+              <a:buSzPts val="990"/>
+              <a:buNone/>
+            </a:pPr>
+            <a:r>
+              <a:rPr lang="fr" sz="2140"/>
+              <a:t>Recherche Data Gouv</a:t>
+            </a:r>
+            <a:endParaRPr sz="2140"/>
           </a:p>
         </p:txBody>
       </p:sp>
       <p:sp>
         <p:nvSpPr>
-          <p:cNvPr id="336" name="Google Shape;336;p30"/>
+          <p:cNvPr id="343" name="Google Shape;343;p30"/>
           <p:cNvSpPr txBox="1"/>
           <p:nvPr>
             <p:ph idx="1" type="body"/>
@@ -16585,15 +17148,140 @@
         </p:nvSpPr>
         <p:spPr>
           <a:xfrm>
-            <a:off x="143300" y="1320425"/>
-            <a:ext cx="2177400" cy="3112800"/>
+            <a:off x="141050" y="2195825"/>
+            <a:ext cx="3774300" cy="2261100"/>
           </a:xfrm>
           <a:prstGeom prst="rect">
             <a:avLst/>
           </a:prstGeom>
-          <a:solidFill>
-            <a:schemeClr val="accent3"/>
-          </a:solidFill>
+        </p:spPr>
+        <p:txBody>
+          <a:bodyPr anchorCtr="0" anchor="t" bIns="91425" lIns="91425" spcFirstLastPara="1" rIns="91425" wrap="square" tIns="91425">
+            <a:noAutofit/>
+          </a:bodyPr>
+          <a:lstStyle/>
+          <a:p>
+            <a:pPr indent="0" lvl="0" marL="0" rtl="0" algn="ctr">
+              <a:lnSpc>
+                <a:spcPct val="95000"/>
+              </a:lnSpc>
+              <a:spcBef>
+                <a:spcPts val="0"/>
+              </a:spcBef>
+              <a:spcAft>
+                <a:spcPts val="0"/>
+              </a:spcAft>
+              <a:buSzPts val="770"/>
+              <a:buNone/>
+            </a:pPr>
+            <a:r>
+              <a:rPr b="1" lang="fr" sz="1200"/>
+              <a:t>Structuration de l’espace institutionnel</a:t>
+            </a:r>
+            <a:endParaRPr sz="1200"/>
+          </a:p>
+          <a:p>
+            <a:pPr indent="-304800" lvl="0" marL="457200" rtl="0" algn="l">
+              <a:lnSpc>
+                <a:spcPct val="95000"/>
+              </a:lnSpc>
+              <a:spcBef>
+                <a:spcPts val="1200"/>
+              </a:spcBef>
+              <a:spcAft>
+                <a:spcPts val="0"/>
+              </a:spcAft>
+              <a:buSzPts val="1200"/>
+              <a:buChar char="➔"/>
+            </a:pPr>
+            <a:r>
+              <a:rPr lang="fr" sz="1200"/>
+              <a:t>Université de Rennes dispose d’un espace institutionnel sur Recherche data gouv depuis mai 2023. 5 collections créées.</a:t>
+            </a:r>
+            <a:br>
+              <a:rPr lang="fr" sz="1200"/>
+            </a:br>
+            <a:endParaRPr sz="1200"/>
+          </a:p>
+          <a:p>
+            <a:pPr indent="-304800" lvl="0" marL="457200" rtl="0" algn="l">
+              <a:lnSpc>
+                <a:spcPct val="95000"/>
+              </a:lnSpc>
+              <a:spcBef>
+                <a:spcPts val="0"/>
+              </a:spcBef>
+              <a:spcAft>
+                <a:spcPts val="0"/>
+              </a:spcAft>
+              <a:buSzPts val="1200"/>
+              <a:buChar char="➔"/>
+            </a:pPr>
+            <a:r>
+              <a:rPr lang="fr" sz="1200"/>
+              <a:t>Ouverture de l’espace Rennes 2 prévue en 2024</a:t>
+            </a:r>
+            <a:br>
+              <a:rPr lang="fr" sz="1200"/>
+            </a:br>
+            <a:endParaRPr sz="1200"/>
+          </a:p>
+          <a:p>
+            <a:pPr indent="-304800" lvl="0" marL="457200" rtl="0" algn="l">
+              <a:lnSpc>
+                <a:spcPct val="95000"/>
+              </a:lnSpc>
+              <a:spcBef>
+                <a:spcPts val="0"/>
+              </a:spcBef>
+              <a:spcAft>
+                <a:spcPts val="0"/>
+              </a:spcAft>
+              <a:buSzPts val="1200"/>
+              <a:buChar char="➔"/>
+            </a:pPr>
+            <a:r>
+              <a:rPr lang="fr" sz="1200"/>
+              <a:t>Les collections de l’université Rennes 2 remonteront dans l’espace Université de Rennes, comme pour HAL Université de Rennes</a:t>
+            </a:r>
+            <a:endParaRPr sz="1200"/>
+          </a:p>
+          <a:p>
+            <a:pPr indent="0" lvl="0" marL="457200" rtl="0" algn="l">
+              <a:lnSpc>
+                <a:spcPct val="95000"/>
+              </a:lnSpc>
+              <a:spcBef>
+                <a:spcPts val="1200"/>
+              </a:spcBef>
+              <a:spcAft>
+                <a:spcPts val="1200"/>
+              </a:spcAft>
+              <a:buNone/>
+            </a:pPr>
+            <a:r>
+              <a:t/>
+            </a:r>
+            <a:endParaRPr sz="1200"/>
+          </a:p>
+        </p:txBody>
+      </p:sp>
+      <p:sp>
+        <p:nvSpPr>
+          <p:cNvPr id="344" name="Google Shape;344;p30"/>
+          <p:cNvSpPr txBox="1"/>
+          <p:nvPr>
+            <p:ph idx="2" type="body"/>
+          </p:nvPr>
+        </p:nvSpPr>
+        <p:spPr>
+          <a:xfrm>
+            <a:off x="4889225" y="2163325"/>
+            <a:ext cx="3774300" cy="3183600"/>
+          </a:xfrm>
+          <a:prstGeom prst="rect">
+            <a:avLst/>
+          </a:prstGeom>
         </p:spPr>
         <p:txBody>
           <a:bodyPr anchorCtr="0" anchor="t" bIns="91425" lIns="91425" spcFirstLastPara="1" rIns="91425" wrap="square" tIns="91425">
@@ -16611,602 +17299,114 @@
               <a:buNone/>
             </a:pPr>
             <a:r>
-              <a:rPr b="1" lang="fr" sz="1235">
-                <a:solidFill>
-                  <a:schemeClr val="lt1"/>
-                </a:solidFill>
-              </a:rPr>
-              <a:t>Cycle mensuel de webinaires</a:t>
-            </a:r>
-            <a:r>
-              <a:rPr b="1" lang="fr" sz="1535">
-                <a:solidFill>
-                  <a:schemeClr val="lt1"/>
-                </a:solidFill>
-              </a:rPr>
-              <a:t> </a:t>
-            </a:r>
-            <a:endParaRPr b="1" sz="1535">
-              <a:solidFill>
-                <a:schemeClr val="lt1"/>
-              </a:solidFill>
-            </a:endParaRPr>
-          </a:p>
-          <a:p>
-            <a:pPr indent="-292100" lvl="0" marL="457200" rtl="0" algn="l">
+              <a:rPr b="1" lang="fr"/>
+              <a:t>Activités liées à l’entrepôt Recherche Data Gouv</a:t>
+            </a:r>
+            <a:endParaRPr b="1"/>
+          </a:p>
+          <a:p>
+            <a:pPr indent="-311150" lvl="0" marL="457200" rtl="0" algn="l">
               <a:spcBef>
                 <a:spcPts val="1200"/>
               </a:spcBef>
               <a:spcAft>
                 <a:spcPts val="0"/>
               </a:spcAft>
-              <a:buClr>
-                <a:schemeClr val="lt1"/>
-              </a:buClr>
-              <a:buSzPts val="1000"/>
+              <a:buSzPts val="1300"/>
               <a:buChar char="➔"/>
             </a:pPr>
             <a:r>
-              <a:rPr lang="fr" sz="1000">
-                <a:solidFill>
-                  <a:schemeClr val="lt1"/>
-                </a:solidFill>
-              </a:rPr>
-              <a:t>“Rédiger son PGD”</a:t>
-            </a:r>
-            <a:endParaRPr sz="1000">
-              <a:solidFill>
-                <a:schemeClr val="lt1"/>
-              </a:solidFill>
-            </a:endParaRPr>
-          </a:p>
-          <a:p>
-            <a:pPr indent="-292100" lvl="0" marL="457200" rtl="0" algn="l">
-              <a:spcBef>
-                <a:spcPts val="0"/>
-              </a:spcBef>
-              <a:spcAft>
-                <a:spcPts val="0"/>
-              </a:spcAft>
-              <a:buClr>
-                <a:schemeClr val="lt1"/>
-              </a:buClr>
-              <a:buSzPts val="1000"/>
+              <a:rPr lang="fr"/>
+              <a:t>Administration des espaces Recherche Data Gouv</a:t>
+            </a:r>
+            <a:endParaRPr/>
+          </a:p>
+          <a:p>
+            <a:pPr indent="-311150" lvl="0" marL="457200" rtl="0" algn="l">
+              <a:spcBef>
+                <a:spcPts val="0"/>
+              </a:spcBef>
+              <a:spcAft>
+                <a:spcPts val="0"/>
+              </a:spcAft>
+              <a:buSzPts val="1300"/>
               <a:buChar char="➔"/>
             </a:pPr>
             <a:r>
-              <a:rPr lang="fr" sz="1000">
-                <a:solidFill>
-                  <a:schemeClr val="lt1"/>
-                </a:solidFill>
-              </a:rPr>
-              <a:t>“Déposer ses données dans recherche data gouv, </a:t>
-            </a:r>
-            <a:endParaRPr sz="1000">
-              <a:solidFill>
-                <a:schemeClr val="lt1"/>
-              </a:solidFill>
-            </a:endParaRPr>
-          </a:p>
-          <a:p>
-            <a:pPr indent="-292100" lvl="0" marL="457200" rtl="0" algn="l">
-              <a:spcBef>
-                <a:spcPts val="0"/>
-              </a:spcBef>
-              <a:spcAft>
-                <a:spcPts val="0"/>
-              </a:spcAft>
-              <a:buClr>
-                <a:schemeClr val="lt1"/>
-              </a:buClr>
-              <a:buSzPts val="1000"/>
+              <a:rPr lang="fr"/>
+              <a:t>Curation des jeux de données (modération)</a:t>
+            </a:r>
+            <a:endParaRPr/>
+          </a:p>
+          <a:p>
+            <a:pPr indent="-311150" lvl="0" marL="457200" rtl="0" algn="l">
+              <a:spcBef>
+                <a:spcPts val="0"/>
+              </a:spcBef>
+              <a:spcAft>
+                <a:spcPts val="0"/>
+              </a:spcAft>
+              <a:buSzPts val="1300"/>
               <a:buChar char="➔"/>
             </a:pPr>
             <a:r>
-              <a:rPr lang="fr" sz="1000">
-                <a:solidFill>
-                  <a:schemeClr val="lt1"/>
-                </a:solidFill>
-              </a:rPr>
-              <a:t>“Wikidata pour la recherche” (en partenariat avec résidence Wikimedia à l’URFIST)</a:t>
-            </a:r>
-            <a:endParaRPr sz="1000">
-              <a:solidFill>
-                <a:schemeClr val="lt1"/>
-              </a:solidFill>
-            </a:endParaRPr>
-          </a:p>
-          <a:p>
-            <a:pPr indent="-292100" lvl="0" marL="457200" rtl="0" algn="l">
-              <a:spcBef>
-                <a:spcPts val="0"/>
-              </a:spcBef>
-              <a:spcAft>
-                <a:spcPts val="0"/>
-              </a:spcAft>
-              <a:buClr>
-                <a:schemeClr val="lt1"/>
-              </a:buClr>
-              <a:buSzPts val="1000"/>
+              <a:rPr lang="fr"/>
+              <a:t>Formation  au dép</a:t>
+            </a:r>
+            <a:r>
+              <a:rPr lang="fr"/>
+              <a:t>ôt </a:t>
+            </a:r>
+            <a:r>
+              <a:rPr lang="fr"/>
+              <a:t>et présentation de Recherche Data Gouv.</a:t>
+            </a:r>
+            <a:endParaRPr/>
+          </a:p>
+          <a:p>
+            <a:pPr indent="-311150" lvl="0" marL="457200" rtl="0" algn="l">
+              <a:spcBef>
+                <a:spcPts val="0"/>
+              </a:spcBef>
+              <a:spcAft>
+                <a:spcPts val="0"/>
+              </a:spcAft>
+              <a:buSzPts val="1300"/>
               <a:buChar char="➔"/>
             </a:pPr>
             <a:r>
-              <a:rPr lang="fr" sz="1000">
-                <a:solidFill>
-                  <a:schemeClr val="lt1"/>
-                </a:solidFill>
-              </a:rPr>
-              <a:t>“Découvrir les cahiers de laboratoire électroniques”</a:t>
-            </a:r>
-            <a:endParaRPr sz="1000">
-              <a:solidFill>
-                <a:schemeClr val="lt1"/>
-              </a:solidFill>
-            </a:endParaRPr>
-          </a:p>
-          <a:p>
-            <a:pPr indent="-292100" lvl="0" marL="457200" rtl="0" algn="l">
-              <a:spcBef>
-                <a:spcPts val="0"/>
-              </a:spcBef>
-              <a:spcAft>
-                <a:spcPts val="0"/>
-              </a:spcAft>
-              <a:buClr>
-                <a:schemeClr val="lt1"/>
-              </a:buClr>
-              <a:buSzPts val="1000"/>
+              <a:rPr lang="fr"/>
+              <a:t> Assistance aux chercheurs pour le dépôt de leurs données</a:t>
+            </a:r>
+            <a:endParaRPr/>
+          </a:p>
+          <a:p>
+            <a:pPr indent="-311150" lvl="0" marL="457200" rtl="0" algn="l">
+              <a:spcBef>
+                <a:spcPts val="0"/>
+              </a:spcBef>
+              <a:spcAft>
+                <a:spcPts val="0"/>
+              </a:spcAft>
+              <a:buSzPts val="1300"/>
               <a:buChar char="➔"/>
             </a:pPr>
             <a:r>
-              <a:rPr lang="fr" sz="1000">
-                <a:solidFill>
-                  <a:schemeClr val="lt1"/>
-                </a:solidFill>
-              </a:rPr>
-              <a:t>“Rédiger un data paper”</a:t>
-            </a:r>
-            <a:endParaRPr sz="1000">
-              <a:solidFill>
-                <a:schemeClr val="lt1"/>
-              </a:solidFill>
-            </a:endParaRPr>
-          </a:p>
-          <a:p>
-            <a:pPr indent="-292100" lvl="0" marL="457200" rtl="0" algn="l">
-              <a:spcBef>
-                <a:spcPts val="0"/>
-              </a:spcBef>
-              <a:spcAft>
-                <a:spcPts val="0"/>
-              </a:spcAft>
-              <a:buClr>
-                <a:schemeClr val="lt1"/>
-              </a:buClr>
-              <a:buSzPts val="1000"/>
-              <a:buChar char="➔"/>
-            </a:pPr>
-            <a:r>
-              <a:rPr lang="fr" sz="1000">
-                <a:solidFill>
-                  <a:schemeClr val="lt1"/>
-                </a:solidFill>
-              </a:rPr>
-              <a:t>“Parcours juridique”</a:t>
-            </a:r>
-            <a:endParaRPr sz="1000">
-              <a:solidFill>
-                <a:schemeClr val="lt1"/>
-              </a:solidFill>
-            </a:endParaRPr>
-          </a:p>
-        </p:txBody>
-      </p:sp>
-      <p:sp>
-        <p:nvSpPr>
-          <p:cNvPr id="337" name="Google Shape;337;p30"/>
-          <p:cNvSpPr txBox="1"/>
-          <p:nvPr>
-            <p:ph idx="2" type="body"/>
-          </p:nvPr>
-        </p:nvSpPr>
-        <p:spPr>
-          <a:xfrm>
-            <a:off x="2297029" y="1320375"/>
-            <a:ext cx="2589600" cy="3408900"/>
-          </a:xfrm>
-          <a:prstGeom prst="rect">
-            <a:avLst/>
-          </a:prstGeom>
-        </p:spPr>
-        <p:txBody>
-          <a:bodyPr anchorCtr="0" anchor="t" bIns="91425" lIns="91425" spcFirstLastPara="1" rIns="91425" wrap="square" tIns="91425">
-            <a:normAutofit fontScale="77500" lnSpcReduction="10000"/>
-          </a:bodyPr>
-          <a:lstStyle/>
-          <a:p>
-            <a:pPr indent="0" lvl="0" marL="0" rtl="0" algn="l">
-              <a:spcBef>
-                <a:spcPts val="0"/>
-              </a:spcBef>
-              <a:spcAft>
-                <a:spcPts val="0"/>
-              </a:spcAft>
-              <a:buNone/>
-            </a:pPr>
-            <a:r>
-              <a:rPr b="1" lang="fr" sz="1558">
-                <a:solidFill>
-                  <a:schemeClr val="dk2"/>
-                </a:solidFill>
-              </a:rPr>
-              <a:t>Formations doctorales</a:t>
-            </a:r>
-            <a:endParaRPr b="1" sz="1558">
-              <a:solidFill>
-                <a:schemeClr val="dk2"/>
-              </a:solidFill>
-            </a:endParaRPr>
-          </a:p>
-          <a:p>
-            <a:pPr indent="-292576" lvl="0" marL="457200" rtl="0" algn="l">
-              <a:spcBef>
-                <a:spcPts val="1200"/>
-              </a:spcBef>
-              <a:spcAft>
-                <a:spcPts val="0"/>
-              </a:spcAft>
-              <a:buSzPct val="100000"/>
-              <a:buChar char="➔"/>
-            </a:pPr>
-            <a:r>
               <a:rPr lang="fr"/>
-              <a:t>“Introduction à la gestion des données pour une recherche fiable : formats de fichiers, nommage et description “</a:t>
+              <a:t>Participation au développement du dataverse</a:t>
             </a:r>
             <a:endParaRPr/>
-          </a:p>
-          <a:p>
-            <a:pPr indent="-292576" lvl="0" marL="457200" rtl="0" algn="l">
-              <a:spcBef>
-                <a:spcPts val="0"/>
-              </a:spcBef>
-              <a:spcAft>
-                <a:spcPts val="0"/>
-              </a:spcAft>
-              <a:buSzPct val="100000"/>
-              <a:buChar char="➔"/>
-            </a:pPr>
-            <a:r>
-              <a:rPr lang="fr"/>
-              <a:t>“La protection des données à caractère personnel dans le cadre d’une recherche scientifique”</a:t>
-            </a:r>
-            <a:endParaRPr/>
-          </a:p>
-          <a:p>
-            <a:pPr indent="-292576" lvl="0" marL="457200" rtl="0" algn="l">
-              <a:spcBef>
-                <a:spcPts val="0"/>
-              </a:spcBef>
-              <a:spcAft>
-                <a:spcPts val="0"/>
-              </a:spcAft>
-              <a:buSzPct val="100000"/>
-              <a:buChar char="➔"/>
-            </a:pPr>
-            <a:r>
-              <a:rPr lang="fr"/>
-              <a:t>“L'accès aux données de la recherche, garant d'intégrité scientifique : où et comment diffuser les données ?”</a:t>
-            </a:r>
-            <a:endParaRPr/>
-          </a:p>
-          <a:p>
-            <a:pPr indent="-292576" lvl="0" marL="457200" rtl="0" algn="l">
-              <a:spcBef>
-                <a:spcPts val="0"/>
-              </a:spcBef>
-              <a:spcAft>
-                <a:spcPts val="0"/>
-              </a:spcAft>
-              <a:buSzPct val="100000"/>
-              <a:buChar char="➔"/>
-            </a:pPr>
-            <a:r>
-              <a:rPr lang="fr"/>
-              <a:t>“Trouver et réutiliser ses données en SHS dans le respect du droit”</a:t>
-            </a:r>
-            <a:endParaRPr/>
-          </a:p>
-          <a:p>
-            <a:pPr indent="-292576" lvl="0" marL="457200" rtl="0" algn="l">
-              <a:spcBef>
-                <a:spcPts val="0"/>
-              </a:spcBef>
-              <a:spcAft>
-                <a:spcPts val="0"/>
-              </a:spcAft>
-              <a:buSzPct val="100000"/>
-              <a:buChar char="➔"/>
-            </a:pPr>
-            <a:r>
-              <a:rPr lang="fr"/>
-              <a:t>“Anonymisation des données”</a:t>
-            </a:r>
-            <a:endParaRPr/>
-          </a:p>
-          <a:p>
-            <a:pPr indent="-292576" lvl="0" marL="457200" rtl="0" algn="l">
-              <a:spcBef>
-                <a:spcPts val="0"/>
-              </a:spcBef>
-              <a:spcAft>
-                <a:spcPts val="0"/>
-              </a:spcAft>
-              <a:buSzPct val="100000"/>
-              <a:buChar char="➔"/>
-            </a:pPr>
-            <a:r>
-              <a:rPr lang="fr"/>
-              <a:t>“Quarto et R “</a:t>
-            </a:r>
-            <a:endParaRPr/>
-          </a:p>
-          <a:p>
-            <a:pPr indent="-292576" lvl="0" marL="457200" rtl="0" algn="l">
-              <a:spcBef>
-                <a:spcPts val="0"/>
-              </a:spcBef>
-              <a:spcAft>
-                <a:spcPts val="0"/>
-              </a:spcAft>
-              <a:buSzPct val="100000"/>
-              <a:buChar char="➔"/>
-            </a:pPr>
-            <a:r>
-              <a:rPr lang="fr"/>
-              <a:t>“Jupyter notebooks et langage python”</a:t>
-            </a:r>
-            <a:endParaRPr/>
-          </a:p>
-        </p:txBody>
-      </p:sp>
-      <p:sp>
-        <p:nvSpPr>
-          <p:cNvPr id="338" name="Google Shape;338;p30"/>
-          <p:cNvSpPr txBox="1"/>
-          <p:nvPr>
-            <p:ph idx="2" type="body"/>
-          </p:nvPr>
-        </p:nvSpPr>
-        <p:spPr>
-          <a:xfrm>
-            <a:off x="4987550" y="1320425"/>
-            <a:ext cx="2066100" cy="3112800"/>
-          </a:xfrm>
-          <a:prstGeom prst="rect">
-            <a:avLst/>
-          </a:prstGeom>
-          <a:solidFill>
-            <a:schemeClr val="lt2"/>
-          </a:solidFill>
-        </p:spPr>
-        <p:txBody>
-          <a:bodyPr anchorCtr="0" anchor="t" bIns="91425" lIns="91425" spcFirstLastPara="1" rIns="91425" wrap="square" tIns="91425">
-            <a:normAutofit fontScale="85000" lnSpcReduction="20000"/>
-          </a:bodyPr>
-          <a:lstStyle/>
-          <a:p>
-            <a:pPr indent="0" lvl="0" marL="0" rtl="0" algn="l">
-              <a:spcBef>
-                <a:spcPts val="0"/>
-              </a:spcBef>
-              <a:spcAft>
-                <a:spcPts val="0"/>
-              </a:spcAft>
-              <a:buNone/>
-            </a:pPr>
-            <a:r>
-              <a:rPr b="1" lang="fr"/>
-              <a:t>Formations URFIST Rennes</a:t>
-            </a:r>
-            <a:endParaRPr b="1"/>
-          </a:p>
-          <a:p>
-            <a:pPr indent="-290671" lvl="0" marL="457200" rtl="0" algn="l">
-              <a:spcBef>
-                <a:spcPts val="1200"/>
-              </a:spcBef>
-              <a:spcAft>
-                <a:spcPts val="0"/>
-              </a:spcAft>
-              <a:buSzPct val="100000"/>
-              <a:buChar char="➔"/>
-            </a:pPr>
-            <a:r>
-              <a:rPr lang="fr" sz="1150"/>
-              <a:t>F</a:t>
-            </a:r>
-            <a:r>
-              <a:rPr lang="fr" sz="1150"/>
-              <a:t>ormations ARDoISE : “Ecrire en Markdown”</a:t>
-            </a:r>
-            <a:endParaRPr sz="1150"/>
-          </a:p>
-          <a:p>
-            <a:pPr indent="-290671" lvl="0" marL="457200" rtl="0" algn="l">
-              <a:spcBef>
-                <a:spcPts val="0"/>
-              </a:spcBef>
-              <a:spcAft>
-                <a:spcPts val="0"/>
-              </a:spcAft>
-              <a:buSzPct val="100000"/>
-              <a:buChar char="➔"/>
-            </a:pPr>
-            <a:r>
-              <a:rPr lang="fr" sz="1150"/>
-              <a:t>Programme URFIST sur les données de la recherche : “Rédiger un datapaper”, “</a:t>
-            </a:r>
-            <a:r>
-              <a:rPr lang="fr" sz="1150">
-                <a:uFill>
-                  <a:noFill/>
-                </a:uFill>
-                <a:hlinkClick r:id="rId3"/>
-              </a:rPr>
-              <a:t>Analyse de données qualitatives avec le logiciel NVivo</a:t>
-            </a:r>
-            <a:r>
-              <a:rPr lang="fr" sz="1150"/>
-              <a:t>”, “Gérer et diffuser ses données de recherche : introduction aux enjeux, méthodes, pratiques”, Pourquoi et comment rédiger un PGD / DMP</a:t>
-            </a:r>
-            <a:r>
-              <a:rPr lang="fr" sz="1150" u="sng">
-                <a:solidFill>
-                  <a:schemeClr val="hlink"/>
-                </a:solidFill>
-                <a:latin typeface="Arial"/>
-                <a:ea typeface="Arial"/>
-                <a:cs typeface="Arial"/>
-                <a:sym typeface="Arial"/>
-              </a:rPr>
-              <a:t>  </a:t>
-            </a:r>
-            <a:endParaRPr sz="1150"/>
-          </a:p>
-          <a:p>
-            <a:pPr indent="-290671" lvl="0" marL="457200" rtl="0" algn="l">
-              <a:spcBef>
-                <a:spcPts val="0"/>
-              </a:spcBef>
-              <a:spcAft>
-                <a:spcPts val="0"/>
-              </a:spcAft>
-              <a:buSzPct val="100000"/>
-              <a:buChar char="➔"/>
-            </a:pPr>
-            <a:r>
-              <a:rPr lang="fr" sz="1150"/>
-              <a:t>Participation à l’élaboration du programme concernant les données</a:t>
-            </a:r>
-            <a:endParaRPr/>
-          </a:p>
-        </p:txBody>
-      </p:sp>
-      <p:sp>
-        <p:nvSpPr>
-          <p:cNvPr id="339" name="Google Shape;339;p30"/>
-          <p:cNvSpPr txBox="1"/>
-          <p:nvPr>
-            <p:ph idx="2" type="body"/>
-          </p:nvPr>
-        </p:nvSpPr>
-        <p:spPr>
-          <a:xfrm>
-            <a:off x="7053925" y="1320450"/>
-            <a:ext cx="1943100" cy="1869900"/>
-          </a:xfrm>
-          <a:prstGeom prst="rect">
-            <a:avLst/>
-          </a:prstGeom>
-        </p:spPr>
-        <p:txBody>
-          <a:bodyPr anchorCtr="0" anchor="t" bIns="91425" lIns="91425" spcFirstLastPara="1" rIns="91425" wrap="square" tIns="91425">
-            <a:normAutofit/>
-          </a:bodyPr>
-          <a:lstStyle/>
-          <a:p>
-            <a:pPr indent="0" lvl="0" marL="0" rtl="0" algn="l">
-              <a:spcBef>
-                <a:spcPts val="0"/>
-              </a:spcBef>
-              <a:spcAft>
-                <a:spcPts val="0"/>
-              </a:spcAft>
-              <a:buNone/>
-            </a:pPr>
-            <a:r>
-              <a:rPr b="1" lang="fr" sz="1200"/>
-              <a:t>Formations à la demande</a:t>
-            </a:r>
-            <a:endParaRPr b="1" sz="1200"/>
-          </a:p>
-          <a:p>
-            <a:pPr indent="-292100" lvl="0" marL="457200" rtl="0" algn="l">
-              <a:spcBef>
-                <a:spcPts val="1200"/>
-              </a:spcBef>
-              <a:spcAft>
-                <a:spcPts val="0"/>
-              </a:spcAft>
-              <a:buSzPts val="1000"/>
-              <a:buChar char="➔"/>
-            </a:pPr>
-            <a:r>
-              <a:rPr lang="fr" sz="1000"/>
-              <a:t>ISCR</a:t>
-            </a:r>
-            <a:endParaRPr sz="1000"/>
-          </a:p>
-          <a:p>
-            <a:pPr indent="-292100" lvl="0" marL="457200" rtl="0" algn="l">
-              <a:spcBef>
-                <a:spcPts val="0"/>
-              </a:spcBef>
-              <a:spcAft>
-                <a:spcPts val="0"/>
-              </a:spcAft>
-              <a:buSzPts val="1000"/>
-              <a:buChar char="➔"/>
-            </a:pPr>
-            <a:r>
-              <a:rPr lang="fr" sz="1000"/>
-              <a:t>RPPsy,  VIPS2, </a:t>
-            </a:r>
-            <a:r>
-              <a:rPr lang="fr" sz="1000"/>
-              <a:t>ISCR</a:t>
-            </a:r>
-            <a:r>
-              <a:rPr lang="fr" sz="1000"/>
-              <a:t> :</a:t>
-            </a:r>
-            <a:r>
-              <a:rPr lang="fr" sz="1000"/>
-              <a:t> “</a:t>
-            </a:r>
-            <a:r>
-              <a:rPr lang="fr" sz="1000"/>
-              <a:t>Gestion des données de la recherche : des enjeux à la pratique”</a:t>
-            </a:r>
-            <a:endParaRPr sz="1000"/>
-          </a:p>
-          <a:p>
-            <a:pPr indent="-292100" lvl="0" marL="457200" rtl="0" algn="l">
-              <a:spcBef>
-                <a:spcPts val="0"/>
-              </a:spcBef>
-              <a:spcAft>
-                <a:spcPts val="0"/>
-              </a:spcAft>
-              <a:buSzPts val="1000"/>
-              <a:buChar char="➔"/>
-            </a:pPr>
-            <a:r>
-              <a:rPr lang="fr" sz="1000"/>
-              <a:t>Café des doctorants M2S</a:t>
-            </a:r>
-            <a:endParaRPr sz="1000"/>
           </a:p>
         </p:txBody>
       </p:sp>
       <p:pic>
         <p:nvPicPr>
-          <p:cNvPr id="340" name="Google Shape;340;p30"/>
+          <p:cNvPr id="345" name="Google Shape;345;p30"/>
           <p:cNvPicPr preferRelativeResize="0"/>
           <p:nvPr/>
         </p:nvPicPr>
         <p:blipFill>
-          <a:blip r:embed="rId4">
+          <a:blip r:embed="rId3">
             <a:alphaModFix/>
           </a:blip>
           <a:stretch>
@@ -17229,225 +17429,7 @@
       </p:pic>
       <p:sp>
         <p:nvSpPr>
-          <p:cNvPr id="341" name="Google Shape;341;p30"/>
-          <p:cNvSpPr txBox="1"/>
-          <p:nvPr/>
-        </p:nvSpPr>
-        <p:spPr>
-          <a:xfrm>
-            <a:off x="7053925" y="3018975"/>
-            <a:ext cx="1831500" cy="1405500"/>
-          </a:xfrm>
-          <a:prstGeom prst="rect">
-            <a:avLst/>
-          </a:prstGeom>
-          <a:noFill/>
-          <a:ln>
-            <a:noFill/>
-          </a:ln>
-        </p:spPr>
-        <p:txBody>
-          <a:bodyPr anchorCtr="0" anchor="t" bIns="91425" lIns="91425" spcFirstLastPara="1" rIns="91425" wrap="square" tIns="91425">
-            <a:noAutofit/>
-          </a:bodyPr>
-          <a:lstStyle/>
-          <a:p>
-            <a:pPr indent="0" lvl="0" marL="0" rtl="0" algn="l">
-              <a:spcBef>
-                <a:spcPts val="0"/>
-              </a:spcBef>
-              <a:spcAft>
-                <a:spcPts val="0"/>
-              </a:spcAft>
-              <a:buNone/>
-            </a:pPr>
-            <a:r>
-              <a:rPr b="1" lang="fr" sz="1200">
-                <a:solidFill>
-                  <a:schemeClr val="accent1"/>
-                </a:solidFill>
-                <a:latin typeface="Lato"/>
-                <a:ea typeface="Lato"/>
-                <a:cs typeface="Lato"/>
-                <a:sym typeface="Lato"/>
-              </a:rPr>
-              <a:t>Formations proposées par partenaires</a:t>
-            </a:r>
-            <a:r>
-              <a:rPr lang="fr" sz="1300">
-                <a:solidFill>
-                  <a:schemeClr val="accent1"/>
-                </a:solidFill>
-                <a:latin typeface="Lato"/>
-                <a:ea typeface="Lato"/>
-                <a:cs typeface="Lato"/>
-                <a:sym typeface="Lato"/>
-              </a:rPr>
-              <a:t> </a:t>
-            </a:r>
-            <a:endParaRPr sz="1300">
-              <a:solidFill>
-                <a:schemeClr val="accent1"/>
-              </a:solidFill>
-              <a:latin typeface="Lato"/>
-              <a:ea typeface="Lato"/>
-              <a:cs typeface="Lato"/>
-              <a:sym typeface="Lato"/>
-            </a:endParaRPr>
-          </a:p>
-          <a:p>
-            <a:pPr indent="-292100" lvl="0" marL="457200" rtl="0" algn="l">
-              <a:spcBef>
-                <a:spcPts val="0"/>
-              </a:spcBef>
-              <a:spcAft>
-                <a:spcPts val="0"/>
-              </a:spcAft>
-              <a:buClr>
-                <a:schemeClr val="accent1"/>
-              </a:buClr>
-              <a:buSzPts val="1000"/>
-              <a:buFont typeface="Lato"/>
-              <a:buChar char="➔"/>
-            </a:pPr>
-            <a:r>
-              <a:rPr lang="fr" sz="1000">
-                <a:solidFill>
-                  <a:schemeClr val="accent1"/>
-                </a:solidFill>
-                <a:latin typeface="Lato"/>
-                <a:ea typeface="Lato"/>
-                <a:cs typeface="Lato"/>
-                <a:sym typeface="Lato"/>
-              </a:rPr>
-              <a:t>Formations Datalab MSHB Rennes</a:t>
-            </a:r>
-            <a:endParaRPr sz="1000">
-              <a:solidFill>
-                <a:schemeClr val="accent1"/>
-              </a:solidFill>
-              <a:latin typeface="Lato"/>
-              <a:ea typeface="Lato"/>
-              <a:cs typeface="Lato"/>
-              <a:sym typeface="Lato"/>
-            </a:endParaRPr>
-          </a:p>
-          <a:p>
-            <a:pPr indent="-292100" lvl="0" marL="457200" rtl="0" algn="l">
-              <a:spcBef>
-                <a:spcPts val="0"/>
-              </a:spcBef>
-              <a:spcAft>
-                <a:spcPts val="0"/>
-              </a:spcAft>
-              <a:buClr>
-                <a:schemeClr val="accent1"/>
-              </a:buClr>
-              <a:buSzPts val="1000"/>
-              <a:buFont typeface="Lato"/>
-              <a:buChar char="➔"/>
-            </a:pPr>
-            <a:r>
-              <a:rPr lang="fr" sz="1000">
-                <a:solidFill>
-                  <a:schemeClr val="accent1"/>
-                </a:solidFill>
-                <a:latin typeface="Lato"/>
-                <a:ea typeface="Lato"/>
-                <a:cs typeface="Lato"/>
-                <a:sym typeface="Lato"/>
-              </a:rPr>
-              <a:t>Semaine Data SHS (PUD)</a:t>
-            </a:r>
-            <a:endParaRPr sz="1000">
-              <a:solidFill>
-                <a:schemeClr val="accent1"/>
-              </a:solidFill>
-              <a:latin typeface="Lato"/>
-              <a:ea typeface="Lato"/>
-              <a:cs typeface="Lato"/>
-              <a:sym typeface="Lato"/>
-            </a:endParaRPr>
-          </a:p>
-          <a:p>
-            <a:pPr indent="-292100" lvl="0" marL="457200" rtl="0" algn="l">
-              <a:spcBef>
-                <a:spcPts val="0"/>
-              </a:spcBef>
-              <a:spcAft>
-                <a:spcPts val="0"/>
-              </a:spcAft>
-              <a:buClr>
-                <a:schemeClr val="accent1"/>
-              </a:buClr>
-              <a:buSzPts val="1000"/>
-              <a:buFont typeface="Lato"/>
-              <a:buChar char="➔"/>
-            </a:pPr>
-            <a:r>
-              <a:rPr lang="fr" sz="1000">
-                <a:solidFill>
-                  <a:schemeClr val="accent1"/>
-                </a:solidFill>
-                <a:latin typeface="Lato"/>
-                <a:ea typeface="Lato"/>
-                <a:cs typeface="Lato"/>
-                <a:sym typeface="Lato"/>
-              </a:rPr>
-              <a:t>Formations OSUR</a:t>
-            </a:r>
-            <a:endParaRPr sz="1000">
-              <a:solidFill>
-                <a:schemeClr val="accent1"/>
-              </a:solidFill>
-              <a:latin typeface="Lato"/>
-              <a:ea typeface="Lato"/>
-              <a:cs typeface="Lato"/>
-              <a:sym typeface="Lato"/>
-            </a:endParaRPr>
-          </a:p>
-          <a:p>
-            <a:pPr indent="-292100" lvl="0" marL="457200" rtl="0" algn="l">
-              <a:spcBef>
-                <a:spcPts val="0"/>
-              </a:spcBef>
-              <a:spcAft>
-                <a:spcPts val="0"/>
-              </a:spcAft>
-              <a:buClr>
-                <a:schemeClr val="accent1"/>
-              </a:buClr>
-              <a:buSzPts val="1000"/>
-              <a:buFont typeface="Lato"/>
-              <a:buChar char="➔"/>
-            </a:pPr>
-            <a:r>
-              <a:rPr lang="fr" sz="1000">
-                <a:solidFill>
-                  <a:schemeClr val="accent1"/>
-                </a:solidFill>
-                <a:latin typeface="Lato"/>
-                <a:ea typeface="Lato"/>
-                <a:cs typeface="Lato"/>
-                <a:sym typeface="Lato"/>
-              </a:rPr>
-              <a:t>…</a:t>
-            </a:r>
-            <a:endParaRPr sz="1000">
-              <a:solidFill>
-                <a:schemeClr val="accent1"/>
-              </a:solidFill>
-              <a:latin typeface="Lato"/>
-              <a:ea typeface="Lato"/>
-              <a:cs typeface="Lato"/>
-              <a:sym typeface="Lato"/>
-            </a:endParaRPr>
-          </a:p>
-        </p:txBody>
-      </p:sp>
-      <p:sp>
-        <p:nvSpPr>
-          <p:cNvPr id="342" name="Google Shape;342;p30"/>
+          <p:cNvPr id="346" name="Google Shape;346;p30"/>
           <p:cNvSpPr txBox="1"/>
           <p:nvPr>
             <p:ph idx="1" type="body"/>
@@ -17455,7 +17437,7 @@
         </p:nvSpPr>
         <p:spPr>
           <a:xfrm>
-            <a:off x="143300" y="4539625"/>
+            <a:off x="143300" y="1339225"/>
             <a:ext cx="8853600" cy="535200"/>
           </a:xfrm>
           <a:prstGeom prst="rect">
@@ -17486,7 +17468,7 @@
                   <a:schemeClr val="lt1"/>
                 </a:solidFill>
               </a:rPr>
-              <a:t>Une offre de formation construite en complémentarité (thématiques, publics, formats)</a:t>
+              <a:t>Un entrepôt pensé en subsidiarité par rapport aux entrepôts disciplinaires existants</a:t>
             </a:r>
             <a:endParaRPr sz="1500">
               <a:solidFill>
@@ -17567,12 +17549,12 @@
       </p:sp>
       <p:pic>
         <p:nvPicPr>
-          <p:cNvPr id="343" name="Google Shape;343;p30"/>
+          <p:cNvPr id="347" name="Google Shape;347;p30"/>
           <p:cNvPicPr preferRelativeResize="0"/>
           <p:nvPr/>
         </p:nvPicPr>
         <p:blipFill>
-          <a:blip r:embed="rId5">
+          <a:blip r:embed="rId4">
             <a:alphaModFix/>
           </a:blip>
           <a:stretch>
@@ -17606,7 +17588,7 @@
   <p:cSld>
     <p:spTree>
       <p:nvGrpSpPr>
-        <p:cNvPr id="347" name="Shape 347"/>
+        <p:cNvPr id="351" name="Shape 351"/>
         <p:cNvGrpSpPr/>
         <p:nvPr/>
       </p:nvGrpSpPr>
@@ -17620,7 +17602,7 @@
       </p:grpSpPr>
       <p:sp>
         <p:nvSpPr>
-          <p:cNvPr id="348" name="Google Shape;348;p31"/>
+          <p:cNvPr id="352" name="Google Shape;352;p31"/>
           <p:cNvSpPr txBox="1"/>
           <p:nvPr>
             <p:ph type="title"/>
@@ -17628,8 +17610,8 @@
         </p:nvSpPr>
         <p:spPr>
           <a:xfrm>
-            <a:off x="1512650" y="388325"/>
-            <a:ext cx="8070900" cy="535200"/>
+            <a:off x="729450" y="404250"/>
+            <a:ext cx="7688400" cy="535200"/>
           </a:xfrm>
           <a:prstGeom prst="rect">
             <a:avLst/>
@@ -17637,7 +17619,7 @@
         </p:spPr>
         <p:txBody>
           <a:bodyPr anchorCtr="0" anchor="t" bIns="91425" lIns="91425" spcFirstLastPara="1" rIns="91425" wrap="square" tIns="91425">
-            <a:noAutofit/>
+            <a:normAutofit fontScale="90000"/>
           </a:bodyPr>
           <a:lstStyle/>
           <a:p>
@@ -17648,37 +17630,19 @@
               <a:spcAft>
                 <a:spcPts val="0"/>
               </a:spcAft>
-              <a:buSzPts val="990"/>
-              <a:buNone/>
-            </a:pPr>
-            <a:r>
-              <a:rPr lang="fr" sz="2140"/>
-              <a:t>Un espace institutionnel sur l’entrepôt </a:t>
-            </a:r>
-            <a:endParaRPr sz="2140"/>
-          </a:p>
-          <a:p>
-            <a:pPr indent="0" lvl="0" marL="0" rtl="0" algn="l">
-              <a:spcBef>
-                <a:spcPts val="0"/>
-              </a:spcBef>
-              <a:spcAft>
-                <a:spcPts val="0"/>
-              </a:spcAft>
-              <a:buSzPts val="990"/>
-              <a:buNone/>
-            </a:pPr>
-            <a:r>
-              <a:rPr lang="fr" sz="2140"/>
-              <a:t>Recherche Data Gouv</a:t>
-            </a:r>
-            <a:endParaRPr sz="2140"/>
+              <a:buNone/>
+            </a:pPr>
+            <a:r>
+              <a:rPr lang="fr"/>
+              <a:t>Projet de déploiement de cahiers de laboratoires électroniques</a:t>
+            </a:r>
+            <a:endParaRPr/>
           </a:p>
         </p:txBody>
       </p:sp>
       <p:sp>
         <p:nvSpPr>
-          <p:cNvPr id="349" name="Google Shape;349;p31"/>
+          <p:cNvPr id="353" name="Google Shape;353;p31"/>
           <p:cNvSpPr txBox="1"/>
           <p:nvPr>
             <p:ph idx="1" type="body"/>
@@ -17686,8 +17650,8 @@
         </p:nvSpPr>
         <p:spPr>
           <a:xfrm>
-            <a:off x="141050" y="2195825"/>
-            <a:ext cx="3774300" cy="2261100"/>
+            <a:off x="729450" y="1604075"/>
+            <a:ext cx="3774300" cy="3330600"/>
           </a:xfrm>
           <a:prstGeom prst="rect">
             <a:avLst/>
@@ -17695,95 +17659,125 @@
         </p:spPr>
         <p:txBody>
           <a:bodyPr anchorCtr="0" anchor="t" bIns="91425" lIns="91425" spcFirstLastPara="1" rIns="91425" wrap="square" tIns="91425">
-            <a:noAutofit/>
+            <a:normAutofit lnSpcReduction="20000"/>
           </a:bodyPr>
           <a:lstStyle/>
           <a:p>
-            <a:pPr indent="0" lvl="0" marL="0" rtl="0" algn="ctr">
-              <a:lnSpc>
-                <a:spcPct val="95000"/>
-              </a:lnSpc>
-              <a:spcBef>
-                <a:spcPts val="0"/>
-              </a:spcBef>
-              <a:spcAft>
-                <a:spcPts val="0"/>
-              </a:spcAft>
-              <a:buSzPts val="770"/>
-              <a:buNone/>
-            </a:pPr>
-            <a:r>
-              <a:rPr b="1" lang="fr" sz="1200"/>
-              <a:t>Structuration de l’espace institutionnel</a:t>
-            </a:r>
-            <a:endParaRPr sz="1200"/>
-          </a:p>
-          <a:p>
-            <a:pPr indent="-304800" lvl="0" marL="457200" rtl="0" algn="l">
-              <a:lnSpc>
-                <a:spcPct val="95000"/>
-              </a:lnSpc>
+            <a:pPr indent="0" lvl="0" marL="0" rtl="0" algn="l">
+              <a:spcBef>
+                <a:spcPts val="0"/>
+              </a:spcBef>
+              <a:spcAft>
+                <a:spcPts val="0"/>
+              </a:spcAft>
+              <a:buNone/>
+            </a:pPr>
+            <a:r>
+              <a:rPr b="1" lang="fr"/>
+              <a:t>Version électronique du cahier de laboratoire papier </a:t>
+            </a:r>
+            <a:r>
+              <a:rPr lang="fr"/>
+              <a:t>(j</a:t>
+            </a:r>
+            <a:r>
+              <a:rPr lang="fr"/>
+              <a:t>ournal de bord utilisé pour détailler au quotidien les activités liées aux projets de recherche )</a:t>
+            </a:r>
+            <a:endParaRPr/>
+          </a:p>
+          <a:p>
+            <a:pPr indent="-311150" lvl="0" marL="457200" rtl="0" algn="l">
+              <a:spcBef>
+                <a:spcPts val="1000"/>
+              </a:spcBef>
+              <a:spcAft>
+                <a:spcPts val="0"/>
+              </a:spcAft>
+              <a:buSzPts val="1300"/>
+              <a:buChar char="➔"/>
+            </a:pPr>
+            <a:r>
+              <a:rPr lang="fr"/>
+              <a:t>Outil stratégique essentiel qui s’inscrit pleinement dans une démarche de science ouverte et de </a:t>
+            </a:r>
+            <a:r>
+              <a:rPr b="1" lang="fr"/>
+              <a:t>reproductibilité</a:t>
+            </a:r>
+            <a:r>
+              <a:rPr lang="fr"/>
+              <a:t> de la recherche.</a:t>
+            </a:r>
+            <a:endParaRPr/>
+          </a:p>
+          <a:p>
+            <a:pPr indent="-311150" lvl="0" marL="457200" rtl="0" algn="l">
+              <a:spcBef>
+                <a:spcPts val="0"/>
+              </a:spcBef>
+              <a:spcAft>
+                <a:spcPts val="0"/>
+              </a:spcAft>
+              <a:buSzPts val="1300"/>
+              <a:buChar char="➔"/>
+            </a:pPr>
+            <a:r>
+              <a:rPr lang="fr"/>
+              <a:t>Montée en compétence, développement d’une expertise au sein de l’atelier ARDoISE</a:t>
+            </a:r>
+            <a:endParaRPr/>
+          </a:p>
+          <a:p>
+            <a:pPr indent="0" lvl="0" marL="0" rtl="0" algn="l">
               <a:spcBef>
                 <a:spcPts val="1200"/>
               </a:spcBef>
               <a:spcAft>
                 <a:spcPts val="0"/>
               </a:spcAft>
-              <a:buSzPts val="1200"/>
-              <a:buChar char="➔"/>
-            </a:pPr>
-            <a:r>
-              <a:rPr lang="fr" sz="1200"/>
-              <a:t>Les universités de Rennes et Rennes 2 disposent d’un espace institutionnel sur l’entrepôt Recherche data gouv depuis mai 2023 et février 2024</a:t>
-            </a:r>
-            <a:br>
-              <a:rPr lang="fr" sz="1200"/>
-            </a:br>
-            <a:endParaRPr sz="1200"/>
-          </a:p>
-          <a:p>
-            <a:pPr indent="-304800" lvl="0" marL="457200" rtl="0" algn="l">
-              <a:lnSpc>
-                <a:spcPct val="95000"/>
-              </a:lnSpc>
-              <a:spcBef>
-                <a:spcPts val="0"/>
-              </a:spcBef>
-              <a:spcAft>
-                <a:spcPts val="0"/>
-              </a:spcAft>
-              <a:buSzPts val="1200"/>
-              <a:buChar char="➔"/>
-            </a:pPr>
-            <a:r>
-              <a:rPr lang="fr" sz="1200"/>
-              <a:t>Les collections de l’université Rennes 2 remontent dans l’espace Université de Rennes, comme pour HAL Université de Rennes</a:t>
-            </a:r>
-            <a:endParaRPr sz="1200"/>
-          </a:p>
-          <a:p>
-            <a:pPr indent="0" lvl="0" marL="457200" rtl="0" algn="l">
-              <a:lnSpc>
-                <a:spcPct val="95000"/>
-              </a:lnSpc>
+              <a:buNone/>
+            </a:pPr>
+            <a:r>
+              <a:t/>
+            </a:r>
+            <a:endParaRPr/>
+          </a:p>
+          <a:p>
+            <a:pPr indent="0" lvl="0" marL="0" rtl="0" algn="l">
               <a:spcBef>
                 <a:spcPts val="1200"/>
               </a:spcBef>
               <a:spcAft>
+                <a:spcPts val="0"/>
+              </a:spcAft>
+              <a:buNone/>
+            </a:pPr>
+            <a:r>
+              <a:t/>
+            </a:r>
+            <a:endParaRPr/>
+          </a:p>
+          <a:p>
+            <a:pPr indent="0" lvl="0" marL="0" rtl="0" algn="l">
+              <a:spcBef>
                 <a:spcPts val="1200"/>
+              </a:spcBef>
+              <a:spcAft>
+                <a:spcPts val="1200"/>
               </a:spcAft>
               <a:buNone/>
             </a:pPr>
             <a:r>
               <a:t/>
             </a:r>
-            <a:endParaRPr sz="1200"/>
+            <a:endParaRPr/>
           </a:p>
         </p:txBody>
       </p:sp>
       <p:sp>
         <p:nvSpPr>
-          <p:cNvPr id="350" name="Google Shape;350;p31"/>
+          <p:cNvPr id="354" name="Google Shape;354;p31"/>
           <p:cNvSpPr txBox="1"/>
           <p:nvPr>
             <p:ph idx="2" type="body"/>
@@ -17791,8 +17785,8 @@
         </p:nvSpPr>
         <p:spPr>
           <a:xfrm>
-            <a:off x="4889225" y="2163325"/>
-            <a:ext cx="3774300" cy="3183600"/>
+            <a:off x="4643600" y="1604075"/>
+            <a:ext cx="3774300" cy="3436200"/>
           </a:xfrm>
           <a:prstGeom prst="rect">
             <a:avLst/>
@@ -17815,9 +17809,9 @@
             </a:pPr>
             <a:r>
               <a:rPr b="1" lang="fr"/>
-              <a:t>Activités liées à l’entrepôt Recherche Data Gouv</a:t>
-            </a:r>
-            <a:endParaRPr b="1"/>
+              <a:t>Etude exploratoire d’opportunité sur le déploiement d’un cahier de laboratoire électronique à l’université Rennes 2</a:t>
+            </a:r>
+            <a:endParaRPr/>
           </a:p>
           <a:p>
             <a:pPr indent="-311150" lvl="0" marL="457200" rtl="0" algn="l">
@@ -17832,7 +17826,7 @@
             </a:pPr>
             <a:r>
               <a:rPr lang="fr"/>
-              <a:t>Administration des espaces Recherche Data Gouv</a:t>
+              <a:t>Enquête diffusée en juin dernier</a:t>
             </a:r>
             <a:endParaRPr/>
           </a:p>
@@ -17849,9 +17843,47 @@
             </a:pPr>
             <a:r>
               <a:rPr lang="fr"/>
-              <a:t>Curation des jeux de données (modération)</a:t>
+              <a:t>46 réponses qui :</a:t>
             </a:r>
             <a:endParaRPr/>
+          </a:p>
+          <a:p>
+            <a:pPr indent="-304800" lvl="1" marL="914400" rtl="0" algn="l">
+              <a:spcBef>
+                <a:spcPts val="0"/>
+              </a:spcBef>
+              <a:spcAft>
+                <a:spcPts val="0"/>
+              </a:spcAft>
+              <a:buSzPts val="1200"/>
+              <a:buChar char="◆"/>
+            </a:pPr>
+            <a:r>
+              <a:rPr lang="fr" sz="1200"/>
+              <a:t>montrent l’</a:t>
+            </a:r>
+            <a:r>
+              <a:rPr lang="fr" sz="1200"/>
+              <a:t>intérêt pour l’utilisation ou la découverte de cet outil</a:t>
+            </a:r>
+            <a:endParaRPr sz="1200"/>
+          </a:p>
+          <a:p>
+            <a:pPr indent="-304800" lvl="1" marL="914400" rtl="0" algn="l">
+              <a:spcBef>
+                <a:spcPts val="0"/>
+              </a:spcBef>
+              <a:spcAft>
+                <a:spcPts val="0"/>
+              </a:spcAft>
+              <a:buSzPts val="1200"/>
+              <a:buChar char="◆"/>
+            </a:pPr>
+            <a:r>
+              <a:rPr lang="fr" sz="1200"/>
+              <a:t>meilleure connaissance des logiciels de traitements de données utilisés</a:t>
+            </a:r>
+            <a:endParaRPr sz="1200"/>
           </a:p>
           <a:p>
             <a:pPr indent="-311150" lvl="0" marL="457200" rtl="0" algn="l">
@@ -17866,15 +17898,7 @@
             </a:pPr>
             <a:r>
               <a:rPr lang="fr"/>
-              <a:t>Formation  au dép</a:t>
-            </a:r>
-            <a:r>
-              <a:rPr lang="fr"/>
-              <a:t>ôt </a:t>
-            </a:r>
-            <a:r>
-              <a:rPr lang="fr"/>
-              <a:t>et présentation de Recherche Data Gouv.</a:t>
+              <a:t>Choix de la solution open source ElabFTW</a:t>
             </a:r>
             <a:endParaRPr/>
           </a:p>
@@ -17891,7 +17915,7 @@
             </a:pPr>
             <a:r>
               <a:rPr lang="fr"/>
-              <a:t> Assistance aux chercheurs pour le dépôt de leurs données</a:t>
+              <a:t>Propositions de formations</a:t>
             </a:r>
             <a:endParaRPr/>
           </a:p>
@@ -17908,188 +17932,12 @@
             </a:pPr>
             <a:r>
               <a:rPr lang="fr"/>
-              <a:t>Participation au développement du dataverse</a:t>
+              <a:t>Test avec un panel de chercheurs  envisagés à partir du printemps si projet validé en COSSINUM</a:t>
             </a:r>
             <a:endParaRPr/>
           </a:p>
         </p:txBody>
       </p:sp>
-      <p:pic>
-        <p:nvPicPr>
-          <p:cNvPr id="351" name="Google Shape;351;p31"/>
-          <p:cNvPicPr preferRelativeResize="0"/>
-          <p:nvPr/>
-        </p:nvPicPr>
-        <p:blipFill>
-          <a:blip r:embed="rId3">
-            <a:alphaModFix/>
-          </a:blip>
-          <a:stretch>
-            <a:fillRect/>
-          </a:stretch>
-        </p:blipFill>
-        <p:spPr>
-          <a:xfrm>
-            <a:off x="8211942" y="59200"/>
-            <a:ext cx="785032" cy="1148401"/>
-          </a:xfrm>
-          <a:prstGeom prst="rect">
-            <a:avLst/>
-          </a:prstGeom>
-          <a:noFill/>
-          <a:ln>
-            <a:noFill/>
-          </a:ln>
-        </p:spPr>
-      </p:pic>
-      <p:sp>
-        <p:nvSpPr>
-          <p:cNvPr id="352" name="Google Shape;352;p31"/>
-          <p:cNvSpPr txBox="1"/>
-          <p:nvPr>
-            <p:ph idx="1" type="body"/>
-          </p:nvPr>
-        </p:nvSpPr>
-        <p:spPr>
-          <a:xfrm>
-            <a:off x="143300" y="1339225"/>
-            <a:ext cx="8853600" cy="535200"/>
-          </a:xfrm>
-          <a:prstGeom prst="rect">
-            <a:avLst/>
-          </a:prstGeom>
-          <a:solidFill>
-            <a:schemeClr val="dk1"/>
-          </a:solidFill>
-        </p:spPr>
-        <p:txBody>
-          <a:bodyPr anchorCtr="0" anchor="t" bIns="91425" lIns="91425" spcFirstLastPara="1" rIns="91425" wrap="square" tIns="91425">
-            <a:noAutofit/>
-          </a:bodyPr>
-          <a:lstStyle/>
-          <a:p>
-            <a:pPr indent="0" lvl="0" marL="0" rtl="0" algn="ctr">
-              <a:spcBef>
-                <a:spcPts val="0"/>
-              </a:spcBef>
-              <a:spcAft>
-                <a:spcPts val="0"/>
-              </a:spcAft>
-              <a:buNone/>
-            </a:pPr>
-            <a:r>
-              <a:rPr lang="fr" sz="1400">
-                <a:solidFill>
-                  <a:schemeClr val="lt1"/>
-                </a:solidFill>
-              </a:rPr>
-              <a:t>Un entrepôt pensé en subsidiarité par rapport aux entrepôts disciplinaires existants</a:t>
-            </a:r>
-            <a:endParaRPr sz="1500">
-              <a:solidFill>
-                <a:schemeClr val="lt1"/>
-              </a:solidFill>
-              <a:latin typeface="Arial"/>
-              <a:ea typeface="Arial"/>
-              <a:cs typeface="Arial"/>
-              <a:sym typeface="Arial"/>
-            </a:endParaRPr>
-          </a:p>
-          <a:p>
-            <a:pPr indent="0" lvl="0" marL="0" rtl="0" algn="ctr">
-              <a:spcBef>
-                <a:spcPts val="1200"/>
-              </a:spcBef>
-              <a:spcAft>
-                <a:spcPts val="0"/>
-              </a:spcAft>
-              <a:buNone/>
-            </a:pPr>
-            <a:r>
-              <a:t/>
-            </a:r>
-            <a:endParaRPr>
-              <a:solidFill>
-                <a:schemeClr val="lt1"/>
-              </a:solidFill>
-            </a:endParaRPr>
-          </a:p>
-          <a:p>
-            <a:pPr indent="0" lvl="0" marL="0" rtl="0" algn="ctr">
-              <a:lnSpc>
-                <a:spcPct val="75000"/>
-              </a:lnSpc>
-              <a:spcBef>
-                <a:spcPts val="1200"/>
-              </a:spcBef>
-              <a:spcAft>
-                <a:spcPts val="0"/>
-              </a:spcAft>
-              <a:buSzPts val="275"/>
-              <a:buNone/>
-            </a:pPr>
-            <a:r>
-              <a:t/>
-            </a:r>
-            <a:endParaRPr sz="1400">
-              <a:solidFill>
-                <a:schemeClr val="lt1"/>
-              </a:solidFill>
-            </a:endParaRPr>
-          </a:p>
-          <a:p>
-            <a:pPr indent="0" lvl="0" marL="0" rtl="0" algn="l">
-              <a:lnSpc>
-                <a:spcPct val="95000"/>
-              </a:lnSpc>
-              <a:spcBef>
-                <a:spcPts val="0"/>
-              </a:spcBef>
-              <a:spcAft>
-                <a:spcPts val="1200"/>
-              </a:spcAft>
-              <a:buSzPts val="275"/>
-              <a:buNone/>
-            </a:pPr>
-            <a:r>
-              <a:t/>
-            </a:r>
-            <a:endParaRPr sz="1400">
-              <a:solidFill>
-                <a:schemeClr val="lt1"/>
-              </a:solidFill>
-            </a:endParaRPr>
-          </a:p>
-        </p:txBody>
-      </p:sp>
-      <p:pic>
-        <p:nvPicPr>
-          <p:cNvPr id="353" name="Google Shape;353;p31"/>
-          <p:cNvPicPr preferRelativeResize="0"/>
-          <p:nvPr/>
-        </p:nvPicPr>
-        <p:blipFill>
-          <a:blip r:embed="rId4">
-            <a:alphaModFix/>
-          </a:blip>
-          <a:stretch>
-            <a:fillRect/>
-          </a:stretch>
-        </p:blipFill>
-        <p:spPr>
-          <a:xfrm>
-            <a:off x="818825" y="510887"/>
-            <a:ext cx="626749" cy="626749"/>
-          </a:xfrm>
-          <a:prstGeom prst="rect">
-            <a:avLst/>
-          </a:prstGeom>
-          <a:noFill/>
-          <a:ln>
-            <a:noFill/>
-          </a:ln>
-        </p:spPr>
-      </p:pic>
     </p:spTree>
   </p:cSld>
   <p:clrMapOvr>
@@ -18838,7 +18686,7 @@
   <p:cSld>
     <p:spTree>
       <p:nvGrpSpPr>
-        <p:cNvPr id="357" name="Shape 357"/>
+        <p:cNvPr id="358" name="Shape 358"/>
         <p:cNvGrpSpPr/>
         <p:nvPr/>
       </p:nvGrpSpPr>
@@ -18852,7 +18700,7 @@
       </p:grpSpPr>
       <p:sp>
         <p:nvSpPr>
-          <p:cNvPr id="358" name="Google Shape;358;p32"/>
+          <p:cNvPr id="359" name="Google Shape;359;p32"/>
           <p:cNvSpPr txBox="1"/>
           <p:nvPr>
             <p:ph type="title"/>
@@ -18860,8 +18708,8 @@
         </p:nvSpPr>
         <p:spPr>
           <a:xfrm>
-            <a:off x="729450" y="404250"/>
-            <a:ext cx="7688400" cy="535200"/>
+            <a:off x="730000" y="404250"/>
+            <a:ext cx="3300900" cy="719100"/>
           </a:xfrm>
           <a:prstGeom prst="rect">
             <a:avLst/>
@@ -18884,142 +18732,7 @@
             </a:pPr>
             <a:r>
               <a:rPr lang="fr"/>
-              <a:t>Projet de déploiement de cahiers de laboratoires électroniques</a:t>
-            </a:r>
-            <a:endParaRPr/>
-          </a:p>
-        </p:txBody>
-      </p:sp>
-      <p:sp>
-        <p:nvSpPr>
-          <p:cNvPr id="359" name="Google Shape;359;p32"/>
-          <p:cNvSpPr txBox="1"/>
-          <p:nvPr>
-            <p:ph idx="1" type="body"/>
-          </p:nvPr>
-        </p:nvSpPr>
-        <p:spPr>
-          <a:xfrm>
-            <a:off x="729450" y="1604075"/>
-            <a:ext cx="3774300" cy="3330600"/>
-          </a:xfrm>
-          <a:prstGeom prst="rect">
-            <a:avLst/>
-          </a:prstGeom>
-        </p:spPr>
-        <p:txBody>
-          <a:bodyPr anchorCtr="0" anchor="t" bIns="91425" lIns="91425" spcFirstLastPara="1" rIns="91425" wrap="square" tIns="91425">
-            <a:normAutofit lnSpcReduction="20000"/>
-          </a:bodyPr>
-          <a:lstStyle/>
-          <a:p>
-            <a:pPr indent="0" lvl="0" marL="0" rtl="0" algn="l">
-              <a:spcBef>
-                <a:spcPts val="0"/>
-              </a:spcBef>
-              <a:spcAft>
-                <a:spcPts val="0"/>
-              </a:spcAft>
-              <a:buNone/>
-            </a:pPr>
-            <a:r>
-              <a:rPr b="1" lang="fr"/>
-              <a:t>Version électronique du cahier de laboratoire papier </a:t>
-            </a:r>
-            <a:r>
-              <a:rPr lang="fr"/>
-              <a:t>(j</a:t>
-            </a:r>
-            <a:r>
-              <a:rPr lang="fr"/>
-              <a:t>ournal de bord utilisé pour détailler au quotidien les activités liées aux projets de recherche )</a:t>
-            </a:r>
-            <a:endParaRPr/>
-          </a:p>
-          <a:p>
-            <a:pPr indent="-311150" lvl="0" marL="457200" rtl="0" algn="l">
-              <a:spcBef>
-                <a:spcPts val="1000"/>
-              </a:spcBef>
-              <a:spcAft>
-                <a:spcPts val="0"/>
-              </a:spcAft>
-              <a:buSzPts val="1300"/>
-              <a:buChar char="➔"/>
-            </a:pPr>
-            <a:r>
-              <a:rPr lang="fr"/>
-              <a:t>Outil stratégique essentiel qui s’inscrit pleinement dans une démarche de science ouverte et de </a:t>
-            </a:r>
-            <a:r>
-              <a:rPr b="1" lang="fr"/>
-              <a:t>reproductibilité</a:t>
-            </a:r>
-            <a:r>
-              <a:rPr lang="fr"/>
-              <a:t> de la recherche.</a:t>
-            </a:r>
-            <a:endParaRPr/>
-          </a:p>
-          <a:p>
-            <a:pPr indent="-311150" lvl="0" marL="457200" rtl="0" algn="l">
-              <a:spcBef>
-                <a:spcPts val="0"/>
-              </a:spcBef>
-              <a:spcAft>
-                <a:spcPts val="0"/>
-              </a:spcAft>
-              <a:buSzPts val="1300"/>
-              <a:buChar char="➔"/>
-            </a:pPr>
-            <a:r>
-              <a:rPr lang="fr"/>
-              <a:t>Montée en compétence, développement d’une expertise au sein de l’atelier ARDoISE</a:t>
-            </a:r>
-            <a:endParaRPr/>
-          </a:p>
-          <a:p>
-            <a:pPr indent="0" lvl="0" marL="0" rtl="0" algn="l">
-              <a:spcBef>
-                <a:spcPts val="1200"/>
-              </a:spcBef>
-              <a:spcAft>
-                <a:spcPts val="0"/>
-              </a:spcAft>
-              <a:buNone/>
-            </a:pPr>
-            <a:r>
-              <a:t/>
-            </a:r>
-            <a:endParaRPr/>
-          </a:p>
-          <a:p>
-            <a:pPr indent="0" lvl="0" marL="0" rtl="0" algn="l">
-              <a:spcBef>
-                <a:spcPts val="1200"/>
-              </a:spcBef>
-              <a:spcAft>
-                <a:spcPts val="0"/>
-              </a:spcAft>
-              <a:buNone/>
-            </a:pPr>
-            <a:r>
-              <a:t/>
-            </a:r>
-            <a:endParaRPr/>
-          </a:p>
-          <a:p>
-            <a:pPr indent="0" lvl="0" marL="0" rtl="0" algn="l">
-              <a:spcBef>
-                <a:spcPts val="1200"/>
-              </a:spcBef>
-              <a:spcAft>
-                <a:spcPts val="1200"/>
-              </a:spcAft>
-              <a:buNone/>
-            </a:pPr>
-            <a:r>
-              <a:t/>
+              <a:t>Un espace recherche</a:t>
             </a:r>
             <a:endParaRPr/>
           </a:p>
@@ -19030,13 +18743,13 @@
           <p:cNvPr id="360" name="Google Shape;360;p32"/>
           <p:cNvSpPr txBox="1"/>
           <p:nvPr>
-            <p:ph idx="2" type="body"/>
+            <p:ph idx="1" type="body"/>
           </p:nvPr>
         </p:nvSpPr>
         <p:spPr>
           <a:xfrm>
-            <a:off x="4643600" y="1604075"/>
-            <a:ext cx="3774300" cy="3436200"/>
+            <a:off x="721225" y="1237525"/>
+            <a:ext cx="3300900" cy="1872900"/>
           </a:xfrm>
           <a:prstGeom prst="rect">
             <a:avLst/>
@@ -19044,7 +18757,7 @@
         </p:spPr>
         <p:txBody>
           <a:bodyPr anchorCtr="0" anchor="t" bIns="91425" lIns="91425" spcFirstLastPara="1" rIns="91425" wrap="square" tIns="91425">
-            <a:normAutofit/>
+            <a:normAutofit lnSpcReduction="20000"/>
           </a:bodyPr>
           <a:lstStyle/>
           <a:p>
@@ -19058,133 +18771,370 @@
               <a:buNone/>
             </a:pPr>
             <a:r>
-              <a:rPr b="1" lang="fr"/>
-              <a:t>Etude exploratoire d’opportunité sur le déploiement d’un cahier de laboratoire électronique à l’université Rennes 2</a:t>
+              <a:rPr lang="fr"/>
+              <a:t>Situé dans la BU centrale de l’université Rennes 2 sur le campus Villejean</a:t>
             </a:r>
             <a:endParaRPr/>
           </a:p>
           <a:p>
-            <a:pPr indent="-311150" lvl="0" marL="457200" rtl="0" algn="l">
+            <a:pPr indent="0" lvl="0" marL="0" rtl="0" algn="l">
               <a:spcBef>
                 <a:spcPts val="1200"/>
               </a:spcBef>
               <a:spcAft>
                 <a:spcPts val="0"/>
               </a:spcAft>
-              <a:buSzPts val="1300"/>
+              <a:buNone/>
+            </a:pPr>
+            <a:r>
+              <a:rPr lang="fr"/>
+              <a:t>Ouverture le 15 janvier 2024</a:t>
+            </a:r>
+            <a:endParaRPr/>
+          </a:p>
+          <a:p>
+            <a:pPr indent="0" lvl="0" marL="0" rtl="0" algn="l">
+              <a:spcBef>
+                <a:spcPts val="1200"/>
+              </a:spcBef>
+              <a:spcAft>
+                <a:spcPts val="1200"/>
+              </a:spcAft>
+              <a:buNone/>
+            </a:pPr>
+            <a:r>
+              <a:rPr lang="fr"/>
+              <a:t>Dans</a:t>
+            </a:r>
+            <a:r>
+              <a:rPr lang="fr"/>
+              <a:t> le cadre du projet des Learning Centres métropolitains, un espace physique dédié aux chercheurs et doctorants.</a:t>
+            </a:r>
+            <a:endParaRPr sz="1100">
+              <a:solidFill>
+                <a:srgbClr val="000000"/>
+              </a:solidFill>
+            </a:endParaRPr>
+          </a:p>
+        </p:txBody>
+      </p:sp>
+      <p:pic>
+        <p:nvPicPr>
+          <p:cNvPr id="361" name="Google Shape;361;p32"/>
+          <p:cNvPicPr preferRelativeResize="0"/>
+          <p:nvPr/>
+        </p:nvPicPr>
+        <p:blipFill>
+          <a:blip r:embed="rId3">
+            <a:alphaModFix/>
+          </a:blip>
+          <a:stretch>
+            <a:fillRect/>
+          </a:stretch>
+        </p:blipFill>
+        <p:spPr>
+          <a:xfrm>
+            <a:off x="4183300" y="152400"/>
+            <a:ext cx="4808299" cy="2302606"/>
+          </a:xfrm>
+          <a:prstGeom prst="rect">
+            <a:avLst/>
+          </a:prstGeom>
+          <a:noFill/>
+          <a:ln>
+            <a:noFill/>
+          </a:ln>
+        </p:spPr>
+      </p:pic>
+      <p:pic>
+        <p:nvPicPr>
+          <p:cNvPr id="362" name="Google Shape;362;p32"/>
+          <p:cNvPicPr preferRelativeResize="0"/>
+          <p:nvPr/>
+        </p:nvPicPr>
+        <p:blipFill>
+          <a:blip r:embed="rId4">
+            <a:alphaModFix/>
+          </a:blip>
+          <a:stretch>
+            <a:fillRect/>
+          </a:stretch>
+        </p:blipFill>
+        <p:spPr>
+          <a:xfrm>
+            <a:off x="4183300" y="2579476"/>
+            <a:ext cx="4808299" cy="2411625"/>
+          </a:xfrm>
+          <a:prstGeom prst="rect">
+            <a:avLst/>
+          </a:prstGeom>
+          <a:noFill/>
+          <a:ln>
+            <a:noFill/>
+          </a:ln>
+        </p:spPr>
+      </p:pic>
+      <p:sp>
+        <p:nvSpPr>
+          <p:cNvPr id="363" name="Google Shape;363;p32"/>
+          <p:cNvSpPr txBox="1"/>
+          <p:nvPr/>
+        </p:nvSpPr>
+        <p:spPr>
+          <a:xfrm>
+            <a:off x="290150" y="2994650"/>
+            <a:ext cx="3732000" cy="2106300"/>
+          </a:xfrm>
+          <a:prstGeom prst="rect">
+            <a:avLst/>
+          </a:prstGeom>
+          <a:solidFill>
+            <a:schemeClr val="dk1"/>
+          </a:solidFill>
+          <a:ln>
+            <a:noFill/>
+          </a:ln>
+        </p:spPr>
+        <p:txBody>
+          <a:bodyPr anchorCtr="0" anchor="t" bIns="91425" lIns="91425" spcFirstLastPara="1" rIns="91425" wrap="square" tIns="91425">
+            <a:spAutoFit/>
+          </a:bodyPr>
+          <a:lstStyle/>
+          <a:p>
+            <a:pPr indent="-298450" lvl="0" marL="457200" rtl="0" algn="l">
+              <a:lnSpc>
+                <a:spcPct val="115000"/>
+              </a:lnSpc>
+              <a:spcBef>
+                <a:spcPts val="0"/>
+              </a:spcBef>
+              <a:spcAft>
+                <a:spcPts val="0"/>
+              </a:spcAft>
+              <a:buClr>
+                <a:schemeClr val="lt1"/>
+              </a:buClr>
+              <a:buSzPts val="1100"/>
+              <a:buFont typeface="Lato"/>
               <a:buChar char="➔"/>
             </a:pPr>
             <a:r>
-              <a:rPr lang="fr"/>
-              <a:t>Enquête diffusée en juin dernier</a:t>
-            </a:r>
-            <a:endParaRPr/>
-          </a:p>
-          <a:p>
-            <a:pPr indent="-311150" lvl="0" marL="457200" rtl="0" algn="l">
-              <a:spcBef>
-                <a:spcPts val="0"/>
-              </a:spcBef>
-              <a:spcAft>
-                <a:spcPts val="0"/>
-              </a:spcAft>
-              <a:buSzPts val="1300"/>
+              <a:rPr lang="fr" sz="1100">
+                <a:solidFill>
+                  <a:schemeClr val="lt1"/>
+                </a:solidFill>
+                <a:latin typeface="Lato"/>
+                <a:ea typeface="Lato"/>
+                <a:cs typeface="Lato"/>
+                <a:sym typeface="Lato"/>
+              </a:rPr>
+              <a:t>Un espace  d’accueil et de travail convivial en libre accès avec </a:t>
+            </a:r>
+            <a:endParaRPr sz="1100">
+              <a:solidFill>
+                <a:schemeClr val="lt1"/>
+              </a:solidFill>
+              <a:latin typeface="Lato"/>
+              <a:ea typeface="Lato"/>
+              <a:cs typeface="Lato"/>
+              <a:sym typeface="Lato"/>
+            </a:endParaRPr>
+          </a:p>
+          <a:p>
+            <a:pPr indent="-298450" lvl="1" marL="914400" rtl="0" algn="l">
+              <a:lnSpc>
+                <a:spcPct val="115000"/>
+              </a:lnSpc>
+              <a:spcBef>
+                <a:spcPts val="0"/>
+              </a:spcBef>
+              <a:spcAft>
+                <a:spcPts val="0"/>
+              </a:spcAft>
+              <a:buClr>
+                <a:schemeClr val="lt1"/>
+              </a:buClr>
+              <a:buSzPts val="1100"/>
+              <a:buFont typeface="Lato"/>
+              <a:buChar char="◆"/>
+            </a:pPr>
+            <a:r>
+              <a:rPr lang="fr" sz="1100">
+                <a:solidFill>
+                  <a:schemeClr val="lt1"/>
+                </a:solidFill>
+                <a:latin typeface="Lato"/>
+                <a:ea typeface="Lato"/>
+                <a:cs typeface="Lato"/>
+                <a:sym typeface="Lato"/>
+              </a:rPr>
+              <a:t>2 salles de travail en groupe équipées et réservables</a:t>
+            </a:r>
+            <a:endParaRPr sz="1100">
+              <a:solidFill>
+                <a:schemeClr val="lt1"/>
+              </a:solidFill>
+              <a:latin typeface="Lato"/>
+              <a:ea typeface="Lato"/>
+              <a:cs typeface="Lato"/>
+              <a:sym typeface="Lato"/>
+            </a:endParaRPr>
+          </a:p>
+          <a:p>
+            <a:pPr indent="-298450" lvl="1" marL="914400" rtl="0" algn="l">
+              <a:lnSpc>
+                <a:spcPct val="115000"/>
+              </a:lnSpc>
+              <a:spcBef>
+                <a:spcPts val="0"/>
+              </a:spcBef>
+              <a:spcAft>
+                <a:spcPts val="0"/>
+              </a:spcAft>
+              <a:buClr>
+                <a:schemeClr val="lt1"/>
+              </a:buClr>
+              <a:buSzPts val="1100"/>
+              <a:buFont typeface="Lato"/>
+              <a:buChar char="◆"/>
+            </a:pPr>
+            <a:r>
+              <a:rPr lang="fr" sz="1100">
+                <a:solidFill>
+                  <a:schemeClr val="lt1"/>
+                </a:solidFill>
+                <a:latin typeface="Lato"/>
+                <a:ea typeface="Lato"/>
+                <a:cs typeface="Lato"/>
+                <a:sym typeface="Lato"/>
+              </a:rPr>
+              <a:t>postes dédiés au travail sur les données</a:t>
+            </a:r>
+            <a:endParaRPr sz="1100">
+              <a:solidFill>
+                <a:schemeClr val="lt1"/>
+              </a:solidFill>
+              <a:latin typeface="Lato"/>
+              <a:ea typeface="Lato"/>
+              <a:cs typeface="Lato"/>
+              <a:sym typeface="Lato"/>
+            </a:endParaRPr>
+          </a:p>
+          <a:p>
+            <a:pPr indent="-298450" lvl="0" marL="457200" rtl="0" algn="l">
+              <a:lnSpc>
+                <a:spcPct val="115000"/>
+              </a:lnSpc>
+              <a:spcBef>
+                <a:spcPts val="0"/>
+              </a:spcBef>
+              <a:spcAft>
+                <a:spcPts val="0"/>
+              </a:spcAft>
+              <a:buClr>
+                <a:schemeClr val="lt1"/>
+              </a:buClr>
+              <a:buSzPts val="1100"/>
+              <a:buFont typeface="Lato"/>
               <a:buChar char="➔"/>
             </a:pPr>
             <a:r>
-              <a:rPr lang="fr"/>
-              <a:t>46 réponses qui :</a:t>
-            </a:r>
-            <a:endParaRPr/>
-          </a:p>
-          <a:p>
-            <a:pPr indent="-304800" lvl="1" marL="914400" rtl="0" algn="l">
-              <a:spcBef>
-                <a:spcPts val="0"/>
-              </a:spcBef>
-              <a:spcAft>
-                <a:spcPts val="0"/>
-              </a:spcAft>
-              <a:buSzPts val="1200"/>
-              <a:buChar char="◆"/>
-            </a:pPr>
-            <a:r>
-              <a:rPr lang="fr" sz="1200"/>
-              <a:t>montrent l’</a:t>
-            </a:r>
-            <a:r>
-              <a:rPr lang="fr" sz="1200"/>
-              <a:t>intérêt pour l’utilisation ou la découverte de cet outil</a:t>
-            </a:r>
-            <a:endParaRPr sz="1200"/>
-          </a:p>
-          <a:p>
-            <a:pPr indent="-304800" lvl="1" marL="914400" rtl="0" algn="l">
-              <a:spcBef>
-                <a:spcPts val="0"/>
-              </a:spcBef>
-              <a:spcAft>
-                <a:spcPts val="0"/>
-              </a:spcAft>
-              <a:buSzPts val="1200"/>
-              <a:buChar char="◆"/>
-            </a:pPr>
-            <a:r>
-              <a:rPr lang="fr" sz="1200"/>
-              <a:t>meilleure connaissance des logiciels de traitements de données utilisés</a:t>
-            </a:r>
-            <a:endParaRPr sz="1200"/>
-          </a:p>
-          <a:p>
-            <a:pPr indent="-311150" lvl="0" marL="457200" rtl="0" algn="l">
-              <a:spcBef>
-                <a:spcPts val="0"/>
-              </a:spcBef>
-              <a:spcAft>
-                <a:spcPts val="0"/>
-              </a:spcAft>
-              <a:buSzPts val="1300"/>
+              <a:rPr lang="fr" sz="1100">
+                <a:solidFill>
+                  <a:schemeClr val="lt1"/>
+                </a:solidFill>
+                <a:latin typeface="Lato"/>
+                <a:ea typeface="Lato"/>
+                <a:cs typeface="Lato"/>
+                <a:sym typeface="Lato"/>
+              </a:rPr>
+              <a:t>Espace d’animation, de formations et de présentations</a:t>
+            </a:r>
+            <a:endParaRPr sz="1100">
+              <a:solidFill>
+                <a:schemeClr val="lt1"/>
+              </a:solidFill>
+              <a:latin typeface="Lato"/>
+              <a:ea typeface="Lato"/>
+              <a:cs typeface="Lato"/>
+              <a:sym typeface="Lato"/>
+            </a:endParaRPr>
+          </a:p>
+          <a:p>
+            <a:pPr indent="-298450" lvl="0" marL="457200" rtl="0" algn="l">
+              <a:lnSpc>
+                <a:spcPct val="115000"/>
+              </a:lnSpc>
+              <a:spcBef>
+                <a:spcPts val="0"/>
+              </a:spcBef>
+              <a:spcAft>
+                <a:spcPts val="0"/>
+              </a:spcAft>
+              <a:buClr>
+                <a:schemeClr val="lt1"/>
+              </a:buClr>
+              <a:buSzPts val="1100"/>
+              <a:buFont typeface="Lato"/>
               <a:buChar char="➔"/>
             </a:pPr>
             <a:r>
-              <a:rPr lang="fr"/>
-              <a:t>Choix de la solution open source ElabFTW</a:t>
-            </a:r>
-            <a:endParaRPr/>
-          </a:p>
-          <a:p>
-            <a:pPr indent="-311150" lvl="0" marL="457200" rtl="0" algn="l">
-              <a:spcBef>
-                <a:spcPts val="0"/>
-              </a:spcBef>
-              <a:spcAft>
-                <a:spcPts val="0"/>
-              </a:spcAft>
-              <a:buSzPts val="1300"/>
+              <a:rPr lang="fr" sz="1100">
+                <a:solidFill>
+                  <a:schemeClr val="lt1"/>
+                </a:solidFill>
+                <a:latin typeface="Lato"/>
+                <a:ea typeface="Lato"/>
+                <a:cs typeface="Lato"/>
+                <a:sym typeface="Lato"/>
+              </a:rPr>
+              <a:t>Bureau du Datalab MSHB Rennes</a:t>
+            </a:r>
+            <a:endParaRPr sz="1100">
+              <a:solidFill>
+                <a:schemeClr val="lt1"/>
+              </a:solidFill>
+              <a:latin typeface="Lato"/>
+              <a:ea typeface="Lato"/>
+              <a:cs typeface="Lato"/>
+              <a:sym typeface="Lato"/>
+            </a:endParaRPr>
+          </a:p>
+          <a:p>
+            <a:pPr indent="-298450" lvl="0" marL="457200" rtl="0" algn="l">
+              <a:lnSpc>
+                <a:spcPct val="115000"/>
+              </a:lnSpc>
+              <a:spcBef>
+                <a:spcPts val="0"/>
+              </a:spcBef>
+              <a:spcAft>
+                <a:spcPts val="0"/>
+              </a:spcAft>
+              <a:buClr>
+                <a:schemeClr val="lt1"/>
+              </a:buClr>
+              <a:buSzPts val="1100"/>
+              <a:buFont typeface="Lato"/>
               <a:buChar char="➔"/>
             </a:pPr>
             <a:r>
-              <a:rPr lang="fr"/>
-              <a:t>Propositions de formations</a:t>
-            </a:r>
-            <a:endParaRPr/>
-          </a:p>
-          <a:p>
-            <a:pPr indent="-311150" lvl="0" marL="457200" rtl="0" algn="l">
-              <a:spcBef>
-                <a:spcPts val="0"/>
-              </a:spcBef>
-              <a:spcAft>
-                <a:spcPts val="0"/>
-              </a:spcAft>
-              <a:buSzPts val="1300"/>
-              <a:buChar char="➔"/>
-            </a:pPr>
-            <a:r>
-              <a:rPr lang="fr"/>
-              <a:t>Test avec un panel de chercheurs  envisagés à partir du printemps si projet validé en COSSINUM</a:t>
-            </a:r>
-            <a:endParaRPr/>
+              <a:rPr lang="fr" sz="1100">
+                <a:solidFill>
+                  <a:schemeClr val="lt1"/>
+                </a:solidFill>
+                <a:latin typeface="Lato"/>
+                <a:ea typeface="Lato"/>
+                <a:cs typeface="Lato"/>
+                <a:sym typeface="Lato"/>
+              </a:rPr>
+              <a:t>Permanences d’accueil autour des questions de recherche, des données et de la science ouverte</a:t>
+            </a:r>
+            <a:endParaRPr>
+              <a:solidFill>
+                <a:schemeClr val="lt1"/>
+              </a:solidFill>
+            </a:endParaRPr>
           </a:p>
         </p:txBody>
       </p:sp>
@@ -19201,7 +19151,7 @@
   <p:cSld>
     <p:spTree>
       <p:nvGrpSpPr>
-        <p:cNvPr id="364" name="Shape 364"/>
+        <p:cNvPr id="367" name="Shape 367"/>
         <p:cNvGrpSpPr/>
         <p:nvPr/>
       </p:nvGrpSpPr>
@@ -19215,7 +19165,7 @@
       </p:grpSpPr>
       <p:sp>
         <p:nvSpPr>
-          <p:cNvPr id="365" name="Google Shape;365;p33"/>
+          <p:cNvPr id="368" name="Google Shape;368;p33"/>
           <p:cNvSpPr txBox="1"/>
           <p:nvPr>
             <p:ph type="title"/>
@@ -19223,8 +19173,8 @@
         </p:nvSpPr>
         <p:spPr>
           <a:xfrm>
-            <a:off x="730000" y="404250"/>
-            <a:ext cx="3300900" cy="719100"/>
+            <a:off x="758900" y="1265625"/>
+            <a:ext cx="7688700" cy="535200"/>
           </a:xfrm>
           <a:prstGeom prst="rect">
             <a:avLst/>
@@ -19247,7 +19197,7 @@
             </a:pPr>
             <a:r>
               <a:rPr lang="fr"/>
-              <a:t>Un espace recherche</a:t>
+              <a:t>Perspectives 2024</a:t>
             </a:r>
             <a:endParaRPr/>
           </a:p>
@@ -19255,7 +19205,7 @@
       </p:sp>
       <p:sp>
         <p:nvSpPr>
-          <p:cNvPr id="366" name="Google Shape;366;p33"/>
+          <p:cNvPr id="369" name="Google Shape;369;p33"/>
           <p:cNvSpPr txBox="1"/>
           <p:nvPr>
             <p:ph idx="1" type="body"/>
@@ -19263,8 +19213,8 @@
         </p:nvSpPr>
         <p:spPr>
           <a:xfrm>
-            <a:off x="721225" y="1237525"/>
-            <a:ext cx="3300900" cy="1872900"/>
+            <a:off x="729450" y="2078875"/>
+            <a:ext cx="7688700" cy="2860800"/>
           </a:xfrm>
           <a:prstGeom prst="rect">
             <a:avLst/>
@@ -19272,70 +19222,167 @@
         </p:spPr>
         <p:txBody>
           <a:bodyPr anchorCtr="0" anchor="t" bIns="91425" lIns="91425" spcFirstLastPara="1" rIns="91425" wrap="square" tIns="91425">
-            <a:normAutofit lnSpcReduction="20000"/>
+            <a:normAutofit/>
           </a:bodyPr>
           <a:lstStyle/>
           <a:p>
-            <a:pPr indent="0" lvl="0" marL="0" rtl="0" algn="l">
-              <a:spcBef>
-                <a:spcPts val="0"/>
-              </a:spcBef>
-              <a:spcAft>
-                <a:spcPts val="0"/>
-              </a:spcAft>
-              <a:buNone/>
-            </a:pPr>
-            <a:r>
-              <a:rPr lang="fr"/>
-              <a:t>Situé dans la BU centrale de l’université Rennes 2 sur le campus Villejean</a:t>
-            </a:r>
-            <a:endParaRPr/>
-          </a:p>
-          <a:p>
-            <a:pPr indent="0" lvl="0" marL="0" rtl="0" algn="l">
-              <a:spcBef>
-                <a:spcPts val="1200"/>
-              </a:spcBef>
-              <a:spcAft>
-                <a:spcPts val="0"/>
-              </a:spcAft>
-              <a:buNone/>
-            </a:pPr>
-            <a:r>
-              <a:rPr lang="fr"/>
-              <a:t>Ouvert depuis le 15 janvier 2024</a:t>
-            </a:r>
-            <a:endParaRPr/>
-          </a:p>
-          <a:p>
-            <a:pPr indent="0" lvl="0" marL="0" rtl="0" algn="l">
-              <a:spcBef>
-                <a:spcPts val="1200"/>
-              </a:spcBef>
-              <a:spcAft>
-                <a:spcPts val="1200"/>
-              </a:spcAft>
-              <a:buNone/>
-            </a:pPr>
-            <a:r>
-              <a:rPr lang="fr"/>
-              <a:t>Dans</a:t>
-            </a:r>
-            <a:r>
-              <a:rPr lang="fr"/>
-              <a:t> le cadre du projet des Learning Centres métropolitains, un espace physique dédié aux chercheurs et doctorants.</a:t>
-            </a:r>
-            <a:endParaRPr sz="1100">
-              <a:solidFill>
-                <a:srgbClr val="000000"/>
-              </a:solidFill>
-            </a:endParaRPr>
+            <a:pPr indent="-323850" lvl="0" marL="457200" rtl="0" algn="l">
+              <a:spcBef>
+                <a:spcPts val="0"/>
+              </a:spcBef>
+              <a:spcAft>
+                <a:spcPts val="0"/>
+              </a:spcAft>
+              <a:buSzPts val="1500"/>
+              <a:buChar char="●"/>
+            </a:pPr>
+            <a:r>
+              <a:rPr lang="fr" sz="1500"/>
+              <a:t>Mise en place de la gouvernance de l’atelier</a:t>
+            </a:r>
+            <a:endParaRPr sz="1500"/>
+          </a:p>
+          <a:p>
+            <a:pPr indent="-323850" lvl="0" marL="457200" rtl="0" algn="l">
+              <a:spcBef>
+                <a:spcPts val="0"/>
+              </a:spcBef>
+              <a:spcAft>
+                <a:spcPts val="0"/>
+              </a:spcAft>
+              <a:buSzPts val="1500"/>
+              <a:buChar char="●"/>
+            </a:pPr>
+            <a:r>
+              <a:rPr lang="fr" sz="1500"/>
+              <a:t>Consolidation des partenariats</a:t>
+            </a:r>
+            <a:endParaRPr sz="1500"/>
+          </a:p>
+          <a:p>
+            <a:pPr indent="-323850" lvl="0" marL="457200" rtl="0" algn="l">
+              <a:spcBef>
+                <a:spcPts val="0"/>
+              </a:spcBef>
+              <a:spcAft>
+                <a:spcPts val="0"/>
+              </a:spcAft>
+              <a:buSzPts val="1500"/>
+              <a:buChar char="●"/>
+            </a:pPr>
+            <a:r>
+              <a:rPr lang="fr" sz="1500"/>
+              <a:t>Ouverture de l’espace institutionnel Rennes 2 sur l’entrepôt Recherche Data Gouv</a:t>
+            </a:r>
+            <a:endParaRPr sz="1500"/>
+          </a:p>
+          <a:p>
+            <a:pPr indent="-323850" lvl="0" marL="457200" rtl="0" algn="l">
+              <a:spcBef>
+                <a:spcPts val="0"/>
+              </a:spcBef>
+              <a:spcAft>
+                <a:spcPts val="0"/>
+              </a:spcAft>
+              <a:buSzPts val="1500"/>
+              <a:buChar char="●"/>
+            </a:pPr>
+            <a:r>
+              <a:rPr lang="fr" sz="1500"/>
+              <a:t>Développement d’un réseau de référents représentants des usagers</a:t>
+            </a:r>
+            <a:endParaRPr sz="1500"/>
+          </a:p>
+          <a:p>
+            <a:pPr indent="-323850" lvl="0" marL="457200" rtl="0" algn="l">
+              <a:spcBef>
+                <a:spcPts val="0"/>
+              </a:spcBef>
+              <a:spcAft>
+                <a:spcPts val="0"/>
+              </a:spcAft>
+              <a:buSzPts val="1500"/>
+              <a:buChar char="●"/>
+            </a:pPr>
+            <a:r>
+              <a:rPr lang="fr" sz="1500"/>
+              <a:t>Mise en place d’outils de communication </a:t>
+            </a:r>
+            <a:endParaRPr sz="1500"/>
+          </a:p>
+          <a:p>
+            <a:pPr indent="-323850" lvl="0" marL="457200" rtl="0" algn="l">
+              <a:spcBef>
+                <a:spcPts val="0"/>
+              </a:spcBef>
+              <a:spcAft>
+                <a:spcPts val="0"/>
+              </a:spcAft>
+              <a:buSzPts val="1500"/>
+              <a:buChar char="●"/>
+            </a:pPr>
+            <a:r>
+              <a:rPr lang="fr" sz="1500"/>
+              <a:t>Renforcement de l’offre de services et proposition de nouveaux services</a:t>
+            </a:r>
+            <a:endParaRPr sz="1500"/>
+          </a:p>
+          <a:p>
+            <a:pPr indent="-323850" lvl="1" marL="914400" rtl="0" algn="l">
+              <a:spcBef>
+                <a:spcPts val="0"/>
+              </a:spcBef>
+              <a:spcAft>
+                <a:spcPts val="0"/>
+              </a:spcAft>
+              <a:buSzPts val="1500"/>
+              <a:buChar char="○"/>
+            </a:pPr>
+            <a:r>
+              <a:rPr lang="fr" sz="1500"/>
+              <a:t>Accompagnement à la gestion des codes sources et logiciels et à la fouille de données</a:t>
+            </a:r>
+            <a:endParaRPr sz="1500"/>
+          </a:p>
+          <a:p>
+            <a:pPr indent="-323850" lvl="1" marL="914400" rtl="0" algn="l">
+              <a:spcBef>
+                <a:spcPts val="0"/>
+              </a:spcBef>
+              <a:spcAft>
+                <a:spcPts val="0"/>
+              </a:spcAft>
+              <a:buSzPts val="1500"/>
+              <a:buChar char="○"/>
+            </a:pPr>
+            <a:r>
+              <a:rPr lang="fr" sz="1500"/>
+              <a:t>Déploiement d’un cahier de laboratoire électronique</a:t>
+            </a:r>
+            <a:endParaRPr sz="1500"/>
+          </a:p>
+          <a:p>
+            <a:pPr indent="-323850" lvl="0" marL="457200" rtl="0" algn="l">
+              <a:spcBef>
+                <a:spcPts val="0"/>
+              </a:spcBef>
+              <a:spcAft>
+                <a:spcPts val="0"/>
+              </a:spcAft>
+              <a:buSzPts val="1500"/>
+              <a:buChar char="●"/>
+            </a:pPr>
+            <a:r>
+              <a:rPr lang="fr" sz="1500"/>
+              <a:t>Nouvelle candidature à la labellisation Recherche Data Gouv </a:t>
+            </a:r>
+            <a:endParaRPr sz="1500"/>
           </a:p>
         </p:txBody>
       </p:sp>
       <p:pic>
         <p:nvPicPr>
-          <p:cNvPr id="367" name="Google Shape;367;p33"/>
+          <p:cNvPr id="370" name="Google Shape;370;p33"/>
           <p:cNvPicPr preferRelativeResize="0"/>
           <p:nvPr/>
         </p:nvPicPr>
@@ -19349,8 +19396,8 @@
         </p:blipFill>
         <p:spPr>
           <a:xfrm>
-            <a:off x="4183300" y="152400"/>
-            <a:ext cx="4808299" cy="2302606"/>
+            <a:off x="8211942" y="59200"/>
+            <a:ext cx="785032" cy="1148401"/>
           </a:xfrm>
           <a:prstGeom prst="rect">
             <a:avLst/>
@@ -19361,298 +19408,6 @@
           </a:ln>
         </p:spPr>
       </p:pic>
-      <p:pic>
-        <p:nvPicPr>
-          <p:cNvPr id="368" name="Google Shape;368;p33"/>
-          <p:cNvPicPr preferRelativeResize="0"/>
-          <p:nvPr/>
-        </p:nvPicPr>
-        <p:blipFill>
-          <a:blip r:embed="rId4">
-            <a:alphaModFix/>
-          </a:blip>
-          <a:stretch>
-            <a:fillRect/>
-          </a:stretch>
-        </p:blipFill>
-        <p:spPr>
-          <a:xfrm>
-            <a:off x="4183300" y="2579476"/>
-            <a:ext cx="4808299" cy="2411625"/>
-          </a:xfrm>
-          <a:prstGeom prst="rect">
-            <a:avLst/>
-          </a:prstGeom>
-          <a:noFill/>
-          <a:ln>
-            <a:noFill/>
-          </a:ln>
-        </p:spPr>
-      </p:pic>
-      <p:sp>
-        <p:nvSpPr>
-          <p:cNvPr id="369" name="Google Shape;369;p33"/>
-          <p:cNvSpPr txBox="1"/>
-          <p:nvPr/>
-        </p:nvSpPr>
-        <p:spPr>
-          <a:xfrm>
-            <a:off x="290150" y="2994650"/>
-            <a:ext cx="3732000" cy="2106300"/>
-          </a:xfrm>
-          <a:prstGeom prst="rect">
-            <a:avLst/>
-          </a:prstGeom>
-          <a:solidFill>
-            <a:schemeClr val="dk1"/>
-          </a:solidFill>
-          <a:ln>
-            <a:noFill/>
-          </a:ln>
-        </p:spPr>
-        <p:txBody>
-          <a:bodyPr anchorCtr="0" anchor="t" bIns="91425" lIns="91425" spcFirstLastPara="1" rIns="91425" wrap="square" tIns="91425">
-            <a:spAutoFit/>
-          </a:bodyPr>
-          <a:lstStyle/>
-          <a:p>
-            <a:pPr indent="-298450" lvl="0" marL="457200" rtl="0" algn="l">
-              <a:lnSpc>
-                <a:spcPct val="115000"/>
-              </a:lnSpc>
-              <a:spcBef>
-                <a:spcPts val="0"/>
-              </a:spcBef>
-              <a:spcAft>
-                <a:spcPts val="0"/>
-              </a:spcAft>
-              <a:buClr>
-                <a:schemeClr val="lt1"/>
-              </a:buClr>
-              <a:buSzPts val="1100"/>
-              <a:buFont typeface="Lato"/>
-              <a:buChar char="➔"/>
-            </a:pPr>
-            <a:r>
-              <a:rPr lang="fr" sz="1100">
-                <a:solidFill>
-                  <a:schemeClr val="lt1"/>
-                </a:solidFill>
-                <a:latin typeface="Lato"/>
-                <a:ea typeface="Lato"/>
-                <a:cs typeface="Lato"/>
-                <a:sym typeface="Lato"/>
-              </a:rPr>
-              <a:t>Un espace  d’accueil et de travail convivial en libre accès avec </a:t>
-            </a:r>
-            <a:endParaRPr sz="1100">
-              <a:solidFill>
-                <a:schemeClr val="lt1"/>
-              </a:solidFill>
-              <a:latin typeface="Lato"/>
-              <a:ea typeface="Lato"/>
-              <a:cs typeface="Lato"/>
-              <a:sym typeface="Lato"/>
-            </a:endParaRPr>
-          </a:p>
-          <a:p>
-            <a:pPr indent="-298450" lvl="1" marL="914400" rtl="0" algn="l">
-              <a:lnSpc>
-                <a:spcPct val="115000"/>
-              </a:lnSpc>
-              <a:spcBef>
-                <a:spcPts val="0"/>
-              </a:spcBef>
-              <a:spcAft>
-                <a:spcPts val="0"/>
-              </a:spcAft>
-              <a:buClr>
-                <a:schemeClr val="lt1"/>
-              </a:buClr>
-              <a:buSzPts val="1100"/>
-              <a:buFont typeface="Lato"/>
-              <a:buChar char="◆"/>
-            </a:pPr>
-            <a:r>
-              <a:rPr lang="fr" sz="1100">
-                <a:solidFill>
-                  <a:schemeClr val="lt1"/>
-                </a:solidFill>
-                <a:latin typeface="Lato"/>
-                <a:ea typeface="Lato"/>
-                <a:cs typeface="Lato"/>
-                <a:sym typeface="Lato"/>
-              </a:rPr>
-              <a:t>2 salles de travail en groupe équipées et réservables</a:t>
-            </a:r>
-            <a:endParaRPr sz="1100">
-              <a:solidFill>
-                <a:schemeClr val="lt1"/>
-              </a:solidFill>
-              <a:latin typeface="Lato"/>
-              <a:ea typeface="Lato"/>
-              <a:cs typeface="Lato"/>
-              <a:sym typeface="Lato"/>
-            </a:endParaRPr>
-          </a:p>
-          <a:p>
-            <a:pPr indent="-298450" lvl="1" marL="914400" rtl="0" algn="l">
-              <a:lnSpc>
-                <a:spcPct val="115000"/>
-              </a:lnSpc>
-              <a:spcBef>
-                <a:spcPts val="0"/>
-              </a:spcBef>
-              <a:spcAft>
-                <a:spcPts val="0"/>
-              </a:spcAft>
-              <a:buClr>
-                <a:schemeClr val="lt1"/>
-              </a:buClr>
-              <a:buSzPts val="1100"/>
-              <a:buFont typeface="Lato"/>
-              <a:buChar char="◆"/>
-            </a:pPr>
-            <a:r>
-              <a:rPr lang="fr" sz="1100">
-                <a:solidFill>
-                  <a:schemeClr val="lt1"/>
-                </a:solidFill>
-                <a:latin typeface="Lato"/>
-                <a:ea typeface="Lato"/>
-                <a:cs typeface="Lato"/>
-                <a:sym typeface="Lato"/>
-              </a:rPr>
-              <a:t>postes dédiés au travail sur les données</a:t>
-            </a:r>
-            <a:endParaRPr sz="1100">
-              <a:solidFill>
-                <a:schemeClr val="lt1"/>
-              </a:solidFill>
-              <a:latin typeface="Lato"/>
-              <a:ea typeface="Lato"/>
-              <a:cs typeface="Lato"/>
-              <a:sym typeface="Lato"/>
-            </a:endParaRPr>
-          </a:p>
-          <a:p>
-            <a:pPr indent="-298450" lvl="0" marL="457200" rtl="0" algn="l">
-              <a:lnSpc>
-                <a:spcPct val="115000"/>
-              </a:lnSpc>
-              <a:spcBef>
-                <a:spcPts val="0"/>
-              </a:spcBef>
-              <a:spcAft>
-                <a:spcPts val="0"/>
-              </a:spcAft>
-              <a:buClr>
-                <a:schemeClr val="lt1"/>
-              </a:buClr>
-              <a:buSzPts val="1100"/>
-              <a:buFont typeface="Lato"/>
-              <a:buChar char="➔"/>
-            </a:pPr>
-            <a:r>
-              <a:rPr lang="fr" sz="1100">
-                <a:solidFill>
-                  <a:schemeClr val="lt1"/>
-                </a:solidFill>
-                <a:latin typeface="Lato"/>
-                <a:ea typeface="Lato"/>
-                <a:cs typeface="Lato"/>
-                <a:sym typeface="Lato"/>
-              </a:rPr>
-              <a:t>Espace d’animation, de formations et de présentations</a:t>
-            </a:r>
-            <a:endParaRPr sz="1100">
-              <a:solidFill>
-                <a:schemeClr val="lt1"/>
-              </a:solidFill>
-              <a:latin typeface="Lato"/>
-              <a:ea typeface="Lato"/>
-              <a:cs typeface="Lato"/>
-              <a:sym typeface="Lato"/>
-            </a:endParaRPr>
-          </a:p>
-          <a:p>
-            <a:pPr indent="-298450" lvl="0" marL="457200" rtl="0" algn="l">
-              <a:lnSpc>
-                <a:spcPct val="115000"/>
-              </a:lnSpc>
-              <a:spcBef>
-                <a:spcPts val="0"/>
-              </a:spcBef>
-              <a:spcAft>
-                <a:spcPts val="0"/>
-              </a:spcAft>
-              <a:buClr>
-                <a:schemeClr val="lt1"/>
-              </a:buClr>
-              <a:buSzPts val="1100"/>
-              <a:buFont typeface="Lato"/>
-              <a:buChar char="➔"/>
-            </a:pPr>
-            <a:r>
-              <a:rPr lang="fr" sz="1100">
-                <a:solidFill>
-                  <a:schemeClr val="lt1"/>
-                </a:solidFill>
-                <a:latin typeface="Lato"/>
-                <a:ea typeface="Lato"/>
-                <a:cs typeface="Lato"/>
-                <a:sym typeface="Lato"/>
-              </a:rPr>
-              <a:t>Bureau du Datalab MSHB Rennes</a:t>
-            </a:r>
-            <a:endParaRPr sz="1100">
-              <a:solidFill>
-                <a:schemeClr val="lt1"/>
-              </a:solidFill>
-              <a:latin typeface="Lato"/>
-              <a:ea typeface="Lato"/>
-              <a:cs typeface="Lato"/>
-              <a:sym typeface="Lato"/>
-            </a:endParaRPr>
-          </a:p>
-          <a:p>
-            <a:pPr indent="-298450" lvl="0" marL="457200" rtl="0" algn="l">
-              <a:lnSpc>
-                <a:spcPct val="115000"/>
-              </a:lnSpc>
-              <a:spcBef>
-                <a:spcPts val="0"/>
-              </a:spcBef>
-              <a:spcAft>
-                <a:spcPts val="0"/>
-              </a:spcAft>
-              <a:buClr>
-                <a:schemeClr val="lt1"/>
-              </a:buClr>
-              <a:buSzPts val="1100"/>
-              <a:buFont typeface="Lato"/>
-              <a:buChar char="➔"/>
-            </a:pPr>
-            <a:r>
-              <a:rPr lang="fr" sz="1100">
-                <a:solidFill>
-                  <a:schemeClr val="lt1"/>
-                </a:solidFill>
-                <a:latin typeface="Lato"/>
-                <a:ea typeface="Lato"/>
-                <a:cs typeface="Lato"/>
-                <a:sym typeface="Lato"/>
-              </a:rPr>
-              <a:t>Permanences d’accueil autour des questions de recherche, des données et de la science ouverte</a:t>
-            </a:r>
-            <a:endParaRPr>
-              <a:solidFill>
-                <a:schemeClr val="lt1"/>
-              </a:solidFill>
-            </a:endParaRPr>
-          </a:p>
-        </p:txBody>
-      </p:sp>
     </p:spTree>
   </p:cSld>
   <p:clrMapOvr>
@@ -19666,7 +19421,7 @@
   <p:cSld>
     <p:spTree>
       <p:nvGrpSpPr>
-        <p:cNvPr id="373" name="Shape 373"/>
+        <p:cNvPr id="374" name="Shape 374"/>
         <p:cNvGrpSpPr/>
         <p:nvPr/>
       </p:nvGrpSpPr>
@@ -19680,277 +19435,7 @@
       </p:grpSpPr>
       <p:sp>
         <p:nvSpPr>
-          <p:cNvPr id="374" name="Google Shape;374;p34"/>
-          <p:cNvSpPr txBox="1"/>
-          <p:nvPr>
-            <p:ph type="title"/>
-          </p:nvPr>
-        </p:nvSpPr>
-        <p:spPr>
-          <a:xfrm>
-            <a:off x="758900" y="1265625"/>
-            <a:ext cx="7688700" cy="535200"/>
-          </a:xfrm>
-          <a:prstGeom prst="rect">
-            <a:avLst/>
-          </a:prstGeom>
-        </p:spPr>
-        <p:txBody>
-          <a:bodyPr anchorCtr="0" anchor="t" bIns="91425" lIns="91425" spcFirstLastPara="1" rIns="91425" wrap="square" tIns="91425">
-            <a:normAutofit fontScale="90000"/>
-          </a:bodyPr>
-          <a:lstStyle/>
-          <a:p>
-            <a:pPr indent="0" lvl="0" marL="0" rtl="0" algn="l">
-              <a:spcBef>
-                <a:spcPts val="0"/>
-              </a:spcBef>
-              <a:spcAft>
-                <a:spcPts val="0"/>
-              </a:spcAft>
-              <a:buNone/>
-            </a:pPr>
-            <a:r>
-              <a:rPr lang="fr"/>
-              <a:t>Perspectives 2024</a:t>
-            </a:r>
-            <a:endParaRPr/>
-          </a:p>
-        </p:txBody>
-      </p:sp>
-      <p:sp>
-        <p:nvSpPr>
           <p:cNvPr id="375" name="Google Shape;375;p34"/>
-          <p:cNvSpPr txBox="1"/>
-          <p:nvPr>
-            <p:ph idx="1" type="body"/>
-          </p:nvPr>
-        </p:nvSpPr>
-        <p:spPr>
-          <a:xfrm>
-            <a:off x="729450" y="2078875"/>
-            <a:ext cx="7688700" cy="2860800"/>
-          </a:xfrm>
-          <a:prstGeom prst="rect">
-            <a:avLst/>
-          </a:prstGeom>
-        </p:spPr>
-        <p:txBody>
-          <a:bodyPr anchorCtr="0" anchor="t" bIns="91425" lIns="91425" spcFirstLastPara="1" rIns="91425" wrap="square" tIns="91425">
-            <a:normAutofit/>
-          </a:bodyPr>
-          <a:lstStyle/>
-          <a:p>
-            <a:pPr indent="-323850" lvl="0" marL="457200" rtl="0" algn="l">
-              <a:spcBef>
-                <a:spcPts val="0"/>
-              </a:spcBef>
-              <a:spcAft>
-                <a:spcPts val="0"/>
-              </a:spcAft>
-              <a:buSzPts val="1500"/>
-              <a:buChar char="●"/>
-            </a:pPr>
-            <a:r>
-              <a:rPr lang="fr" sz="1500"/>
-              <a:t>Mise en place de la gouvernance de l’atelier</a:t>
-            </a:r>
-            <a:endParaRPr sz="1500"/>
-          </a:p>
-          <a:p>
-            <a:pPr indent="-323850" lvl="0" marL="457200" rtl="0" algn="l">
-              <a:spcBef>
-                <a:spcPts val="0"/>
-              </a:spcBef>
-              <a:spcAft>
-                <a:spcPts val="0"/>
-              </a:spcAft>
-              <a:buSzPts val="1500"/>
-              <a:buChar char="●"/>
-            </a:pPr>
-            <a:r>
-              <a:rPr lang="fr" sz="1500"/>
-              <a:t>Consolidation des partenariats</a:t>
-            </a:r>
-            <a:endParaRPr sz="1500"/>
-          </a:p>
-          <a:p>
-            <a:pPr indent="-323850" lvl="0" marL="457200" rtl="0" algn="l">
-              <a:spcBef>
-                <a:spcPts val="0"/>
-              </a:spcBef>
-              <a:spcAft>
-                <a:spcPts val="0"/>
-              </a:spcAft>
-              <a:buSzPts val="1500"/>
-              <a:buChar char="●"/>
-            </a:pPr>
-            <a:r>
-              <a:rPr lang="fr" sz="1500"/>
-              <a:t>Ouverture de l’espace institutionnel Rennes 2 sur l’entrepôt Recherche Data Gouv</a:t>
-            </a:r>
-            <a:endParaRPr sz="1500"/>
-          </a:p>
-          <a:p>
-            <a:pPr indent="-323850" lvl="0" marL="457200" rtl="0" algn="l">
-              <a:spcBef>
-                <a:spcPts val="0"/>
-              </a:spcBef>
-              <a:spcAft>
-                <a:spcPts val="0"/>
-              </a:spcAft>
-              <a:buSzPts val="1500"/>
-              <a:buChar char="●"/>
-            </a:pPr>
-            <a:r>
-              <a:rPr lang="fr" sz="1500"/>
-              <a:t>Développement d’un réseau de référents représentants des usagers</a:t>
-            </a:r>
-            <a:endParaRPr sz="1500"/>
-          </a:p>
-          <a:p>
-            <a:pPr indent="-323850" lvl="0" marL="457200" rtl="0" algn="l">
-              <a:spcBef>
-                <a:spcPts val="0"/>
-              </a:spcBef>
-              <a:spcAft>
-                <a:spcPts val="0"/>
-              </a:spcAft>
-              <a:buSzPts val="1500"/>
-              <a:buChar char="●"/>
-            </a:pPr>
-            <a:r>
-              <a:rPr lang="fr" sz="1500"/>
-              <a:t>Mise en place d’outils de communication </a:t>
-            </a:r>
-            <a:endParaRPr sz="1500"/>
-          </a:p>
-          <a:p>
-            <a:pPr indent="-323850" lvl="0" marL="457200" rtl="0" algn="l">
-              <a:spcBef>
-                <a:spcPts val="0"/>
-              </a:spcBef>
-              <a:spcAft>
-                <a:spcPts val="0"/>
-              </a:spcAft>
-              <a:buSzPts val="1500"/>
-              <a:buChar char="●"/>
-            </a:pPr>
-            <a:r>
-              <a:rPr lang="fr" sz="1500"/>
-              <a:t>Renforcement de l’offre de services et proposition de nouveaux services</a:t>
-            </a:r>
-            <a:endParaRPr sz="1500"/>
-          </a:p>
-          <a:p>
-            <a:pPr indent="-323850" lvl="1" marL="914400" rtl="0" algn="l">
-              <a:spcBef>
-                <a:spcPts val="0"/>
-              </a:spcBef>
-              <a:spcAft>
-                <a:spcPts val="0"/>
-              </a:spcAft>
-              <a:buSzPts val="1500"/>
-              <a:buChar char="○"/>
-            </a:pPr>
-            <a:r>
-              <a:rPr lang="fr" sz="1500"/>
-              <a:t>Accompagnement à la gestion des codes sources et logiciels et à la fouille de données</a:t>
-            </a:r>
-            <a:endParaRPr sz="1500"/>
-          </a:p>
-          <a:p>
-            <a:pPr indent="-323850" lvl="1" marL="914400" rtl="0" algn="l">
-              <a:spcBef>
-                <a:spcPts val="0"/>
-              </a:spcBef>
-              <a:spcAft>
-                <a:spcPts val="0"/>
-              </a:spcAft>
-              <a:buSzPts val="1500"/>
-              <a:buChar char="○"/>
-            </a:pPr>
-            <a:r>
-              <a:rPr lang="fr" sz="1500"/>
-              <a:t>Déploiement d’un cahier de laboratoire électronique</a:t>
-            </a:r>
-            <a:endParaRPr sz="1500"/>
-          </a:p>
-          <a:p>
-            <a:pPr indent="-323850" lvl="0" marL="457200" rtl="0" algn="l">
-              <a:spcBef>
-                <a:spcPts val="0"/>
-              </a:spcBef>
-              <a:spcAft>
-                <a:spcPts val="0"/>
-              </a:spcAft>
-              <a:buSzPts val="1500"/>
-              <a:buChar char="●"/>
-            </a:pPr>
-            <a:r>
-              <a:rPr lang="fr" sz="1500"/>
-              <a:t>Nouvelle candidature à la labellisation Recherche Data Gouv </a:t>
-            </a:r>
-            <a:endParaRPr sz="1500"/>
-          </a:p>
-        </p:txBody>
-      </p:sp>
-      <p:pic>
-        <p:nvPicPr>
-          <p:cNvPr id="376" name="Google Shape;376;p34"/>
-          <p:cNvPicPr preferRelativeResize="0"/>
-          <p:nvPr/>
-        </p:nvPicPr>
-        <p:blipFill>
-          <a:blip r:embed="rId3">
-            <a:alphaModFix/>
-          </a:blip>
-          <a:stretch>
-            <a:fillRect/>
-          </a:stretch>
-        </p:blipFill>
-        <p:spPr>
-          <a:xfrm>
-            <a:off x="8211942" y="59200"/>
-            <a:ext cx="785032" cy="1148401"/>
-          </a:xfrm>
-          <a:prstGeom prst="rect">
-            <a:avLst/>
-          </a:prstGeom>
-          <a:noFill/>
-          <a:ln>
-            <a:noFill/>
-          </a:ln>
-        </p:spPr>
-      </p:pic>
-    </p:spTree>
-  </p:cSld>
-  <p:clrMapOvr>
-    <a:masterClrMapping/>
-  </p:clrMapOvr>
-</p:sld>
-</file>
-
-<file path=ppt/slides/slide23.xml><?xml version="1.0" encoding="utf-8"?>
-<p:sld xmlns:a="http://schemas.openxmlformats.org/drawingml/2006/main" xmlns:r="http://schemas.openxmlformats.org/officeDocument/2006/relationships" xmlns:mc="http://schemas.openxmlformats.org/markup-compatibility/2006" xmlns:mv="urn:schemas-microsoft-com:mac:vml" xmlns:p="http://schemas.openxmlformats.org/presentationml/2006/main" xmlns:c="http://schemas.openxmlformats.org/drawingml/2006/chart" xmlns:dgm="http://schemas.openxmlformats.org/drawingml/2006/diagram" xmlns:o="urn:schemas-microsoft-com:office:office" xmlns:v="urn:schemas-microsoft-com:vml" xmlns:pvml="urn:schemas-microsoft-com:office:powerpoint" xmlns:com="http://schemas.openxmlformats.org/drawingml/2006/compatibility" xmlns:p14="http://schemas.microsoft.com/office/powerpoint/2010/main" xmlns:p15="http://schemas.microsoft.com/office/powerpoint/2012/main" xmlns:ahyp="http://schemas.microsoft.com/office/drawing/2018/hyperlinkcolor">
-  <p:cSld>
-    <p:spTree>
-      <p:nvGrpSpPr>
-        <p:cNvPr id="380" name="Shape 380"/>
-        <p:cNvGrpSpPr/>
-        <p:nvPr/>
-      </p:nvGrpSpPr>
-      <p:grpSpPr>
-        <a:xfrm>
-          <a:off x="0" y="0"/>
-          <a:ext cx="0" cy="0"/>
-          <a:chOff x="0" y="0"/>
-          <a:chExt cx="0" cy="0"/>
-        </a:xfrm>
-      </p:grpSpPr>
-      <p:sp>
-        <p:nvSpPr>
-          <p:cNvPr id="381" name="Google Shape;381;p35"/>
           <p:cNvSpPr txBox="1"/>
           <p:nvPr/>
         </p:nvSpPr>
@@ -20008,7 +19493,7 @@
       </p:sp>
       <p:sp>
         <p:nvSpPr>
-          <p:cNvPr id="382" name="Google Shape;382;p35"/>
+          <p:cNvPr id="376" name="Google Shape;376;p34"/>
           <p:cNvSpPr/>
           <p:nvPr/>
         </p:nvSpPr>
@@ -20131,7 +19616,7 @@
       </p:sp>
       <p:pic>
         <p:nvPicPr>
-          <p:cNvPr id="383" name="Google Shape;383;p35"/>
+          <p:cNvPr id="377" name="Google Shape;377;p34"/>
           <p:cNvPicPr preferRelativeResize="0"/>
           <p:nvPr/>
         </p:nvPicPr>
@@ -20159,7 +19644,7 @@
       </p:pic>
       <p:sp>
         <p:nvSpPr>
-          <p:cNvPr id="384" name="Google Shape;384;p35"/>
+          <p:cNvPr id="378" name="Google Shape;378;p34"/>
           <p:cNvSpPr txBox="1"/>
           <p:nvPr/>
         </p:nvSpPr>
